--- a/_paper_figures/paper_figures.pptx
+++ b/_paper_figures/paper_figures.pptx
@@ -10,7 +10,7 @@
     <p:sldId id="258" r:id="rId10"/>
     <p:sldId id="259" r:id="rId11"/>
   </p:sldIdLst>
-  <p:sldSz cx="9940290" cy="5433998" type="screen4x3"/>
+  <p:sldSz cx="9470129" cy="2989834" type="screen4x3"/>
   <p:notesSz cx="6858000" cy="9144000"/>
   <p:defaultTextStyle>
     <a:defPPr>
@@ -3737,8 +3737,8 @@
         </p:blipFill>
         <p:spPr>
           <a:xfrm>
-            <a:off x="246888" y="466344"/>
-            <a:ext cx="829056" cy="830580"/>
+            <a:off x="364236" y="336804"/>
+            <a:ext cx="790956" cy="790956"/>
           </a:xfrm>
           <a:prstGeom prst="rect">
             <a:avLst/>
@@ -3761,8 +3761,8 @@
         </p:blipFill>
         <p:spPr>
           <a:xfrm>
-            <a:off x="1085087" y="466344"/>
-            <a:ext cx="829056" cy="830580"/>
+            <a:off x="1162812" y="336804"/>
+            <a:ext cx="790956" cy="790956"/>
           </a:xfrm>
           <a:prstGeom prst="rect">
             <a:avLst/>
@@ -3785,8 +3785,8 @@
         </p:blipFill>
         <p:spPr>
           <a:xfrm>
-            <a:off x="1645920" y="1027176"/>
-            <a:ext cx="262128" cy="263652"/>
+            <a:off x="1697736" y="870204"/>
+            <a:ext cx="251460" cy="251460"/>
           </a:xfrm>
           <a:prstGeom prst="rect">
             <a:avLst/>
@@ -3809,8 +3809,8 @@
         </p:blipFill>
         <p:spPr>
           <a:xfrm>
-            <a:off x="1923288" y="466344"/>
-            <a:ext cx="829056" cy="830580"/>
+            <a:off x="1961388" y="336804"/>
+            <a:ext cx="790956" cy="790956"/>
           </a:xfrm>
           <a:prstGeom prst="rect">
             <a:avLst/>
@@ -3833,8 +3833,8 @@
         </p:blipFill>
         <p:spPr>
           <a:xfrm>
-            <a:off x="2484120" y="1027176"/>
-            <a:ext cx="262128" cy="263652"/>
+            <a:off x="2496312" y="870204"/>
+            <a:ext cx="251460" cy="251460"/>
           </a:xfrm>
           <a:prstGeom prst="rect">
             <a:avLst/>
@@ -3857,8 +3857,8 @@
         </p:blipFill>
         <p:spPr>
           <a:xfrm>
-            <a:off x="2761488" y="466344"/>
-            <a:ext cx="829056" cy="830580"/>
+            <a:off x="364236" y="1185672"/>
+            <a:ext cx="790956" cy="790956"/>
           </a:xfrm>
           <a:prstGeom prst="rect">
             <a:avLst/>
@@ -3881,8 +3881,8 @@
         </p:blipFill>
         <p:spPr>
           <a:xfrm>
-            <a:off x="3599688" y="466344"/>
-            <a:ext cx="829056" cy="830580"/>
+            <a:off x="1162812" y="1185672"/>
+            <a:ext cx="790956" cy="790956"/>
           </a:xfrm>
           <a:prstGeom prst="rect">
             <a:avLst/>
@@ -3905,8 +3905,8 @@
         </p:blipFill>
         <p:spPr>
           <a:xfrm>
-            <a:off x="4160520" y="1027176"/>
-            <a:ext cx="262128" cy="263652"/>
+            <a:off x="1697736" y="1720596"/>
+            <a:ext cx="251460" cy="251460"/>
           </a:xfrm>
           <a:prstGeom prst="rect">
             <a:avLst/>
@@ -3929,8 +3929,8 @@
         </p:blipFill>
         <p:spPr>
           <a:xfrm>
-            <a:off x="4437888" y="466344"/>
-            <a:ext cx="829056" cy="830580"/>
+            <a:off x="1961388" y="1185672"/>
+            <a:ext cx="790956" cy="790956"/>
           </a:xfrm>
           <a:prstGeom prst="rect">
             <a:avLst/>
@@ -3953,38 +3953,49 @@
         </p:blipFill>
         <p:spPr>
           <a:xfrm>
-            <a:off x="4998720" y="1027176"/>
-            <a:ext cx="262128" cy="263652"/>
+            <a:off x="2496312" y="1720596"/>
+            <a:ext cx="251460" cy="251460"/>
           </a:xfrm>
           <a:prstGeom prst="rect">
             <a:avLst/>
           </a:prstGeom>
         </p:spPr>
       </p:pic>
-      <p:pic>
-        <p:nvPicPr>
-          <p:cNvPr id="12" name="Picture 11" descr="reference_conditioning_figure.png"/>
-          <p:cNvPicPr>
-            <a:picLocks noChangeAspect="1"/>
-          </p:cNvPicPr>
-          <p:nvPr/>
-        </p:nvPicPr>
-        <p:blipFill>
-          <a:blip r:embed="rId12"/>
-          <a:stretch>
-            <a:fillRect/>
-          </a:stretch>
-        </p:blipFill>
-        <p:spPr>
-          <a:xfrm>
-            <a:off x="292608" y="350520"/>
-            <a:ext cx="4928616" cy="9144"/>
-          </a:xfrm>
-          <a:prstGeom prst="rect">
-            <a:avLst/>
-          </a:prstGeom>
-        </p:spPr>
-      </p:pic>
+      <p:sp>
+        <p:nvSpPr>
+          <p:cNvPr id="12" name="TextBox 11"/>
+          <p:cNvSpPr txBox="1"/>
+          <p:nvPr/>
+        </p:nvSpPr>
+        <p:spPr>
+          <a:xfrm rot="16200000">
+            <a:off x="204704" y="668295"/>
+            <a:ext cx="153820" cy="127000"/>
+          </a:xfrm>
+          <a:prstGeom prst="rect">
+            <a:avLst/>
+          </a:prstGeom>
+          <a:noFill/>
+        </p:spPr>
+        <p:txBody>
+          <a:bodyPr wrap="none" lIns="0" rIns="0" tIns="0" bIns="0" anchor="t">
+            <a:noAutofit/>
+          </a:bodyPr>
+          <a:lstStyle/>
+          <a:p>
+            <a:pPr algn="ctr"/>
+            <a:r>
+              <a:rPr sz="800" b="1" i="0">
+                <a:solidFill>
+                  <a:srgbClr val="000000"/>
+                </a:solidFill>
+                <a:latin typeface="Arial"/>
+              </a:rPr>
+              <a:t>AF</a:t>
+            </a:r>
+          </a:p>
+        </p:txBody>
+      </p:sp>
       <p:sp>
         <p:nvSpPr>
           <p:cNvPr id="13" name="TextBox 12"/>
@@ -3993,7 +4004,7 @@
         </p:nvSpPr>
         <p:spPr>
           <a:xfrm>
-            <a:off x="553350" y="352309"/>
+            <a:off x="651908" y="222678"/>
             <a:ext cx="216130" cy="111125"/>
           </a:xfrm>
           <a:prstGeom prst="rect">
@@ -4028,7 +4039,7 @@
         </p:nvSpPr>
         <p:spPr>
           <a:xfrm>
-            <a:off x="1302551" y="352309"/>
+            <a:off x="1361686" y="222678"/>
             <a:ext cx="394128" cy="111125"/>
           </a:xfrm>
           <a:prstGeom prst="rect">
@@ -4063,7 +4074,7 @@
         </p:nvSpPr>
         <p:spPr>
           <a:xfrm>
-            <a:off x="2143232" y="352309"/>
+            <a:off x="2162943" y="222678"/>
             <a:ext cx="389167" cy="111125"/>
           </a:xfrm>
           <a:prstGeom prst="rect">
@@ -4097,148 +4108,8 @@
           <p:nvPr/>
         </p:nvSpPr>
         <p:spPr>
-          <a:xfrm>
-            <a:off x="3067950" y="352309"/>
-            <a:ext cx="216130" cy="111125"/>
-          </a:xfrm>
-          <a:prstGeom prst="rect">
-            <a:avLst/>
-          </a:prstGeom>
-          <a:noFill/>
-        </p:spPr>
-        <p:txBody>
-          <a:bodyPr wrap="none" lIns="0" rIns="0" tIns="0" bIns="0" anchor="t">
-            <a:noAutofit/>
-          </a:bodyPr>
-          <a:lstStyle/>
-          <a:p>
-            <a:pPr algn="ctr"/>
-            <a:r>
-              <a:rPr sz="700" b="0" i="0">
-                <a:solidFill>
-                  <a:srgbClr val="000000"/>
-                </a:solidFill>
-                <a:latin typeface="Arial"/>
-              </a:rPr>
-              <a:t>Input</a:t>
-            </a:r>
-          </a:p>
-        </p:txBody>
-      </p:sp>
-      <p:sp>
-        <p:nvSpPr>
-          <p:cNvPr id="17" name="TextBox 16"/>
-          <p:cNvSpPr txBox="1"/>
-          <p:nvPr/>
-        </p:nvSpPr>
-        <p:spPr>
-          <a:xfrm>
-            <a:off x="3817151" y="352309"/>
-            <a:ext cx="394128" cy="111125"/>
-          </a:xfrm>
-          <a:prstGeom prst="rect">
-            <a:avLst/>
-          </a:prstGeom>
-          <a:noFill/>
-        </p:spPr>
-        <p:txBody>
-          <a:bodyPr wrap="none" lIns="0" rIns="0" tIns="0" bIns="0" anchor="t">
-            <a:noAutofit/>
-          </a:bodyPr>
-          <a:lstStyle/>
-          <a:p>
-            <a:pPr algn="ctr"/>
-            <a:r>
-              <a:rPr sz="700" b="0" i="0">
-                <a:solidFill>
-                  <a:srgbClr val="000000"/>
-                </a:solidFill>
-                <a:latin typeface="Arial"/>
-              </a:rPr>
-              <a:t>ED target</a:t>
-            </a:r>
-          </a:p>
-        </p:txBody>
-      </p:sp>
-      <p:sp>
-        <p:nvSpPr>
-          <p:cNvPr id="18" name="TextBox 17"/>
-          <p:cNvSpPr txBox="1"/>
-          <p:nvPr/>
-        </p:nvSpPr>
-        <p:spPr>
-          <a:xfrm>
-            <a:off x="4657832" y="352309"/>
-            <a:ext cx="389167" cy="111125"/>
-          </a:xfrm>
-          <a:prstGeom prst="rect">
-            <a:avLst/>
-          </a:prstGeom>
-          <a:noFill/>
-        </p:spPr>
-        <p:txBody>
-          <a:bodyPr wrap="none" lIns="0" rIns="0" tIns="0" bIns="0" anchor="t">
-            <a:noAutofit/>
-          </a:bodyPr>
-          <a:lstStyle/>
-          <a:p>
-            <a:pPr algn="ctr"/>
-            <a:r>
-              <a:rPr sz="700" b="0" i="0">
-                <a:solidFill>
-                  <a:srgbClr val="000000"/>
-                </a:solidFill>
-                <a:latin typeface="Arial"/>
-              </a:rPr>
-              <a:t>ES target</a:t>
-            </a:r>
-          </a:p>
-        </p:txBody>
-      </p:sp>
-      <p:sp>
-        <p:nvSpPr>
-          <p:cNvPr id="19" name="TextBox 18"/>
-          <p:cNvSpPr txBox="1"/>
-          <p:nvPr/>
-        </p:nvSpPr>
-        <p:spPr>
-          <a:xfrm>
-            <a:off x="1422705" y="218114"/>
-            <a:ext cx="153820" cy="127000"/>
-          </a:xfrm>
-          <a:prstGeom prst="rect">
-            <a:avLst/>
-          </a:prstGeom>
-          <a:noFill/>
-        </p:spPr>
-        <p:txBody>
-          <a:bodyPr wrap="none" lIns="0" rIns="0" tIns="0" bIns="0" anchor="t">
-            <a:noAutofit/>
-          </a:bodyPr>
-          <a:lstStyle/>
-          <a:p>
-            <a:pPr algn="ctr"/>
-            <a:r>
-              <a:rPr sz="800" b="1" i="0">
-                <a:solidFill>
-                  <a:srgbClr val="000000"/>
-                </a:solidFill>
-                <a:latin typeface="Arial"/>
-              </a:rPr>
-              <a:t>AF</a:t>
-            </a:r>
-          </a:p>
-        </p:txBody>
-      </p:sp>
-      <p:sp>
-        <p:nvSpPr>
-          <p:cNvPr id="20" name="TextBox 19"/>
-          <p:cNvSpPr txBox="1"/>
-          <p:nvPr/>
-        </p:nvSpPr>
-        <p:spPr>
-          <a:xfrm>
-            <a:off x="3898511" y="218114"/>
+          <a:xfrm rot="16200000">
+            <a:off x="165909" y="1518070"/>
             <a:ext cx="231409" cy="127000"/>
           </a:xfrm>
           <a:prstGeom prst="rect">
@@ -4300,7 +4171,7 @@
         <p:spPr>
           <a:xfrm>
             <a:off x="697992" y="627888"/>
-            <a:ext cx="1594104" cy="1650492"/>
+            <a:ext cx="1594104" cy="1101852"/>
           </a:xfrm>
           <a:prstGeom prst="rect">
             <a:avLst/>
@@ -4324,7 +4195,7 @@
         <p:spPr>
           <a:xfrm>
             <a:off x="2950464" y="627888"/>
-            <a:ext cx="1594104" cy="1650492"/>
+            <a:ext cx="1594104" cy="1101852"/>
           </a:xfrm>
           <a:prstGeom prst="rect">
             <a:avLst/>
@@ -4348,7 +4219,7 @@
         <p:spPr>
           <a:xfrm>
             <a:off x="5268468" y="627888"/>
-            <a:ext cx="1595628" cy="1650492"/>
+            <a:ext cx="1595628" cy="1101852"/>
           </a:xfrm>
           <a:prstGeom prst="rect">
             <a:avLst/>
@@ -4372,7 +4243,7 @@
         <p:spPr>
           <a:xfrm>
             <a:off x="7520940" y="627888"/>
-            <a:ext cx="1595628" cy="1650492"/>
+            <a:ext cx="1595628" cy="1101852"/>
           </a:xfrm>
           <a:prstGeom prst="rect">
             <a:avLst/>
@@ -4411,7 +4282,7 @@
         </p:nvSpPr>
         <p:spPr>
           <a:xfrm>
-            <a:off x="674589" y="2280037"/>
+            <a:off x="674589" y="1731397"/>
             <a:ext cx="241133" cy="200025"/>
           </a:xfrm>
           <a:prstGeom prst="rect">
@@ -4446,7 +4317,7 @@
         </p:nvSpPr>
         <p:spPr>
           <a:xfrm>
-            <a:off x="1080846" y="2280037"/>
+            <a:off x="1080846" y="1731397"/>
             <a:ext cx="107386" cy="200025"/>
           </a:xfrm>
           <a:prstGeom prst="rect">
@@ -4481,7 +4352,7 @@
         </p:nvSpPr>
         <p:spPr>
           <a:xfrm>
-            <a:off x="1375681" y="2280037"/>
+            <a:off x="1375681" y="1731397"/>
             <a:ext cx="196484" cy="200025"/>
           </a:xfrm>
           <a:prstGeom prst="rect">
@@ -4516,7 +4387,7 @@
         </p:nvSpPr>
         <p:spPr>
           <a:xfrm>
-            <a:off x="1670516" y="2280037"/>
+            <a:off x="1670516" y="1731397"/>
             <a:ext cx="285583" cy="200025"/>
           </a:xfrm>
           <a:prstGeom prst="rect">
@@ -4551,7 +4422,7 @@
         </p:nvSpPr>
         <p:spPr>
           <a:xfrm>
-            <a:off x="1965350" y="2280037"/>
+            <a:off x="1965350" y="1731397"/>
             <a:ext cx="374681" cy="200025"/>
           </a:xfrm>
           <a:prstGeom prst="rect">
@@ -4586,7 +4457,7 @@
         </p:nvSpPr>
         <p:spPr>
           <a:xfrm>
-            <a:off x="1034335" y="2470101"/>
+            <a:off x="1034335" y="1921461"/>
             <a:ext cx="961659" cy="228600"/>
           </a:xfrm>
           <a:prstGeom prst="rect">
@@ -4621,7 +4492,7 @@
         </p:nvSpPr>
         <p:spPr>
           <a:xfrm>
-            <a:off x="546298" y="2132003"/>
+            <a:off x="546298" y="1583363"/>
             <a:ext cx="107386" cy="200025"/>
           </a:xfrm>
           <a:prstGeom prst="rect">
@@ -4656,7 +4527,655 @@
         </p:nvSpPr>
         <p:spPr>
           <a:xfrm>
-            <a:off x="546298" y="1811894"/>
+            <a:off x="457200" y="1162601"/>
+            <a:ext cx="196484" cy="200025"/>
+          </a:xfrm>
+          <a:prstGeom prst="rect">
+            <a:avLst/>
+          </a:prstGeom>
+          <a:noFill/>
+        </p:spPr>
+        <p:txBody>
+          <a:bodyPr wrap="none" lIns="0" rIns="0" tIns="0" bIns="0" anchor="t">
+            <a:noAutofit/>
+          </a:bodyPr>
+          <a:lstStyle/>
+          <a:p>
+            <a:pPr algn="r"/>
+            <a:r>
+              <a:rPr sz="1260" b="0" i="0">
+                <a:solidFill>
+                  <a:srgbClr val="1A1A1A"/>
+                </a:solidFill>
+                <a:latin typeface="Arial"/>
+              </a:rPr>
+              <a:t>10</a:t>
+            </a:r>
+          </a:p>
+        </p:txBody>
+      </p:sp>
+      <p:sp>
+        <p:nvSpPr>
+          <p:cNvPr id="15" name="TextBox 14"/>
+          <p:cNvSpPr txBox="1"/>
+          <p:nvPr/>
+        </p:nvSpPr>
+        <p:spPr>
+          <a:xfrm>
+            <a:off x="457200" y="741839"/>
+            <a:ext cx="196484" cy="200025"/>
+          </a:xfrm>
+          <a:prstGeom prst="rect">
+            <a:avLst/>
+          </a:prstGeom>
+          <a:noFill/>
+        </p:spPr>
+        <p:txBody>
+          <a:bodyPr wrap="none" lIns="0" rIns="0" tIns="0" bIns="0" anchor="t">
+            <a:noAutofit/>
+          </a:bodyPr>
+          <a:lstStyle/>
+          <a:p>
+            <a:pPr algn="r"/>
+            <a:r>
+              <a:rPr sz="1260" b="0" i="0">
+                <a:solidFill>
+                  <a:srgbClr val="1A1A1A"/>
+                </a:solidFill>
+                <a:latin typeface="Arial"/>
+              </a:rPr>
+              <a:t>20</a:t>
+            </a:r>
+          </a:p>
+        </p:txBody>
+      </p:sp>
+      <p:sp>
+        <p:nvSpPr>
+          <p:cNvPr id="16" name="TextBox 15"/>
+          <p:cNvSpPr txBox="1"/>
+          <p:nvPr/>
+        </p:nvSpPr>
+        <p:spPr>
+          <a:xfrm rot="16200000">
+            <a:off x="-135635" y="1043996"/>
+            <a:ext cx="907288" cy="228600"/>
+          </a:xfrm>
+          <a:prstGeom prst="rect">
+            <a:avLst/>
+          </a:prstGeom>
+          <a:noFill/>
+        </p:spPr>
+        <p:txBody>
+          <a:bodyPr wrap="none" lIns="0" rIns="0" tIns="0" bIns="0" anchor="t">
+            <a:noAutofit/>
+          </a:bodyPr>
+          <a:lstStyle/>
+          <a:p>
+            <a:pPr algn="ctr"/>
+            <a:r>
+              <a:rPr sz="1440" b="0" i="0">
+                <a:solidFill>
+                  <a:srgbClr val="000000"/>
+                </a:solidFill>
+                <a:latin typeface="Arial"/>
+              </a:rPr>
+              <a:t>VTC err. </a:t>
+            </a:r>
+            <a:r>
+              <a:rPr sz="1440" b="0" i="0">
+                <a:solidFill>
+                  <a:srgbClr val="000000"/>
+                </a:solidFill>
+                <a:latin typeface="Arial"/>
+              </a:rPr>
+              <a:t>↓</a:t>
+            </a:r>
+          </a:p>
+        </p:txBody>
+      </p:sp>
+      <p:sp>
+        <p:nvSpPr>
+          <p:cNvPr id="17" name="TextBox 16"/>
+          <p:cNvSpPr txBox="1"/>
+          <p:nvPr/>
+        </p:nvSpPr>
+        <p:spPr>
+          <a:xfrm>
+            <a:off x="922726" y="732725"/>
+            <a:ext cx="709247" cy="171450"/>
+          </a:xfrm>
+          <a:prstGeom prst="rect">
+            <a:avLst/>
+          </a:prstGeom>
+          <a:noFill/>
+        </p:spPr>
+        <p:txBody>
+          <a:bodyPr wrap="none" lIns="0" rIns="0" tIns="0" bIns="0" anchor="t">
+            <a:noAutofit/>
+          </a:bodyPr>
+          <a:lstStyle/>
+          <a:p>
+            <a:pPr algn="l"/>
+            <a:r>
+              <a:rPr sz="1080" b="0" i="0">
+                <a:solidFill>
+                  <a:srgbClr val="1A1A1A"/>
+                </a:solidFill>
+                <a:latin typeface="Arial"/>
+              </a:rPr>
+              <a:t>Dangi et al.</a:t>
+            </a:r>
+          </a:p>
+        </p:txBody>
+      </p:sp>
+      <p:sp>
+        <p:nvSpPr>
+          <p:cNvPr id="18" name="TextBox 17"/>
+          <p:cNvSpPr txBox="1"/>
+          <p:nvPr/>
+        </p:nvSpPr>
+        <p:spPr>
+          <a:xfrm>
+            <a:off x="1459703" y="1153385"/>
+            <a:ext cx="602488" cy="171450"/>
+          </a:xfrm>
+          <a:prstGeom prst="rect">
+            <a:avLst/>
+          </a:prstGeom>
+          <a:noFill/>
+        </p:spPr>
+        <p:txBody>
+          <a:bodyPr wrap="none" lIns="0" rIns="0" tIns="0" bIns="0" anchor="t">
+            <a:noAutofit/>
+          </a:bodyPr>
+          <a:lstStyle/>
+          <a:p>
+            <a:pPr algn="ctr"/>
+            <a:r>
+              <a:rPr sz="1080" b="0" i="0">
+                <a:solidFill>
+                  <a:srgbClr val="1A1A1A"/>
+                </a:solidFill>
+                <a:latin typeface="Arial"/>
+              </a:rPr>
+              <a:t>CiNeVol</a:t>
+            </a:r>
+            <a:r>
+              <a:rPr sz="1080" b="0" i="0" baseline="30000">
+                <a:solidFill>
+                  <a:srgbClr val="1A1A1A"/>
+                </a:solidFill>
+                <a:latin typeface="Arial"/>
+              </a:rPr>
+              <a:t>†</a:t>
+            </a:r>
+          </a:p>
+        </p:txBody>
+      </p:sp>
+      <p:sp>
+        <p:nvSpPr>
+          <p:cNvPr id="19" name="TextBox 18"/>
+          <p:cNvSpPr txBox="1"/>
+          <p:nvPr/>
+        </p:nvSpPr>
+        <p:spPr>
+          <a:xfrm>
+            <a:off x="1322627" y="1277904"/>
+            <a:ext cx="336978" cy="171450"/>
+          </a:xfrm>
+          <a:prstGeom prst="rect">
+            <a:avLst/>
+          </a:prstGeom>
+          <a:noFill/>
+        </p:spPr>
+        <p:txBody>
+          <a:bodyPr wrap="none" lIns="0" rIns="0" tIns="0" bIns="0" anchor="t">
+            <a:noAutofit/>
+          </a:bodyPr>
+          <a:lstStyle/>
+          <a:p>
+            <a:pPr algn="l"/>
+            <a:r>
+              <a:rPr sz="1080" b="1" i="0">
+                <a:solidFill>
+                  <a:srgbClr val="1A1A1A"/>
+                </a:solidFill>
+                <a:latin typeface="Arial"/>
+              </a:rPr>
+              <a:t>Ours</a:t>
+            </a:r>
+          </a:p>
+        </p:txBody>
+      </p:sp>
+      <p:sp>
+        <p:nvSpPr>
+          <p:cNvPr id="20" name="TextBox 19"/>
+          <p:cNvSpPr txBox="1"/>
+          <p:nvPr/>
+        </p:nvSpPr>
+        <p:spPr>
+          <a:xfrm>
+            <a:off x="2874548" y="1731397"/>
+            <a:ext cx="241133" cy="200025"/>
+          </a:xfrm>
+          <a:prstGeom prst="rect">
+            <a:avLst/>
+          </a:prstGeom>
+          <a:noFill/>
+        </p:spPr>
+        <p:txBody>
+          <a:bodyPr wrap="none" lIns="0" rIns="0" tIns="0" bIns="0" anchor="t">
+            <a:noAutofit/>
+          </a:bodyPr>
+          <a:lstStyle/>
+          <a:p>
+            <a:pPr algn="ctr"/>
+            <a:r>
+              <a:rPr sz="1260" b="0" i="0">
+                <a:solidFill>
+                  <a:srgbClr val="1A1A1A"/>
+                </a:solidFill>
+                <a:latin typeface="Arial"/>
+              </a:rPr>
+              <a:t>0.0</a:t>
+            </a:r>
+          </a:p>
+        </p:txBody>
+      </p:sp>
+      <p:sp>
+        <p:nvSpPr>
+          <p:cNvPr id="21" name="TextBox 20"/>
+          <p:cNvSpPr txBox="1"/>
+          <p:nvPr/>
+        </p:nvSpPr>
+        <p:spPr>
+          <a:xfrm>
+            <a:off x="3183580" y="1731397"/>
+            <a:ext cx="241133" cy="200025"/>
+          </a:xfrm>
+          <a:prstGeom prst="rect">
+            <a:avLst/>
+          </a:prstGeom>
+          <a:noFill/>
+        </p:spPr>
+        <p:txBody>
+          <a:bodyPr wrap="none" lIns="0" rIns="0" tIns="0" bIns="0" anchor="t">
+            <a:noAutofit/>
+          </a:bodyPr>
+          <a:lstStyle/>
+          <a:p>
+            <a:pPr algn="ctr"/>
+            <a:r>
+              <a:rPr sz="1260" b="0" i="0">
+                <a:solidFill>
+                  <a:srgbClr val="1A1A1A"/>
+                </a:solidFill>
+                <a:latin typeface="Arial"/>
+              </a:rPr>
+              <a:t>0.2</a:t>
+            </a:r>
+          </a:p>
+        </p:txBody>
+      </p:sp>
+      <p:sp>
+        <p:nvSpPr>
+          <p:cNvPr id="22" name="TextBox 21"/>
+          <p:cNvSpPr txBox="1"/>
+          <p:nvPr/>
+        </p:nvSpPr>
+        <p:spPr>
+          <a:xfrm>
+            <a:off x="3492612" y="1731397"/>
+            <a:ext cx="241133" cy="200025"/>
+          </a:xfrm>
+          <a:prstGeom prst="rect">
+            <a:avLst/>
+          </a:prstGeom>
+          <a:noFill/>
+        </p:spPr>
+        <p:txBody>
+          <a:bodyPr wrap="none" lIns="0" rIns="0" tIns="0" bIns="0" anchor="t">
+            <a:noAutofit/>
+          </a:bodyPr>
+          <a:lstStyle/>
+          <a:p>
+            <a:pPr algn="ctr"/>
+            <a:r>
+              <a:rPr sz="1260" b="0" i="0">
+                <a:solidFill>
+                  <a:srgbClr val="1A1A1A"/>
+                </a:solidFill>
+                <a:latin typeface="Arial"/>
+              </a:rPr>
+              <a:t>0.4</a:t>
+            </a:r>
+          </a:p>
+        </p:txBody>
+      </p:sp>
+      <p:sp>
+        <p:nvSpPr>
+          <p:cNvPr id="23" name="TextBox 22"/>
+          <p:cNvSpPr txBox="1"/>
+          <p:nvPr/>
+        </p:nvSpPr>
+        <p:spPr>
+          <a:xfrm>
+            <a:off x="3801645" y="1731397"/>
+            <a:ext cx="241133" cy="200025"/>
+          </a:xfrm>
+          <a:prstGeom prst="rect">
+            <a:avLst/>
+          </a:prstGeom>
+          <a:noFill/>
+        </p:spPr>
+        <p:txBody>
+          <a:bodyPr wrap="none" lIns="0" rIns="0" tIns="0" bIns="0" anchor="t">
+            <a:noAutofit/>
+          </a:bodyPr>
+          <a:lstStyle/>
+          <a:p>
+            <a:pPr algn="ctr"/>
+            <a:r>
+              <a:rPr sz="1260" b="0" i="0">
+                <a:solidFill>
+                  <a:srgbClr val="1A1A1A"/>
+                </a:solidFill>
+                <a:latin typeface="Arial"/>
+              </a:rPr>
+              <a:t>0.6</a:t>
+            </a:r>
+          </a:p>
+        </p:txBody>
+      </p:sp>
+      <p:sp>
+        <p:nvSpPr>
+          <p:cNvPr id="24" name="TextBox 23"/>
+          <p:cNvSpPr txBox="1"/>
+          <p:nvPr/>
+        </p:nvSpPr>
+        <p:spPr>
+          <a:xfrm>
+            <a:off x="4110677" y="1731397"/>
+            <a:ext cx="241133" cy="200025"/>
+          </a:xfrm>
+          <a:prstGeom prst="rect">
+            <a:avLst/>
+          </a:prstGeom>
+          <a:noFill/>
+        </p:spPr>
+        <p:txBody>
+          <a:bodyPr wrap="none" lIns="0" rIns="0" tIns="0" bIns="0" anchor="t">
+            <a:noAutofit/>
+          </a:bodyPr>
+          <a:lstStyle/>
+          <a:p>
+            <a:pPr algn="ctr"/>
+            <a:r>
+              <a:rPr sz="1260" b="0" i="0">
+                <a:solidFill>
+                  <a:srgbClr val="1A1A1A"/>
+                </a:solidFill>
+                <a:latin typeface="Arial"/>
+              </a:rPr>
+              <a:t>0.8</a:t>
+            </a:r>
+          </a:p>
+        </p:txBody>
+      </p:sp>
+      <p:sp>
+        <p:nvSpPr>
+          <p:cNvPr id="25" name="TextBox 24"/>
+          <p:cNvSpPr txBox="1"/>
+          <p:nvPr/>
+        </p:nvSpPr>
+        <p:spPr>
+          <a:xfrm>
+            <a:off x="4419709" y="1731397"/>
+            <a:ext cx="241133" cy="200025"/>
+          </a:xfrm>
+          <a:prstGeom prst="rect">
+            <a:avLst/>
+          </a:prstGeom>
+          <a:noFill/>
+        </p:spPr>
+        <p:txBody>
+          <a:bodyPr wrap="none" lIns="0" rIns="0" tIns="0" bIns="0" anchor="t">
+            <a:noAutofit/>
+          </a:bodyPr>
+          <a:lstStyle/>
+          <a:p>
+            <a:pPr algn="ctr"/>
+            <a:r>
+              <a:rPr sz="1260" b="0" i="0">
+                <a:solidFill>
+                  <a:srgbClr val="1A1A1A"/>
+                </a:solidFill>
+                <a:latin typeface="Arial"/>
+              </a:rPr>
+              <a:t>1.0</a:t>
+            </a:r>
+          </a:p>
+        </p:txBody>
+      </p:sp>
+      <p:sp>
+        <p:nvSpPr>
+          <p:cNvPr id="26" name="TextBox 25"/>
+          <p:cNvSpPr txBox="1"/>
+          <p:nvPr/>
+        </p:nvSpPr>
+        <p:spPr>
+          <a:xfrm>
+            <a:off x="2987423" y="1921461"/>
+            <a:ext cx="1560544" cy="228600"/>
+          </a:xfrm>
+          <a:prstGeom prst="rect">
+            <a:avLst/>
+          </a:prstGeom>
+          <a:noFill/>
+        </p:spPr>
+        <p:txBody>
+          <a:bodyPr wrap="none" lIns="0" rIns="0" tIns="0" bIns="0" anchor="t">
+            <a:noAutofit/>
+          </a:bodyPr>
+          <a:lstStyle/>
+          <a:p>
+            <a:pPr algn="ctr"/>
+            <a:r>
+              <a:rPr sz="1440" b="0" i="0">
+                <a:solidFill>
+                  <a:srgbClr val="000000"/>
+                </a:solidFill>
+                <a:latin typeface="Arial"/>
+              </a:rPr>
+              <a:t>Acquisition time (s)</a:t>
+            </a:r>
+          </a:p>
+        </p:txBody>
+      </p:sp>
+      <p:sp>
+        <p:nvSpPr>
+          <p:cNvPr id="27" name="TextBox 26"/>
+          <p:cNvSpPr txBox="1"/>
+          <p:nvPr/>
+        </p:nvSpPr>
+        <p:spPr>
+          <a:xfrm>
+            <a:off x="2709730" y="1472362"/>
+            <a:ext cx="196484" cy="200025"/>
+          </a:xfrm>
+          <a:prstGeom prst="rect">
+            <a:avLst/>
+          </a:prstGeom>
+          <a:noFill/>
+        </p:spPr>
+        <p:txBody>
+          <a:bodyPr wrap="none" lIns="0" rIns="0" tIns="0" bIns="0" anchor="t">
+            <a:noAutofit/>
+          </a:bodyPr>
+          <a:lstStyle/>
+          <a:p>
+            <a:pPr algn="r"/>
+            <a:r>
+              <a:rPr sz="1260" b="0" i="0">
+                <a:solidFill>
+                  <a:srgbClr val="1A1A1A"/>
+                </a:solidFill>
+                <a:latin typeface="Arial"/>
+              </a:rPr>
+              <a:t>50</a:t>
+            </a:r>
+          </a:p>
+        </p:txBody>
+      </p:sp>
+      <p:sp>
+        <p:nvSpPr>
+          <p:cNvPr id="28" name="TextBox 27"/>
+          <p:cNvSpPr txBox="1"/>
+          <p:nvPr/>
+        </p:nvSpPr>
+        <p:spPr>
+          <a:xfrm>
+            <a:off x="2620631" y="988913"/>
+            <a:ext cx="285583" cy="200025"/>
+          </a:xfrm>
+          <a:prstGeom prst="rect">
+            <a:avLst/>
+          </a:prstGeom>
+          <a:noFill/>
+        </p:spPr>
+        <p:txBody>
+          <a:bodyPr wrap="none" lIns="0" rIns="0" tIns="0" bIns="0" anchor="t">
+            <a:noAutofit/>
+          </a:bodyPr>
+          <a:lstStyle/>
+          <a:p>
+            <a:pPr algn="r"/>
+            <a:r>
+              <a:rPr sz="1260" b="0" i="0">
+                <a:solidFill>
+                  <a:srgbClr val="1A1A1A"/>
+                </a:solidFill>
+                <a:latin typeface="Arial"/>
+              </a:rPr>
+              <a:t>100</a:t>
+            </a:r>
+          </a:p>
+        </p:txBody>
+      </p:sp>
+      <p:sp>
+        <p:nvSpPr>
+          <p:cNvPr id="29" name="TextBox 28"/>
+          <p:cNvSpPr txBox="1"/>
+          <p:nvPr/>
+        </p:nvSpPr>
+        <p:spPr>
+          <a:xfrm rot="16200000">
+            <a:off x="1835708" y="1043996"/>
+            <a:ext cx="1292653" cy="228600"/>
+          </a:xfrm>
+          <a:prstGeom prst="rect">
+            <a:avLst/>
+          </a:prstGeom>
+          <a:noFill/>
+        </p:spPr>
+        <p:txBody>
+          <a:bodyPr wrap="none" lIns="0" rIns="0" tIns="0" bIns="0" anchor="t">
+            <a:noAutofit/>
+          </a:bodyPr>
+          <a:lstStyle/>
+          <a:p>
+            <a:pPr algn="ctr"/>
+            <a:r>
+              <a:rPr sz="1440" b="0" i="0">
+                <a:solidFill>
+                  <a:srgbClr val="000000"/>
+                </a:solidFill>
+                <a:latin typeface="Arial"/>
+              </a:rPr>
+              <a:t>LV volume (mL)</a:t>
+            </a:r>
+          </a:p>
+        </p:txBody>
+      </p:sp>
+      <p:sp>
+        <p:nvSpPr>
+          <p:cNvPr id="30" name="TextBox 29"/>
+          <p:cNvSpPr txBox="1"/>
+          <p:nvPr/>
+        </p:nvSpPr>
+        <p:spPr>
+          <a:xfrm>
+            <a:off x="1486260" y="2164553"/>
+            <a:ext cx="1926066" cy="228600"/>
+          </a:xfrm>
+          <a:prstGeom prst="rect">
+            <a:avLst/>
+          </a:prstGeom>
+          <a:noFill/>
+        </p:spPr>
+        <p:txBody>
+          <a:bodyPr wrap="none" lIns="0" rIns="0" tIns="0" bIns="0" anchor="t">
+            <a:noAutofit/>
+          </a:bodyPr>
+          <a:lstStyle/>
+          <a:p>
+            <a:pPr algn="ctr"/>
+            <a:r>
+              <a:rPr sz="1440" b="0" i="0">
+                <a:solidFill>
+                  <a:srgbClr val="000000"/>
+                </a:solidFill>
+                <a:latin typeface="Arial"/>
+              </a:rPr>
+              <a:t>(a) Atrial fibrillation (AF)</a:t>
+            </a:r>
+          </a:p>
+        </p:txBody>
+      </p:sp>
+      <p:sp>
+        <p:nvSpPr>
+          <p:cNvPr id="31" name="TextBox 30"/>
+          <p:cNvSpPr txBox="1"/>
+          <p:nvPr/>
+        </p:nvSpPr>
+        <p:spPr>
+          <a:xfrm>
+            <a:off x="5246132" y="1731397"/>
+            <a:ext cx="241133" cy="200025"/>
+          </a:xfrm>
+          <a:prstGeom prst="rect">
+            <a:avLst/>
+          </a:prstGeom>
+          <a:noFill/>
+        </p:spPr>
+        <p:txBody>
+          <a:bodyPr wrap="none" lIns="0" rIns="0" tIns="0" bIns="0" anchor="t">
+            <a:noAutofit/>
+          </a:bodyPr>
+          <a:lstStyle/>
+          <a:p>
+            <a:pPr algn="ctr"/>
+            <a:r>
+              <a:rPr sz="1260" b="0" i="0">
+                <a:solidFill>
+                  <a:srgbClr val="1A1A1A"/>
+                </a:solidFill>
+                <a:latin typeface="Arial"/>
+              </a:rPr>
+              <a:t>0.1</a:t>
+            </a:r>
+          </a:p>
+        </p:txBody>
+      </p:sp>
+      <p:sp>
+        <p:nvSpPr>
+          <p:cNvPr id="32" name="TextBox 31"/>
+          <p:cNvSpPr txBox="1"/>
+          <p:nvPr/>
+        </p:nvSpPr>
+        <p:spPr>
+          <a:xfrm>
+            <a:off x="5652389" y="1731397"/>
             <a:ext cx="107386" cy="200025"/>
           </a:xfrm>
           <a:prstGeom prst="rect">
@@ -4670,6 +5189,181 @@
           </a:bodyPr>
           <a:lstStyle/>
           <a:p>
+            <a:pPr algn="ctr"/>
+            <a:r>
+              <a:rPr sz="1260" b="0" i="0">
+                <a:solidFill>
+                  <a:srgbClr val="1A1A1A"/>
+                </a:solidFill>
+                <a:latin typeface="Arial"/>
+              </a:rPr>
+              <a:t>1</a:t>
+            </a:r>
+          </a:p>
+        </p:txBody>
+      </p:sp>
+      <p:sp>
+        <p:nvSpPr>
+          <p:cNvPr id="33" name="TextBox 32"/>
+          <p:cNvSpPr txBox="1"/>
+          <p:nvPr/>
+        </p:nvSpPr>
+        <p:spPr>
+          <a:xfrm>
+            <a:off x="5947224" y="1731397"/>
+            <a:ext cx="196484" cy="200025"/>
+          </a:xfrm>
+          <a:prstGeom prst="rect">
+            <a:avLst/>
+          </a:prstGeom>
+          <a:noFill/>
+        </p:spPr>
+        <p:txBody>
+          <a:bodyPr wrap="none" lIns="0" rIns="0" tIns="0" bIns="0" anchor="t">
+            <a:noAutofit/>
+          </a:bodyPr>
+          <a:lstStyle/>
+          <a:p>
+            <a:pPr algn="ctr"/>
+            <a:r>
+              <a:rPr sz="1260" b="0" i="0">
+                <a:solidFill>
+                  <a:srgbClr val="1A1A1A"/>
+                </a:solidFill>
+                <a:latin typeface="Arial"/>
+              </a:rPr>
+              <a:t>10</a:t>
+            </a:r>
+          </a:p>
+        </p:txBody>
+      </p:sp>
+      <p:sp>
+        <p:nvSpPr>
+          <p:cNvPr id="34" name="TextBox 33"/>
+          <p:cNvSpPr txBox="1"/>
+          <p:nvPr/>
+        </p:nvSpPr>
+        <p:spPr>
+          <a:xfrm>
+            <a:off x="6242059" y="1731397"/>
+            <a:ext cx="285583" cy="200025"/>
+          </a:xfrm>
+          <a:prstGeom prst="rect">
+            <a:avLst/>
+          </a:prstGeom>
+          <a:noFill/>
+        </p:spPr>
+        <p:txBody>
+          <a:bodyPr wrap="none" lIns="0" rIns="0" tIns="0" bIns="0" anchor="t">
+            <a:noAutofit/>
+          </a:bodyPr>
+          <a:lstStyle/>
+          <a:p>
+            <a:pPr algn="ctr"/>
+            <a:r>
+              <a:rPr sz="1260" b="0" i="0">
+                <a:solidFill>
+                  <a:srgbClr val="1A1A1A"/>
+                </a:solidFill>
+                <a:latin typeface="Arial"/>
+              </a:rPr>
+              <a:t>100</a:t>
+            </a:r>
+          </a:p>
+        </p:txBody>
+      </p:sp>
+      <p:sp>
+        <p:nvSpPr>
+          <p:cNvPr id="35" name="TextBox 34"/>
+          <p:cNvSpPr txBox="1"/>
+          <p:nvPr/>
+        </p:nvSpPr>
+        <p:spPr>
+          <a:xfrm>
+            <a:off x="6536893" y="1731397"/>
+            <a:ext cx="374681" cy="200025"/>
+          </a:xfrm>
+          <a:prstGeom prst="rect">
+            <a:avLst/>
+          </a:prstGeom>
+          <a:noFill/>
+        </p:spPr>
+        <p:txBody>
+          <a:bodyPr wrap="none" lIns="0" rIns="0" tIns="0" bIns="0" anchor="t">
+            <a:noAutofit/>
+          </a:bodyPr>
+          <a:lstStyle/>
+          <a:p>
+            <a:pPr algn="ctr"/>
+            <a:r>
+              <a:rPr sz="1260" b="0" i="0">
+                <a:solidFill>
+                  <a:srgbClr val="1A1A1A"/>
+                </a:solidFill>
+                <a:latin typeface="Arial"/>
+              </a:rPr>
+              <a:t>1000</a:t>
+            </a:r>
+          </a:p>
+        </p:txBody>
+      </p:sp>
+      <p:sp>
+        <p:nvSpPr>
+          <p:cNvPr id="36" name="TextBox 35"/>
+          <p:cNvSpPr txBox="1"/>
+          <p:nvPr/>
+        </p:nvSpPr>
+        <p:spPr>
+          <a:xfrm>
+            <a:off x="5605878" y="1921461"/>
+            <a:ext cx="961659" cy="228600"/>
+          </a:xfrm>
+          <a:prstGeom prst="rect">
+            <a:avLst/>
+          </a:prstGeom>
+          <a:noFill/>
+        </p:spPr>
+        <p:txBody>
+          <a:bodyPr wrap="none" lIns="0" rIns="0" tIns="0" bIns="0" anchor="t">
+            <a:noAutofit/>
+          </a:bodyPr>
+          <a:lstStyle/>
+          <a:p>
+            <a:pPr algn="ctr"/>
+            <a:r>
+              <a:rPr sz="1440" b="0" i="0">
+                <a:solidFill>
+                  <a:srgbClr val="000000"/>
+                </a:solidFill>
+                <a:latin typeface="Arial"/>
+              </a:rPr>
+              <a:t>Runtime (s)</a:t>
+            </a:r>
+          </a:p>
+        </p:txBody>
+      </p:sp>
+      <p:sp>
+        <p:nvSpPr>
+          <p:cNvPr id="37" name="TextBox 36"/>
+          <p:cNvSpPr txBox="1"/>
+          <p:nvPr/>
+        </p:nvSpPr>
+        <p:spPr>
+          <a:xfrm>
+            <a:off x="5117841" y="1583363"/>
+            <a:ext cx="107386" cy="200025"/>
+          </a:xfrm>
+          <a:prstGeom prst="rect">
+            <a:avLst/>
+          </a:prstGeom>
+          <a:noFill/>
+        </p:spPr>
+        <p:txBody>
+          <a:bodyPr wrap="none" lIns="0" rIns="0" tIns="0" bIns="0" anchor="t">
+            <a:noAutofit/>
+          </a:bodyPr>
+          <a:lstStyle/>
+          <a:p>
             <a:pPr algn="r"/>
             <a:r>
               <a:rPr sz="1260" b="0" i="0">
@@ -4678,20 +5372,20 @@
                 </a:solidFill>
                 <a:latin typeface="Arial"/>
               </a:rPr>
-              <a:t>5</a:t>
-            </a:r>
-          </a:p>
-        </p:txBody>
-      </p:sp>
-      <p:sp>
-        <p:nvSpPr>
-          <p:cNvPr id="15" name="TextBox 14"/>
-          <p:cNvSpPr txBox="1"/>
-          <p:nvPr/>
-        </p:nvSpPr>
-        <p:spPr>
-          <a:xfrm>
-            <a:off x="457200" y="1491785"/>
+              <a:t>0</a:t>
+            </a:r>
+          </a:p>
+        </p:txBody>
+      </p:sp>
+      <p:sp>
+        <p:nvSpPr>
+          <p:cNvPr id="38" name="TextBox 37"/>
+          <p:cNvSpPr txBox="1"/>
+          <p:nvPr/>
+        </p:nvSpPr>
+        <p:spPr>
+          <a:xfrm>
+            <a:off x="5028742" y="1162601"/>
             <a:ext cx="196484" cy="200025"/>
           </a:xfrm>
           <a:prstGeom prst="rect">
@@ -4720,13 +5414,13 @@
       </p:sp>
       <p:sp>
         <p:nvSpPr>
-          <p:cNvPr id="16" name="TextBox 15"/>
-          <p:cNvSpPr txBox="1"/>
-          <p:nvPr/>
-        </p:nvSpPr>
-        <p:spPr>
-          <a:xfrm>
-            <a:off x="457200" y="1171676"/>
+          <p:cNvPr id="39" name="TextBox 38"/>
+          <p:cNvSpPr txBox="1"/>
+          <p:nvPr/>
+        </p:nvSpPr>
+        <p:spPr>
+          <a:xfrm>
+            <a:off x="5028742" y="741839"/>
             <a:ext cx="196484" cy="200025"/>
           </a:xfrm>
           <a:prstGeom prst="rect">
@@ -4748,20 +5442,423 @@
                 </a:solidFill>
                 <a:latin typeface="Arial"/>
               </a:rPr>
-              <a:t>15</a:t>
-            </a:r>
-          </a:p>
-        </p:txBody>
-      </p:sp>
-      <p:sp>
-        <p:nvSpPr>
-          <p:cNvPr id="17" name="TextBox 16"/>
-          <p:cNvSpPr txBox="1"/>
-          <p:nvPr/>
-        </p:nvSpPr>
-        <p:spPr>
-          <a:xfrm>
-            <a:off x="457200" y="851567"/>
+              <a:t>20</a:t>
+            </a:r>
+          </a:p>
+        </p:txBody>
+      </p:sp>
+      <p:sp>
+        <p:nvSpPr>
+          <p:cNvPr id="40" name="TextBox 39"/>
+          <p:cNvSpPr txBox="1"/>
+          <p:nvPr/>
+        </p:nvSpPr>
+        <p:spPr>
+          <a:xfrm rot="16200000">
+            <a:off x="4435906" y="1043996"/>
+            <a:ext cx="907288" cy="228600"/>
+          </a:xfrm>
+          <a:prstGeom prst="rect">
+            <a:avLst/>
+          </a:prstGeom>
+          <a:noFill/>
+        </p:spPr>
+        <p:txBody>
+          <a:bodyPr wrap="none" lIns="0" rIns="0" tIns="0" bIns="0" anchor="t">
+            <a:noAutofit/>
+          </a:bodyPr>
+          <a:lstStyle/>
+          <a:p>
+            <a:pPr algn="ctr"/>
+            <a:r>
+              <a:rPr sz="1440" b="0" i="0">
+                <a:solidFill>
+                  <a:srgbClr val="000000"/>
+                </a:solidFill>
+                <a:latin typeface="Arial"/>
+              </a:rPr>
+              <a:t>VTC err. </a:t>
+            </a:r>
+            <a:r>
+              <a:rPr sz="1440" b="0" i="0">
+                <a:solidFill>
+                  <a:srgbClr val="000000"/>
+                </a:solidFill>
+                <a:latin typeface="Arial"/>
+              </a:rPr>
+              <a:t>↓</a:t>
+            </a:r>
+          </a:p>
+        </p:txBody>
+      </p:sp>
+      <p:sp>
+        <p:nvSpPr>
+          <p:cNvPr id="41" name="TextBox 40"/>
+          <p:cNvSpPr txBox="1"/>
+          <p:nvPr/>
+        </p:nvSpPr>
+        <p:spPr>
+          <a:xfrm>
+            <a:off x="5494269" y="851160"/>
+            <a:ext cx="709247" cy="171450"/>
+          </a:xfrm>
+          <a:prstGeom prst="rect">
+            <a:avLst/>
+          </a:prstGeom>
+          <a:noFill/>
+        </p:spPr>
+        <p:txBody>
+          <a:bodyPr wrap="none" lIns="0" rIns="0" tIns="0" bIns="0" anchor="t">
+            <a:noAutofit/>
+          </a:bodyPr>
+          <a:lstStyle/>
+          <a:p>
+            <a:pPr algn="l"/>
+            <a:r>
+              <a:rPr sz="1080" b="0" i="0">
+                <a:solidFill>
+                  <a:srgbClr val="1A1A1A"/>
+                </a:solidFill>
+                <a:latin typeface="Arial"/>
+              </a:rPr>
+              <a:t>Dangi et al.</a:t>
+            </a:r>
+          </a:p>
+        </p:txBody>
+      </p:sp>
+      <p:sp>
+        <p:nvSpPr>
+          <p:cNvPr id="42" name="TextBox 41"/>
+          <p:cNvSpPr txBox="1"/>
+          <p:nvPr/>
+        </p:nvSpPr>
+        <p:spPr>
+          <a:xfrm>
+            <a:off x="6031245" y="1453625"/>
+            <a:ext cx="602488" cy="171450"/>
+          </a:xfrm>
+          <a:prstGeom prst="rect">
+            <a:avLst/>
+          </a:prstGeom>
+          <a:noFill/>
+        </p:spPr>
+        <p:txBody>
+          <a:bodyPr wrap="none" lIns="0" rIns="0" tIns="0" bIns="0" anchor="t">
+            <a:noAutofit/>
+          </a:bodyPr>
+          <a:lstStyle/>
+          <a:p>
+            <a:pPr algn="ctr"/>
+            <a:r>
+              <a:rPr sz="1080" b="0" i="0">
+                <a:solidFill>
+                  <a:srgbClr val="1A1A1A"/>
+                </a:solidFill>
+                <a:latin typeface="Arial"/>
+              </a:rPr>
+              <a:t>CiNeVol</a:t>
+            </a:r>
+            <a:r>
+              <a:rPr sz="1080" b="0" i="0" baseline="30000">
+                <a:solidFill>
+                  <a:srgbClr val="1A1A1A"/>
+                </a:solidFill>
+                <a:latin typeface="Arial"/>
+              </a:rPr>
+              <a:t>†</a:t>
+            </a:r>
+          </a:p>
+        </p:txBody>
+      </p:sp>
+      <p:sp>
+        <p:nvSpPr>
+          <p:cNvPr id="43" name="TextBox 42"/>
+          <p:cNvSpPr txBox="1"/>
+          <p:nvPr/>
+        </p:nvSpPr>
+        <p:spPr>
+          <a:xfrm>
+            <a:off x="5636780" y="1442356"/>
+            <a:ext cx="336978" cy="171450"/>
+          </a:xfrm>
+          <a:prstGeom prst="rect">
+            <a:avLst/>
+          </a:prstGeom>
+          <a:noFill/>
+        </p:spPr>
+        <p:txBody>
+          <a:bodyPr wrap="none" lIns="0" rIns="0" tIns="0" bIns="0" anchor="t">
+            <a:noAutofit/>
+          </a:bodyPr>
+          <a:lstStyle/>
+          <a:p>
+            <a:pPr algn="ctr"/>
+            <a:r>
+              <a:rPr sz="1080" b="1" i="0">
+                <a:solidFill>
+                  <a:srgbClr val="1A1A1A"/>
+                </a:solidFill>
+                <a:latin typeface="Arial"/>
+              </a:rPr>
+              <a:t>Ours</a:t>
+            </a:r>
+          </a:p>
+        </p:txBody>
+      </p:sp>
+      <p:sp>
+        <p:nvSpPr>
+          <p:cNvPr id="44" name="TextBox 43"/>
+          <p:cNvSpPr txBox="1"/>
+          <p:nvPr/>
+        </p:nvSpPr>
+        <p:spPr>
+          <a:xfrm>
+            <a:off x="7446091" y="1731397"/>
+            <a:ext cx="241133" cy="200025"/>
+          </a:xfrm>
+          <a:prstGeom prst="rect">
+            <a:avLst/>
+          </a:prstGeom>
+          <a:noFill/>
+        </p:spPr>
+        <p:txBody>
+          <a:bodyPr wrap="none" lIns="0" rIns="0" tIns="0" bIns="0" anchor="t">
+            <a:noAutofit/>
+          </a:bodyPr>
+          <a:lstStyle/>
+          <a:p>
+            <a:pPr algn="ctr"/>
+            <a:r>
+              <a:rPr sz="1260" b="0" i="0">
+                <a:solidFill>
+                  <a:srgbClr val="1A1A1A"/>
+                </a:solidFill>
+                <a:latin typeface="Arial"/>
+              </a:rPr>
+              <a:t>0.0</a:t>
+            </a:r>
+          </a:p>
+        </p:txBody>
+      </p:sp>
+      <p:sp>
+        <p:nvSpPr>
+          <p:cNvPr id="45" name="TextBox 44"/>
+          <p:cNvSpPr txBox="1"/>
+          <p:nvPr/>
+        </p:nvSpPr>
+        <p:spPr>
+          <a:xfrm>
+            <a:off x="7755123" y="1731397"/>
+            <a:ext cx="241133" cy="200025"/>
+          </a:xfrm>
+          <a:prstGeom prst="rect">
+            <a:avLst/>
+          </a:prstGeom>
+          <a:noFill/>
+        </p:spPr>
+        <p:txBody>
+          <a:bodyPr wrap="none" lIns="0" rIns="0" tIns="0" bIns="0" anchor="t">
+            <a:noAutofit/>
+          </a:bodyPr>
+          <a:lstStyle/>
+          <a:p>
+            <a:pPr algn="ctr"/>
+            <a:r>
+              <a:rPr sz="1260" b="0" i="0">
+                <a:solidFill>
+                  <a:srgbClr val="1A1A1A"/>
+                </a:solidFill>
+                <a:latin typeface="Arial"/>
+              </a:rPr>
+              <a:t>0.2</a:t>
+            </a:r>
+          </a:p>
+        </p:txBody>
+      </p:sp>
+      <p:sp>
+        <p:nvSpPr>
+          <p:cNvPr id="46" name="TextBox 45"/>
+          <p:cNvSpPr txBox="1"/>
+          <p:nvPr/>
+        </p:nvSpPr>
+        <p:spPr>
+          <a:xfrm>
+            <a:off x="8064155" y="1731397"/>
+            <a:ext cx="241133" cy="200025"/>
+          </a:xfrm>
+          <a:prstGeom prst="rect">
+            <a:avLst/>
+          </a:prstGeom>
+          <a:noFill/>
+        </p:spPr>
+        <p:txBody>
+          <a:bodyPr wrap="none" lIns="0" rIns="0" tIns="0" bIns="0" anchor="t">
+            <a:noAutofit/>
+          </a:bodyPr>
+          <a:lstStyle/>
+          <a:p>
+            <a:pPr algn="ctr"/>
+            <a:r>
+              <a:rPr sz="1260" b="0" i="0">
+                <a:solidFill>
+                  <a:srgbClr val="1A1A1A"/>
+                </a:solidFill>
+                <a:latin typeface="Arial"/>
+              </a:rPr>
+              <a:t>0.4</a:t>
+            </a:r>
+          </a:p>
+        </p:txBody>
+      </p:sp>
+      <p:sp>
+        <p:nvSpPr>
+          <p:cNvPr id="47" name="TextBox 46"/>
+          <p:cNvSpPr txBox="1"/>
+          <p:nvPr/>
+        </p:nvSpPr>
+        <p:spPr>
+          <a:xfrm>
+            <a:off x="8373188" y="1731397"/>
+            <a:ext cx="241133" cy="200025"/>
+          </a:xfrm>
+          <a:prstGeom prst="rect">
+            <a:avLst/>
+          </a:prstGeom>
+          <a:noFill/>
+        </p:spPr>
+        <p:txBody>
+          <a:bodyPr wrap="none" lIns="0" rIns="0" tIns="0" bIns="0" anchor="t">
+            <a:noAutofit/>
+          </a:bodyPr>
+          <a:lstStyle/>
+          <a:p>
+            <a:pPr algn="ctr"/>
+            <a:r>
+              <a:rPr sz="1260" b="0" i="0">
+                <a:solidFill>
+                  <a:srgbClr val="1A1A1A"/>
+                </a:solidFill>
+                <a:latin typeface="Arial"/>
+              </a:rPr>
+              <a:t>0.6</a:t>
+            </a:r>
+          </a:p>
+        </p:txBody>
+      </p:sp>
+      <p:sp>
+        <p:nvSpPr>
+          <p:cNvPr id="48" name="TextBox 47"/>
+          <p:cNvSpPr txBox="1"/>
+          <p:nvPr/>
+        </p:nvSpPr>
+        <p:spPr>
+          <a:xfrm>
+            <a:off x="8682220" y="1731397"/>
+            <a:ext cx="241133" cy="200025"/>
+          </a:xfrm>
+          <a:prstGeom prst="rect">
+            <a:avLst/>
+          </a:prstGeom>
+          <a:noFill/>
+        </p:spPr>
+        <p:txBody>
+          <a:bodyPr wrap="none" lIns="0" rIns="0" tIns="0" bIns="0" anchor="t">
+            <a:noAutofit/>
+          </a:bodyPr>
+          <a:lstStyle/>
+          <a:p>
+            <a:pPr algn="ctr"/>
+            <a:r>
+              <a:rPr sz="1260" b="0" i="0">
+                <a:solidFill>
+                  <a:srgbClr val="1A1A1A"/>
+                </a:solidFill>
+                <a:latin typeface="Arial"/>
+              </a:rPr>
+              <a:t>0.8</a:t>
+            </a:r>
+          </a:p>
+        </p:txBody>
+      </p:sp>
+      <p:sp>
+        <p:nvSpPr>
+          <p:cNvPr id="49" name="TextBox 48"/>
+          <p:cNvSpPr txBox="1"/>
+          <p:nvPr/>
+        </p:nvSpPr>
+        <p:spPr>
+          <a:xfrm>
+            <a:off x="8991252" y="1731397"/>
+            <a:ext cx="241133" cy="200025"/>
+          </a:xfrm>
+          <a:prstGeom prst="rect">
+            <a:avLst/>
+          </a:prstGeom>
+          <a:noFill/>
+        </p:spPr>
+        <p:txBody>
+          <a:bodyPr wrap="none" lIns="0" rIns="0" tIns="0" bIns="0" anchor="t">
+            <a:noAutofit/>
+          </a:bodyPr>
+          <a:lstStyle/>
+          <a:p>
+            <a:pPr algn="ctr"/>
+            <a:r>
+              <a:rPr sz="1260" b="0" i="0">
+                <a:solidFill>
+                  <a:srgbClr val="1A1A1A"/>
+                </a:solidFill>
+                <a:latin typeface="Arial"/>
+              </a:rPr>
+              <a:t>1.0</a:t>
+            </a:r>
+          </a:p>
+        </p:txBody>
+      </p:sp>
+      <p:sp>
+        <p:nvSpPr>
+          <p:cNvPr id="50" name="TextBox 49"/>
+          <p:cNvSpPr txBox="1"/>
+          <p:nvPr/>
+        </p:nvSpPr>
+        <p:spPr>
+          <a:xfrm>
+            <a:off x="7558966" y="1921461"/>
+            <a:ext cx="1560544" cy="228600"/>
+          </a:xfrm>
+          <a:prstGeom prst="rect">
+            <a:avLst/>
+          </a:prstGeom>
+          <a:noFill/>
+        </p:spPr>
+        <p:txBody>
+          <a:bodyPr wrap="none" lIns="0" rIns="0" tIns="0" bIns="0" anchor="t">
+            <a:noAutofit/>
+          </a:bodyPr>
+          <a:lstStyle/>
+          <a:p>
+            <a:pPr algn="ctr"/>
+            <a:r>
+              <a:rPr sz="1440" b="0" i="0">
+                <a:solidFill>
+                  <a:srgbClr val="000000"/>
+                </a:solidFill>
+                <a:latin typeface="Arial"/>
+              </a:rPr>
+              <a:t>Acquisition time (s)</a:t>
+            </a:r>
+          </a:p>
+        </p:txBody>
+      </p:sp>
+      <p:sp>
+        <p:nvSpPr>
+          <p:cNvPr id="51" name="TextBox 50"/>
+          <p:cNvSpPr txBox="1"/>
+          <p:nvPr/>
+        </p:nvSpPr>
+        <p:spPr>
+          <a:xfrm>
+            <a:off x="7281272" y="1463497"/>
             <a:ext cx="196484" cy="200025"/>
           </a:xfrm>
           <a:prstGeom prst="rect">
@@ -4783,21 +5880,21 @@
                 </a:solidFill>
                 <a:latin typeface="Arial"/>
               </a:rPr>
-              <a:t>20</a:t>
-            </a:r>
-          </a:p>
-        </p:txBody>
-      </p:sp>
-      <p:sp>
-        <p:nvSpPr>
-          <p:cNvPr id="18" name="TextBox 17"/>
-          <p:cNvSpPr txBox="1"/>
-          <p:nvPr/>
-        </p:nvSpPr>
-        <p:spPr>
-          <a:xfrm>
-            <a:off x="457200" y="531458"/>
-            <a:ext cx="196484" cy="200025"/>
+              <a:t>50</a:t>
+            </a:r>
+          </a:p>
+        </p:txBody>
+      </p:sp>
+      <p:sp>
+        <p:nvSpPr>
+          <p:cNvPr id="52" name="TextBox 51"/>
+          <p:cNvSpPr txBox="1"/>
+          <p:nvPr/>
+        </p:nvSpPr>
+        <p:spPr>
+          <a:xfrm>
+            <a:off x="7192174" y="984603"/>
+            <a:ext cx="285583" cy="200025"/>
           </a:xfrm>
           <a:prstGeom prst="rect">
             <a:avLst/>
@@ -4818,21 +5915,21 @@
                 </a:solidFill>
                 <a:latin typeface="Arial"/>
               </a:rPr>
-              <a:t>25</a:t>
-            </a:r>
-          </a:p>
-        </p:txBody>
-      </p:sp>
-      <p:sp>
-        <p:nvSpPr>
-          <p:cNvPr id="19" name="TextBox 18"/>
+              <a:t>100</a:t>
+            </a:r>
+          </a:p>
+        </p:txBody>
+      </p:sp>
+      <p:sp>
+        <p:nvSpPr>
+          <p:cNvPr id="53" name="TextBox 52"/>
           <p:cNvSpPr txBox="1"/>
           <p:nvPr/>
         </p:nvSpPr>
         <p:spPr>
           <a:xfrm rot="16200000">
-            <a:off x="-135636" y="1318316"/>
-            <a:ext cx="907288" cy="228600"/>
+            <a:off x="6407251" y="1043996"/>
+            <a:ext cx="1292653" cy="228600"/>
           </a:xfrm>
           <a:prstGeom prst="rect">
             <a:avLst/>
@@ -4853,8 +5950,34 @@
                 </a:solidFill>
                 <a:latin typeface="Arial"/>
               </a:rPr>
-              <a:t>VTC err. </a:t>
-            </a:r>
+              <a:t>LV volume (mL)</a:t>
+            </a:r>
+          </a:p>
+        </p:txBody>
+      </p:sp>
+      <p:sp>
+        <p:nvSpPr>
+          <p:cNvPr id="54" name="TextBox 53"/>
+          <p:cNvSpPr txBox="1"/>
+          <p:nvPr/>
+        </p:nvSpPr>
+        <p:spPr>
+          <a:xfrm>
+            <a:off x="5785745" y="2164553"/>
+            <a:ext cx="2470181" cy="228600"/>
+          </a:xfrm>
+          <a:prstGeom prst="rect">
+            <a:avLst/>
+          </a:prstGeom>
+          <a:noFill/>
+        </p:spPr>
+        <p:txBody>
+          <a:bodyPr wrap="none" lIns="0" rIns="0" tIns="0" bIns="0" anchor="t">
+            <a:noAutofit/>
+          </a:bodyPr>
+          <a:lstStyle/>
+          <a:p>
+            <a:pPr algn="ctr"/>
             <a:r>
               <a:rPr sz="1440" b="0" i="0">
                 <a:solidFill>
@@ -4862,1241 +5985,7 @@
                 </a:solidFill>
                 <a:latin typeface="Arial"/>
               </a:rPr>
-              <a:t>↓</a:t>
-            </a:r>
-          </a:p>
-        </p:txBody>
-      </p:sp>
-      <p:sp>
-        <p:nvSpPr>
-          <p:cNvPr id="20" name="TextBox 19"/>
-          <p:cNvSpPr txBox="1"/>
-          <p:nvPr/>
-        </p:nvSpPr>
-        <p:spPr>
-          <a:xfrm>
-            <a:off x="2874548" y="2280037"/>
-            <a:ext cx="241133" cy="200025"/>
-          </a:xfrm>
-          <a:prstGeom prst="rect">
-            <a:avLst/>
-          </a:prstGeom>
-          <a:noFill/>
-        </p:spPr>
-        <p:txBody>
-          <a:bodyPr wrap="none" lIns="0" rIns="0" tIns="0" bIns="0" anchor="t">
-            <a:noAutofit/>
-          </a:bodyPr>
-          <a:lstStyle/>
-          <a:p>
-            <a:pPr algn="ctr"/>
-            <a:r>
-              <a:rPr sz="1260" b="0" i="0">
-                <a:solidFill>
-                  <a:srgbClr val="1A1A1A"/>
-                </a:solidFill>
-                <a:latin typeface="Arial"/>
-              </a:rPr>
-              <a:t>0.0</a:t>
-            </a:r>
-          </a:p>
-        </p:txBody>
-      </p:sp>
-      <p:sp>
-        <p:nvSpPr>
-          <p:cNvPr id="21" name="TextBox 20"/>
-          <p:cNvSpPr txBox="1"/>
-          <p:nvPr/>
-        </p:nvSpPr>
-        <p:spPr>
-          <a:xfrm>
-            <a:off x="3183580" y="2280037"/>
-            <a:ext cx="241133" cy="200025"/>
-          </a:xfrm>
-          <a:prstGeom prst="rect">
-            <a:avLst/>
-          </a:prstGeom>
-          <a:noFill/>
-        </p:spPr>
-        <p:txBody>
-          <a:bodyPr wrap="none" lIns="0" rIns="0" tIns="0" bIns="0" anchor="t">
-            <a:noAutofit/>
-          </a:bodyPr>
-          <a:lstStyle/>
-          <a:p>
-            <a:pPr algn="ctr"/>
-            <a:r>
-              <a:rPr sz="1260" b="0" i="0">
-                <a:solidFill>
-                  <a:srgbClr val="1A1A1A"/>
-                </a:solidFill>
-                <a:latin typeface="Arial"/>
-              </a:rPr>
-              <a:t>0.2</a:t>
-            </a:r>
-          </a:p>
-        </p:txBody>
-      </p:sp>
-      <p:sp>
-        <p:nvSpPr>
-          <p:cNvPr id="22" name="TextBox 21"/>
-          <p:cNvSpPr txBox="1"/>
-          <p:nvPr/>
-        </p:nvSpPr>
-        <p:spPr>
-          <a:xfrm>
-            <a:off x="3492612" y="2280037"/>
-            <a:ext cx="241133" cy="200025"/>
-          </a:xfrm>
-          <a:prstGeom prst="rect">
-            <a:avLst/>
-          </a:prstGeom>
-          <a:noFill/>
-        </p:spPr>
-        <p:txBody>
-          <a:bodyPr wrap="none" lIns="0" rIns="0" tIns="0" bIns="0" anchor="t">
-            <a:noAutofit/>
-          </a:bodyPr>
-          <a:lstStyle/>
-          <a:p>
-            <a:pPr algn="ctr"/>
-            <a:r>
-              <a:rPr sz="1260" b="0" i="0">
-                <a:solidFill>
-                  <a:srgbClr val="1A1A1A"/>
-                </a:solidFill>
-                <a:latin typeface="Arial"/>
-              </a:rPr>
-              <a:t>0.4</a:t>
-            </a:r>
-          </a:p>
-        </p:txBody>
-      </p:sp>
-      <p:sp>
-        <p:nvSpPr>
-          <p:cNvPr id="23" name="TextBox 22"/>
-          <p:cNvSpPr txBox="1"/>
-          <p:nvPr/>
-        </p:nvSpPr>
-        <p:spPr>
-          <a:xfrm>
-            <a:off x="3801645" y="2280037"/>
-            <a:ext cx="241133" cy="200025"/>
-          </a:xfrm>
-          <a:prstGeom prst="rect">
-            <a:avLst/>
-          </a:prstGeom>
-          <a:noFill/>
-        </p:spPr>
-        <p:txBody>
-          <a:bodyPr wrap="none" lIns="0" rIns="0" tIns="0" bIns="0" anchor="t">
-            <a:noAutofit/>
-          </a:bodyPr>
-          <a:lstStyle/>
-          <a:p>
-            <a:pPr algn="ctr"/>
-            <a:r>
-              <a:rPr sz="1260" b="0" i="0">
-                <a:solidFill>
-                  <a:srgbClr val="1A1A1A"/>
-                </a:solidFill>
-                <a:latin typeface="Arial"/>
-              </a:rPr>
-              <a:t>0.6</a:t>
-            </a:r>
-          </a:p>
-        </p:txBody>
-      </p:sp>
-      <p:sp>
-        <p:nvSpPr>
-          <p:cNvPr id="24" name="TextBox 23"/>
-          <p:cNvSpPr txBox="1"/>
-          <p:nvPr/>
-        </p:nvSpPr>
-        <p:spPr>
-          <a:xfrm>
-            <a:off x="4110677" y="2280037"/>
-            <a:ext cx="241133" cy="200025"/>
-          </a:xfrm>
-          <a:prstGeom prst="rect">
-            <a:avLst/>
-          </a:prstGeom>
-          <a:noFill/>
-        </p:spPr>
-        <p:txBody>
-          <a:bodyPr wrap="none" lIns="0" rIns="0" tIns="0" bIns="0" anchor="t">
-            <a:noAutofit/>
-          </a:bodyPr>
-          <a:lstStyle/>
-          <a:p>
-            <a:pPr algn="ctr"/>
-            <a:r>
-              <a:rPr sz="1260" b="0" i="0">
-                <a:solidFill>
-                  <a:srgbClr val="1A1A1A"/>
-                </a:solidFill>
-                <a:latin typeface="Arial"/>
-              </a:rPr>
-              <a:t>0.8</a:t>
-            </a:r>
-          </a:p>
-        </p:txBody>
-      </p:sp>
-      <p:sp>
-        <p:nvSpPr>
-          <p:cNvPr id="25" name="TextBox 24"/>
-          <p:cNvSpPr txBox="1"/>
-          <p:nvPr/>
-        </p:nvSpPr>
-        <p:spPr>
-          <a:xfrm>
-            <a:off x="4419709" y="2280037"/>
-            <a:ext cx="241133" cy="200025"/>
-          </a:xfrm>
-          <a:prstGeom prst="rect">
-            <a:avLst/>
-          </a:prstGeom>
-          <a:noFill/>
-        </p:spPr>
-        <p:txBody>
-          <a:bodyPr wrap="none" lIns="0" rIns="0" tIns="0" bIns="0" anchor="t">
-            <a:noAutofit/>
-          </a:bodyPr>
-          <a:lstStyle/>
-          <a:p>
-            <a:pPr algn="ctr"/>
-            <a:r>
-              <a:rPr sz="1260" b="0" i="0">
-                <a:solidFill>
-                  <a:srgbClr val="1A1A1A"/>
-                </a:solidFill>
-                <a:latin typeface="Arial"/>
-              </a:rPr>
-              <a:t>1.0</a:t>
-            </a:r>
-          </a:p>
-        </p:txBody>
-      </p:sp>
-      <p:sp>
-        <p:nvSpPr>
-          <p:cNvPr id="26" name="TextBox 25"/>
-          <p:cNvSpPr txBox="1"/>
-          <p:nvPr/>
-        </p:nvSpPr>
-        <p:spPr>
-          <a:xfrm>
-            <a:off x="2987423" y="2470101"/>
-            <a:ext cx="1560544" cy="228600"/>
-          </a:xfrm>
-          <a:prstGeom prst="rect">
-            <a:avLst/>
-          </a:prstGeom>
-          <a:noFill/>
-        </p:spPr>
-        <p:txBody>
-          <a:bodyPr wrap="none" lIns="0" rIns="0" tIns="0" bIns="0" anchor="t">
-            <a:noAutofit/>
-          </a:bodyPr>
-          <a:lstStyle/>
-          <a:p>
-            <a:pPr algn="ctr"/>
-            <a:r>
-              <a:rPr sz="1440" b="0" i="0">
-                <a:solidFill>
-                  <a:srgbClr val="000000"/>
-                </a:solidFill>
-                <a:latin typeface="Arial"/>
-              </a:rPr>
-              <a:t>Acquisition time (s)</a:t>
-            </a:r>
-          </a:p>
-        </p:txBody>
-      </p:sp>
-      <p:sp>
-        <p:nvSpPr>
-          <p:cNvPr id="27" name="TextBox 26"/>
-          <p:cNvSpPr txBox="1"/>
-          <p:nvPr/>
-        </p:nvSpPr>
-        <p:spPr>
-          <a:xfrm>
-            <a:off x="2709730" y="1963108"/>
-            <a:ext cx="196484" cy="200025"/>
-          </a:xfrm>
-          <a:prstGeom prst="rect">
-            <a:avLst/>
-          </a:prstGeom>
-          <a:noFill/>
-        </p:spPr>
-        <p:txBody>
-          <a:bodyPr wrap="none" lIns="0" rIns="0" tIns="0" bIns="0" anchor="t">
-            <a:noAutofit/>
-          </a:bodyPr>
-          <a:lstStyle/>
-          <a:p>
-            <a:pPr algn="r"/>
-            <a:r>
-              <a:rPr sz="1260" b="0" i="0">
-                <a:solidFill>
-                  <a:srgbClr val="1A1A1A"/>
-                </a:solidFill>
-                <a:latin typeface="Arial"/>
-              </a:rPr>
-              <a:t>50</a:t>
-            </a:r>
-          </a:p>
-        </p:txBody>
-      </p:sp>
-      <p:sp>
-        <p:nvSpPr>
-          <p:cNvPr id="28" name="TextBox 27"/>
-          <p:cNvSpPr txBox="1"/>
-          <p:nvPr/>
-        </p:nvSpPr>
-        <p:spPr>
-          <a:xfrm>
-            <a:off x="2709730" y="1595307"/>
-            <a:ext cx="196484" cy="200025"/>
-          </a:xfrm>
-          <a:prstGeom prst="rect">
-            <a:avLst/>
-          </a:prstGeom>
-          <a:noFill/>
-        </p:spPr>
-        <p:txBody>
-          <a:bodyPr wrap="none" lIns="0" rIns="0" tIns="0" bIns="0" anchor="t">
-            <a:noAutofit/>
-          </a:bodyPr>
-          <a:lstStyle/>
-          <a:p>
-            <a:pPr algn="r"/>
-            <a:r>
-              <a:rPr sz="1260" b="0" i="0">
-                <a:solidFill>
-                  <a:srgbClr val="1A1A1A"/>
-                </a:solidFill>
-                <a:latin typeface="Arial"/>
-              </a:rPr>
-              <a:t>75</a:t>
-            </a:r>
-          </a:p>
-        </p:txBody>
-      </p:sp>
-      <p:sp>
-        <p:nvSpPr>
-          <p:cNvPr id="29" name="TextBox 28"/>
-          <p:cNvSpPr txBox="1"/>
-          <p:nvPr/>
-        </p:nvSpPr>
-        <p:spPr>
-          <a:xfrm>
-            <a:off x="2620631" y="1227507"/>
-            <a:ext cx="285583" cy="200025"/>
-          </a:xfrm>
-          <a:prstGeom prst="rect">
-            <a:avLst/>
-          </a:prstGeom>
-          <a:noFill/>
-        </p:spPr>
-        <p:txBody>
-          <a:bodyPr wrap="none" lIns="0" rIns="0" tIns="0" bIns="0" anchor="t">
-            <a:noAutofit/>
-          </a:bodyPr>
-          <a:lstStyle/>
-          <a:p>
-            <a:pPr algn="r"/>
-            <a:r>
-              <a:rPr sz="1260" b="0" i="0">
-                <a:solidFill>
-                  <a:srgbClr val="1A1A1A"/>
-                </a:solidFill>
-                <a:latin typeface="Arial"/>
-              </a:rPr>
-              <a:t>100</a:t>
-            </a:r>
-          </a:p>
-        </p:txBody>
-      </p:sp>
-      <p:sp>
-        <p:nvSpPr>
-          <p:cNvPr id="30" name="TextBox 29"/>
-          <p:cNvSpPr txBox="1"/>
-          <p:nvPr/>
-        </p:nvSpPr>
-        <p:spPr>
-          <a:xfrm>
-            <a:off x="2620631" y="859707"/>
-            <a:ext cx="285583" cy="200025"/>
-          </a:xfrm>
-          <a:prstGeom prst="rect">
-            <a:avLst/>
-          </a:prstGeom>
-          <a:noFill/>
-        </p:spPr>
-        <p:txBody>
-          <a:bodyPr wrap="none" lIns="0" rIns="0" tIns="0" bIns="0" anchor="t">
-            <a:noAutofit/>
-          </a:bodyPr>
-          <a:lstStyle/>
-          <a:p>
-            <a:pPr algn="r"/>
-            <a:r>
-              <a:rPr sz="1260" b="0" i="0">
-                <a:solidFill>
-                  <a:srgbClr val="1A1A1A"/>
-                </a:solidFill>
-                <a:latin typeface="Arial"/>
-              </a:rPr>
-              <a:t>125</a:t>
-            </a:r>
-          </a:p>
-        </p:txBody>
-      </p:sp>
-      <p:sp>
-        <p:nvSpPr>
-          <p:cNvPr id="31" name="TextBox 30"/>
-          <p:cNvSpPr txBox="1"/>
-          <p:nvPr/>
-        </p:nvSpPr>
-        <p:spPr>
-          <a:xfrm rot="16200000">
-            <a:off x="1835708" y="1318316"/>
-            <a:ext cx="1292653" cy="228600"/>
-          </a:xfrm>
-          <a:prstGeom prst="rect">
-            <a:avLst/>
-          </a:prstGeom>
-          <a:noFill/>
-        </p:spPr>
-        <p:txBody>
-          <a:bodyPr wrap="none" lIns="0" rIns="0" tIns="0" bIns="0" anchor="t">
-            <a:noAutofit/>
-          </a:bodyPr>
-          <a:lstStyle/>
-          <a:p>
-            <a:pPr algn="ctr"/>
-            <a:r>
-              <a:rPr sz="1440" b="0" i="0">
-                <a:solidFill>
-                  <a:srgbClr val="000000"/>
-                </a:solidFill>
-                <a:latin typeface="Arial"/>
-              </a:rPr>
-              <a:t>LV volume (mL)</a:t>
-            </a:r>
-          </a:p>
-        </p:txBody>
-      </p:sp>
-      <p:sp>
-        <p:nvSpPr>
-          <p:cNvPr id="32" name="TextBox 31"/>
-          <p:cNvSpPr txBox="1"/>
-          <p:nvPr/>
-        </p:nvSpPr>
-        <p:spPr>
-          <a:xfrm>
-            <a:off x="1486260" y="2713193"/>
-            <a:ext cx="1926066" cy="228600"/>
-          </a:xfrm>
-          <a:prstGeom prst="rect">
-            <a:avLst/>
-          </a:prstGeom>
-          <a:noFill/>
-        </p:spPr>
-        <p:txBody>
-          <a:bodyPr wrap="none" lIns="0" rIns="0" tIns="0" bIns="0" anchor="t">
-            <a:noAutofit/>
-          </a:bodyPr>
-          <a:lstStyle/>
-          <a:p>
-            <a:pPr algn="ctr"/>
-            <a:r>
-              <a:rPr sz="1440" b="0" i="0">
-                <a:solidFill>
-                  <a:srgbClr val="000000"/>
-                </a:solidFill>
-                <a:latin typeface="Arial"/>
-              </a:rPr>
-              <a:t>(a) Atrial fibrillation (AF)</a:t>
-            </a:r>
-          </a:p>
-        </p:txBody>
-      </p:sp>
-      <p:sp>
-        <p:nvSpPr>
-          <p:cNvPr id="33" name="TextBox 32"/>
-          <p:cNvSpPr txBox="1"/>
-          <p:nvPr/>
-        </p:nvSpPr>
-        <p:spPr>
-          <a:xfrm>
-            <a:off x="5246132" y="2280037"/>
-            <a:ext cx="241133" cy="200025"/>
-          </a:xfrm>
-          <a:prstGeom prst="rect">
-            <a:avLst/>
-          </a:prstGeom>
-          <a:noFill/>
-        </p:spPr>
-        <p:txBody>
-          <a:bodyPr wrap="none" lIns="0" rIns="0" tIns="0" bIns="0" anchor="t">
-            <a:noAutofit/>
-          </a:bodyPr>
-          <a:lstStyle/>
-          <a:p>
-            <a:pPr algn="ctr"/>
-            <a:r>
-              <a:rPr sz="1260" b="0" i="0">
-                <a:solidFill>
-                  <a:srgbClr val="1A1A1A"/>
-                </a:solidFill>
-                <a:latin typeface="Arial"/>
-              </a:rPr>
-              <a:t>0.1</a:t>
-            </a:r>
-          </a:p>
-        </p:txBody>
-      </p:sp>
-      <p:sp>
-        <p:nvSpPr>
-          <p:cNvPr id="34" name="TextBox 33"/>
-          <p:cNvSpPr txBox="1"/>
-          <p:nvPr/>
-        </p:nvSpPr>
-        <p:spPr>
-          <a:xfrm>
-            <a:off x="5652389" y="2280037"/>
-            <a:ext cx="107386" cy="200025"/>
-          </a:xfrm>
-          <a:prstGeom prst="rect">
-            <a:avLst/>
-          </a:prstGeom>
-          <a:noFill/>
-        </p:spPr>
-        <p:txBody>
-          <a:bodyPr wrap="none" lIns="0" rIns="0" tIns="0" bIns="0" anchor="t">
-            <a:noAutofit/>
-          </a:bodyPr>
-          <a:lstStyle/>
-          <a:p>
-            <a:pPr algn="ctr"/>
-            <a:r>
-              <a:rPr sz="1260" b="0" i="0">
-                <a:solidFill>
-                  <a:srgbClr val="1A1A1A"/>
-                </a:solidFill>
-                <a:latin typeface="Arial"/>
-              </a:rPr>
-              <a:t>1</a:t>
-            </a:r>
-          </a:p>
-        </p:txBody>
-      </p:sp>
-      <p:sp>
-        <p:nvSpPr>
-          <p:cNvPr id="35" name="TextBox 34"/>
-          <p:cNvSpPr txBox="1"/>
-          <p:nvPr/>
-        </p:nvSpPr>
-        <p:spPr>
-          <a:xfrm>
-            <a:off x="5947224" y="2280037"/>
-            <a:ext cx="196484" cy="200025"/>
-          </a:xfrm>
-          <a:prstGeom prst="rect">
-            <a:avLst/>
-          </a:prstGeom>
-          <a:noFill/>
-        </p:spPr>
-        <p:txBody>
-          <a:bodyPr wrap="none" lIns="0" rIns="0" tIns="0" bIns="0" anchor="t">
-            <a:noAutofit/>
-          </a:bodyPr>
-          <a:lstStyle/>
-          <a:p>
-            <a:pPr algn="ctr"/>
-            <a:r>
-              <a:rPr sz="1260" b="0" i="0">
-                <a:solidFill>
-                  <a:srgbClr val="1A1A1A"/>
-                </a:solidFill>
-                <a:latin typeface="Arial"/>
-              </a:rPr>
-              <a:t>10</a:t>
-            </a:r>
-          </a:p>
-        </p:txBody>
-      </p:sp>
-      <p:sp>
-        <p:nvSpPr>
-          <p:cNvPr id="36" name="TextBox 35"/>
-          <p:cNvSpPr txBox="1"/>
-          <p:nvPr/>
-        </p:nvSpPr>
-        <p:spPr>
-          <a:xfrm>
-            <a:off x="6242059" y="2280037"/>
-            <a:ext cx="285583" cy="200025"/>
-          </a:xfrm>
-          <a:prstGeom prst="rect">
-            <a:avLst/>
-          </a:prstGeom>
-          <a:noFill/>
-        </p:spPr>
-        <p:txBody>
-          <a:bodyPr wrap="none" lIns="0" rIns="0" tIns="0" bIns="0" anchor="t">
-            <a:noAutofit/>
-          </a:bodyPr>
-          <a:lstStyle/>
-          <a:p>
-            <a:pPr algn="ctr"/>
-            <a:r>
-              <a:rPr sz="1260" b="0" i="0">
-                <a:solidFill>
-                  <a:srgbClr val="1A1A1A"/>
-                </a:solidFill>
-                <a:latin typeface="Arial"/>
-              </a:rPr>
-              <a:t>100</a:t>
-            </a:r>
-          </a:p>
-        </p:txBody>
-      </p:sp>
-      <p:sp>
-        <p:nvSpPr>
-          <p:cNvPr id="37" name="TextBox 36"/>
-          <p:cNvSpPr txBox="1"/>
-          <p:nvPr/>
-        </p:nvSpPr>
-        <p:spPr>
-          <a:xfrm>
-            <a:off x="6536893" y="2280037"/>
-            <a:ext cx="374681" cy="200025"/>
-          </a:xfrm>
-          <a:prstGeom prst="rect">
-            <a:avLst/>
-          </a:prstGeom>
-          <a:noFill/>
-        </p:spPr>
-        <p:txBody>
-          <a:bodyPr wrap="none" lIns="0" rIns="0" tIns="0" bIns="0" anchor="t">
-            <a:noAutofit/>
-          </a:bodyPr>
-          <a:lstStyle/>
-          <a:p>
-            <a:pPr algn="ctr"/>
-            <a:r>
-              <a:rPr sz="1260" b="0" i="0">
-                <a:solidFill>
-                  <a:srgbClr val="1A1A1A"/>
-                </a:solidFill>
-                <a:latin typeface="Arial"/>
-              </a:rPr>
-              <a:t>1000</a:t>
-            </a:r>
-          </a:p>
-        </p:txBody>
-      </p:sp>
-      <p:sp>
-        <p:nvSpPr>
-          <p:cNvPr id="38" name="TextBox 37"/>
-          <p:cNvSpPr txBox="1"/>
-          <p:nvPr/>
-        </p:nvSpPr>
-        <p:spPr>
-          <a:xfrm>
-            <a:off x="5605878" y="2470101"/>
-            <a:ext cx="961659" cy="228600"/>
-          </a:xfrm>
-          <a:prstGeom prst="rect">
-            <a:avLst/>
-          </a:prstGeom>
-          <a:noFill/>
-        </p:spPr>
-        <p:txBody>
-          <a:bodyPr wrap="none" lIns="0" rIns="0" tIns="0" bIns="0" anchor="t">
-            <a:noAutofit/>
-          </a:bodyPr>
-          <a:lstStyle/>
-          <a:p>
-            <a:pPr algn="ctr"/>
-            <a:r>
-              <a:rPr sz="1440" b="0" i="0">
-                <a:solidFill>
-                  <a:srgbClr val="000000"/>
-                </a:solidFill>
-                <a:latin typeface="Arial"/>
-              </a:rPr>
-              <a:t>Runtime (s)</a:t>
-            </a:r>
-          </a:p>
-        </p:txBody>
-      </p:sp>
-      <p:sp>
-        <p:nvSpPr>
-          <p:cNvPr id="39" name="TextBox 38"/>
-          <p:cNvSpPr txBox="1"/>
-          <p:nvPr/>
-        </p:nvSpPr>
-        <p:spPr>
-          <a:xfrm>
-            <a:off x="5117841" y="2132003"/>
-            <a:ext cx="107386" cy="200025"/>
-          </a:xfrm>
-          <a:prstGeom prst="rect">
-            <a:avLst/>
-          </a:prstGeom>
-          <a:noFill/>
-        </p:spPr>
-        <p:txBody>
-          <a:bodyPr wrap="none" lIns="0" rIns="0" tIns="0" bIns="0" anchor="t">
-            <a:noAutofit/>
-          </a:bodyPr>
-          <a:lstStyle/>
-          <a:p>
-            <a:pPr algn="r"/>
-            <a:r>
-              <a:rPr sz="1260" b="0" i="0">
-                <a:solidFill>
-                  <a:srgbClr val="1A1A1A"/>
-                </a:solidFill>
-                <a:latin typeface="Arial"/>
-              </a:rPr>
-              <a:t>0</a:t>
-            </a:r>
-          </a:p>
-        </p:txBody>
-      </p:sp>
-      <p:sp>
-        <p:nvSpPr>
-          <p:cNvPr id="40" name="TextBox 39"/>
-          <p:cNvSpPr txBox="1"/>
-          <p:nvPr/>
-        </p:nvSpPr>
-        <p:spPr>
-          <a:xfrm>
-            <a:off x="5117841" y="1811894"/>
-            <a:ext cx="107386" cy="200025"/>
-          </a:xfrm>
-          <a:prstGeom prst="rect">
-            <a:avLst/>
-          </a:prstGeom>
-          <a:noFill/>
-        </p:spPr>
-        <p:txBody>
-          <a:bodyPr wrap="none" lIns="0" rIns="0" tIns="0" bIns="0" anchor="t">
-            <a:noAutofit/>
-          </a:bodyPr>
-          <a:lstStyle/>
-          <a:p>
-            <a:pPr algn="r"/>
-            <a:r>
-              <a:rPr sz="1260" b="0" i="0">
-                <a:solidFill>
-                  <a:srgbClr val="1A1A1A"/>
-                </a:solidFill>
-                <a:latin typeface="Arial"/>
-              </a:rPr>
-              <a:t>5</a:t>
-            </a:r>
-          </a:p>
-        </p:txBody>
-      </p:sp>
-      <p:sp>
-        <p:nvSpPr>
-          <p:cNvPr id="41" name="TextBox 40"/>
-          <p:cNvSpPr txBox="1"/>
-          <p:nvPr/>
-        </p:nvSpPr>
-        <p:spPr>
-          <a:xfrm>
-            <a:off x="5028742" y="1491785"/>
-            <a:ext cx="196484" cy="200025"/>
-          </a:xfrm>
-          <a:prstGeom prst="rect">
-            <a:avLst/>
-          </a:prstGeom>
-          <a:noFill/>
-        </p:spPr>
-        <p:txBody>
-          <a:bodyPr wrap="none" lIns="0" rIns="0" tIns="0" bIns="0" anchor="t">
-            <a:noAutofit/>
-          </a:bodyPr>
-          <a:lstStyle/>
-          <a:p>
-            <a:pPr algn="r"/>
-            <a:r>
-              <a:rPr sz="1260" b="0" i="0">
-                <a:solidFill>
-                  <a:srgbClr val="1A1A1A"/>
-                </a:solidFill>
-                <a:latin typeface="Arial"/>
-              </a:rPr>
-              <a:t>10</a:t>
-            </a:r>
-          </a:p>
-        </p:txBody>
-      </p:sp>
-      <p:sp>
-        <p:nvSpPr>
-          <p:cNvPr id="42" name="TextBox 41"/>
-          <p:cNvSpPr txBox="1"/>
-          <p:nvPr/>
-        </p:nvSpPr>
-        <p:spPr>
-          <a:xfrm>
-            <a:off x="5028742" y="1171676"/>
-            <a:ext cx="196484" cy="200025"/>
-          </a:xfrm>
-          <a:prstGeom prst="rect">
-            <a:avLst/>
-          </a:prstGeom>
-          <a:noFill/>
-        </p:spPr>
-        <p:txBody>
-          <a:bodyPr wrap="none" lIns="0" rIns="0" tIns="0" bIns="0" anchor="t">
-            <a:noAutofit/>
-          </a:bodyPr>
-          <a:lstStyle/>
-          <a:p>
-            <a:pPr algn="r"/>
-            <a:r>
-              <a:rPr sz="1260" b="0" i="0">
-                <a:solidFill>
-                  <a:srgbClr val="1A1A1A"/>
-                </a:solidFill>
-                <a:latin typeface="Arial"/>
-              </a:rPr>
-              <a:t>15</a:t>
-            </a:r>
-          </a:p>
-        </p:txBody>
-      </p:sp>
-      <p:sp>
-        <p:nvSpPr>
-          <p:cNvPr id="43" name="TextBox 42"/>
-          <p:cNvSpPr txBox="1"/>
-          <p:nvPr/>
-        </p:nvSpPr>
-        <p:spPr>
-          <a:xfrm>
-            <a:off x="5028742" y="851567"/>
-            <a:ext cx="196484" cy="200025"/>
-          </a:xfrm>
-          <a:prstGeom prst="rect">
-            <a:avLst/>
-          </a:prstGeom>
-          <a:noFill/>
-        </p:spPr>
-        <p:txBody>
-          <a:bodyPr wrap="none" lIns="0" rIns="0" tIns="0" bIns="0" anchor="t">
-            <a:noAutofit/>
-          </a:bodyPr>
-          <a:lstStyle/>
-          <a:p>
-            <a:pPr algn="r"/>
-            <a:r>
-              <a:rPr sz="1260" b="0" i="0">
-                <a:solidFill>
-                  <a:srgbClr val="1A1A1A"/>
-                </a:solidFill>
-                <a:latin typeface="Arial"/>
-              </a:rPr>
-              <a:t>20</a:t>
-            </a:r>
-          </a:p>
-        </p:txBody>
-      </p:sp>
-      <p:sp>
-        <p:nvSpPr>
-          <p:cNvPr id="44" name="TextBox 43"/>
-          <p:cNvSpPr txBox="1"/>
-          <p:nvPr/>
-        </p:nvSpPr>
-        <p:spPr>
-          <a:xfrm>
-            <a:off x="5028742" y="531458"/>
-            <a:ext cx="196484" cy="200025"/>
-          </a:xfrm>
-          <a:prstGeom prst="rect">
-            <a:avLst/>
-          </a:prstGeom>
-          <a:noFill/>
-        </p:spPr>
-        <p:txBody>
-          <a:bodyPr wrap="none" lIns="0" rIns="0" tIns="0" bIns="0" anchor="t">
-            <a:noAutofit/>
-          </a:bodyPr>
-          <a:lstStyle/>
-          <a:p>
-            <a:pPr algn="r"/>
-            <a:r>
-              <a:rPr sz="1260" b="0" i="0">
-                <a:solidFill>
-                  <a:srgbClr val="1A1A1A"/>
-                </a:solidFill>
-                <a:latin typeface="Arial"/>
-              </a:rPr>
-              <a:t>25</a:t>
-            </a:r>
-          </a:p>
-        </p:txBody>
-      </p:sp>
-      <p:sp>
-        <p:nvSpPr>
-          <p:cNvPr id="45" name="TextBox 44"/>
-          <p:cNvSpPr txBox="1"/>
-          <p:nvPr/>
-        </p:nvSpPr>
-        <p:spPr>
-          <a:xfrm rot="16200000">
-            <a:off x="4435906" y="1318316"/>
-            <a:ext cx="907288" cy="228600"/>
-          </a:xfrm>
-          <a:prstGeom prst="rect">
-            <a:avLst/>
-          </a:prstGeom>
-          <a:noFill/>
-        </p:spPr>
-        <p:txBody>
-          <a:bodyPr wrap="none" lIns="0" rIns="0" tIns="0" bIns="0" anchor="t">
-            <a:noAutofit/>
-          </a:bodyPr>
-          <a:lstStyle/>
-          <a:p>
-            <a:pPr algn="ctr"/>
-            <a:r>
-              <a:rPr sz="1440" b="0" i="0">
-                <a:solidFill>
-                  <a:srgbClr val="000000"/>
-                </a:solidFill>
-                <a:latin typeface="Arial"/>
-              </a:rPr>
-              <a:t>VTC err. </a:t>
-            </a:r>
-            <a:r>
-              <a:rPr sz="1440" b="0" i="0">
-                <a:solidFill>
-                  <a:srgbClr val="000000"/>
-                </a:solidFill>
-                <a:latin typeface="Arial"/>
-              </a:rPr>
-              <a:t>↓</a:t>
-            </a:r>
-          </a:p>
-        </p:txBody>
-      </p:sp>
-      <p:sp>
-        <p:nvSpPr>
-          <p:cNvPr id="46" name="TextBox 45"/>
-          <p:cNvSpPr txBox="1"/>
-          <p:nvPr/>
-        </p:nvSpPr>
-        <p:spPr>
-          <a:xfrm>
-            <a:off x="7446091" y="2280037"/>
-            <a:ext cx="241133" cy="200025"/>
-          </a:xfrm>
-          <a:prstGeom prst="rect">
-            <a:avLst/>
-          </a:prstGeom>
-          <a:noFill/>
-        </p:spPr>
-        <p:txBody>
-          <a:bodyPr wrap="none" lIns="0" rIns="0" tIns="0" bIns="0" anchor="t">
-            <a:noAutofit/>
-          </a:bodyPr>
-          <a:lstStyle/>
-          <a:p>
-            <a:pPr algn="ctr"/>
-            <a:r>
-              <a:rPr sz="1260" b="0" i="0">
-                <a:solidFill>
-                  <a:srgbClr val="1A1A1A"/>
-                </a:solidFill>
-                <a:latin typeface="Arial"/>
-              </a:rPr>
-              <a:t>0.0</a:t>
-            </a:r>
-          </a:p>
-        </p:txBody>
-      </p:sp>
-      <p:sp>
-        <p:nvSpPr>
-          <p:cNvPr id="47" name="TextBox 46"/>
-          <p:cNvSpPr txBox="1"/>
-          <p:nvPr/>
-        </p:nvSpPr>
-        <p:spPr>
-          <a:xfrm>
-            <a:off x="7755123" y="2280037"/>
-            <a:ext cx="241133" cy="200025"/>
-          </a:xfrm>
-          <a:prstGeom prst="rect">
-            <a:avLst/>
-          </a:prstGeom>
-          <a:noFill/>
-        </p:spPr>
-        <p:txBody>
-          <a:bodyPr wrap="none" lIns="0" rIns="0" tIns="0" bIns="0" anchor="t">
-            <a:noAutofit/>
-          </a:bodyPr>
-          <a:lstStyle/>
-          <a:p>
-            <a:pPr algn="ctr"/>
-            <a:r>
-              <a:rPr sz="1260" b="0" i="0">
-                <a:solidFill>
-                  <a:srgbClr val="1A1A1A"/>
-                </a:solidFill>
-                <a:latin typeface="Arial"/>
-              </a:rPr>
-              <a:t>0.2</a:t>
-            </a:r>
-          </a:p>
-        </p:txBody>
-      </p:sp>
-      <p:sp>
-        <p:nvSpPr>
-          <p:cNvPr id="48" name="TextBox 47"/>
-          <p:cNvSpPr txBox="1"/>
-          <p:nvPr/>
-        </p:nvSpPr>
-        <p:spPr>
-          <a:xfrm>
-            <a:off x="8064155" y="2280037"/>
-            <a:ext cx="241133" cy="200025"/>
-          </a:xfrm>
-          <a:prstGeom prst="rect">
-            <a:avLst/>
-          </a:prstGeom>
-          <a:noFill/>
-        </p:spPr>
-        <p:txBody>
-          <a:bodyPr wrap="none" lIns="0" rIns="0" tIns="0" bIns="0" anchor="t">
-            <a:noAutofit/>
-          </a:bodyPr>
-          <a:lstStyle/>
-          <a:p>
-            <a:pPr algn="ctr"/>
-            <a:r>
-              <a:rPr sz="1260" b="0" i="0">
-                <a:solidFill>
-                  <a:srgbClr val="1A1A1A"/>
-                </a:solidFill>
-                <a:latin typeface="Arial"/>
-              </a:rPr>
-              <a:t>0.4</a:t>
-            </a:r>
-          </a:p>
-        </p:txBody>
-      </p:sp>
-      <p:sp>
-        <p:nvSpPr>
-          <p:cNvPr id="49" name="TextBox 48"/>
-          <p:cNvSpPr txBox="1"/>
-          <p:nvPr/>
-        </p:nvSpPr>
-        <p:spPr>
-          <a:xfrm>
-            <a:off x="8373188" y="2280037"/>
-            <a:ext cx="241133" cy="200025"/>
-          </a:xfrm>
-          <a:prstGeom prst="rect">
-            <a:avLst/>
-          </a:prstGeom>
-          <a:noFill/>
-        </p:spPr>
-        <p:txBody>
-          <a:bodyPr wrap="none" lIns="0" rIns="0" tIns="0" bIns="0" anchor="t">
-            <a:noAutofit/>
-          </a:bodyPr>
-          <a:lstStyle/>
-          <a:p>
-            <a:pPr algn="ctr"/>
-            <a:r>
-              <a:rPr sz="1260" b="0" i="0">
-                <a:solidFill>
-                  <a:srgbClr val="1A1A1A"/>
-                </a:solidFill>
-                <a:latin typeface="Arial"/>
-              </a:rPr>
-              <a:t>0.6</a:t>
-            </a:r>
-          </a:p>
-        </p:txBody>
-      </p:sp>
-      <p:sp>
-        <p:nvSpPr>
-          <p:cNvPr id="50" name="TextBox 49"/>
-          <p:cNvSpPr txBox="1"/>
-          <p:nvPr/>
-        </p:nvSpPr>
-        <p:spPr>
-          <a:xfrm>
-            <a:off x="8682220" y="2280037"/>
-            <a:ext cx="241133" cy="200025"/>
-          </a:xfrm>
-          <a:prstGeom prst="rect">
-            <a:avLst/>
-          </a:prstGeom>
-          <a:noFill/>
-        </p:spPr>
-        <p:txBody>
-          <a:bodyPr wrap="none" lIns="0" rIns="0" tIns="0" bIns="0" anchor="t">
-            <a:noAutofit/>
-          </a:bodyPr>
-          <a:lstStyle/>
-          <a:p>
-            <a:pPr algn="ctr"/>
-            <a:r>
-              <a:rPr sz="1260" b="0" i="0">
-                <a:solidFill>
-                  <a:srgbClr val="1A1A1A"/>
-                </a:solidFill>
-                <a:latin typeface="Arial"/>
-              </a:rPr>
-              <a:t>0.8</a:t>
-            </a:r>
-          </a:p>
-        </p:txBody>
-      </p:sp>
-      <p:sp>
-        <p:nvSpPr>
-          <p:cNvPr id="51" name="TextBox 50"/>
-          <p:cNvSpPr txBox="1"/>
-          <p:nvPr/>
-        </p:nvSpPr>
-        <p:spPr>
-          <a:xfrm>
-            <a:off x="8991252" y="2280037"/>
-            <a:ext cx="241133" cy="200025"/>
-          </a:xfrm>
-          <a:prstGeom prst="rect">
-            <a:avLst/>
-          </a:prstGeom>
-          <a:noFill/>
-        </p:spPr>
-        <p:txBody>
-          <a:bodyPr wrap="none" lIns="0" rIns="0" tIns="0" bIns="0" anchor="t">
-            <a:noAutofit/>
-          </a:bodyPr>
-          <a:lstStyle/>
-          <a:p>
-            <a:pPr algn="ctr"/>
-            <a:r>
-              <a:rPr sz="1260" b="0" i="0">
-                <a:solidFill>
-                  <a:srgbClr val="1A1A1A"/>
-                </a:solidFill>
-                <a:latin typeface="Arial"/>
-              </a:rPr>
-              <a:t>1.0</a:t>
-            </a:r>
-          </a:p>
-        </p:txBody>
-      </p:sp>
-      <p:sp>
-        <p:nvSpPr>
-          <p:cNvPr id="52" name="TextBox 51"/>
-          <p:cNvSpPr txBox="1"/>
-          <p:nvPr/>
-        </p:nvSpPr>
-        <p:spPr>
-          <a:xfrm>
-            <a:off x="7558966" y="2470101"/>
-            <a:ext cx="1560544" cy="228600"/>
-          </a:xfrm>
-          <a:prstGeom prst="rect">
-            <a:avLst/>
-          </a:prstGeom>
-          <a:noFill/>
-        </p:spPr>
-        <p:txBody>
-          <a:bodyPr wrap="none" lIns="0" rIns="0" tIns="0" bIns="0" anchor="t">
-            <a:noAutofit/>
-          </a:bodyPr>
-          <a:lstStyle/>
-          <a:p>
-            <a:pPr algn="ctr"/>
-            <a:r>
-              <a:rPr sz="1440" b="0" i="0">
-                <a:solidFill>
-                  <a:srgbClr val="000000"/>
-                </a:solidFill>
-                <a:latin typeface="Arial"/>
-              </a:rPr>
-              <a:t>Acquisition time (s)</a:t>
-            </a:r>
-          </a:p>
-        </p:txBody>
-      </p:sp>
-      <p:sp>
-        <p:nvSpPr>
-          <p:cNvPr id="53" name="TextBox 52"/>
-          <p:cNvSpPr txBox="1"/>
-          <p:nvPr/>
-        </p:nvSpPr>
-        <p:spPr>
-          <a:xfrm>
-            <a:off x="7281272" y="1949618"/>
-            <a:ext cx="196484" cy="200025"/>
-          </a:xfrm>
-          <a:prstGeom prst="rect">
-            <a:avLst/>
-          </a:prstGeom>
-          <a:noFill/>
-        </p:spPr>
-        <p:txBody>
-          <a:bodyPr wrap="none" lIns="0" rIns="0" tIns="0" bIns="0" anchor="t">
-            <a:noAutofit/>
-          </a:bodyPr>
-          <a:lstStyle/>
-          <a:p>
-            <a:pPr algn="r"/>
-            <a:r>
-              <a:rPr sz="1260" b="0" i="0">
-                <a:solidFill>
-                  <a:srgbClr val="1A1A1A"/>
-                </a:solidFill>
-                <a:latin typeface="Arial"/>
-              </a:rPr>
-              <a:t>50</a:t>
-            </a:r>
-          </a:p>
-        </p:txBody>
-      </p:sp>
-      <p:sp>
-        <p:nvSpPr>
-          <p:cNvPr id="54" name="TextBox 53"/>
-          <p:cNvSpPr txBox="1"/>
-          <p:nvPr/>
-        </p:nvSpPr>
-        <p:spPr>
-          <a:xfrm>
-            <a:off x="7281272" y="1585283"/>
-            <a:ext cx="196484" cy="200025"/>
-          </a:xfrm>
-          <a:prstGeom prst="rect">
-            <a:avLst/>
-          </a:prstGeom>
-          <a:noFill/>
-        </p:spPr>
-        <p:txBody>
-          <a:bodyPr wrap="none" lIns="0" rIns="0" tIns="0" bIns="0" anchor="t">
-            <a:noAutofit/>
-          </a:bodyPr>
-          <a:lstStyle/>
-          <a:p>
-            <a:pPr algn="r"/>
-            <a:r>
-              <a:rPr sz="1260" b="0" i="0">
-                <a:solidFill>
-                  <a:srgbClr val="1A1A1A"/>
-                </a:solidFill>
-                <a:latin typeface="Arial"/>
-              </a:rPr>
-              <a:t>75</a:t>
+              <a:t>(b) Heart rate variability (HRV)</a:t>
             </a:r>
           </a:p>
         </p:txBody>
@@ -6104,146 +5993,6 @@
       <p:sp>
         <p:nvSpPr>
           <p:cNvPr id="55" name="TextBox 54"/>
-          <p:cNvSpPr txBox="1"/>
-          <p:nvPr/>
-        </p:nvSpPr>
-        <p:spPr>
-          <a:xfrm>
-            <a:off x="7192174" y="1220949"/>
-            <a:ext cx="285583" cy="200025"/>
-          </a:xfrm>
-          <a:prstGeom prst="rect">
-            <a:avLst/>
-          </a:prstGeom>
-          <a:noFill/>
-        </p:spPr>
-        <p:txBody>
-          <a:bodyPr wrap="none" lIns="0" rIns="0" tIns="0" bIns="0" anchor="t">
-            <a:noAutofit/>
-          </a:bodyPr>
-          <a:lstStyle/>
-          <a:p>
-            <a:pPr algn="r"/>
-            <a:r>
-              <a:rPr sz="1260" b="0" i="0">
-                <a:solidFill>
-                  <a:srgbClr val="1A1A1A"/>
-                </a:solidFill>
-                <a:latin typeface="Arial"/>
-              </a:rPr>
-              <a:t>100</a:t>
-            </a:r>
-          </a:p>
-        </p:txBody>
-      </p:sp>
-      <p:sp>
-        <p:nvSpPr>
-          <p:cNvPr id="56" name="TextBox 55"/>
-          <p:cNvSpPr txBox="1"/>
-          <p:nvPr/>
-        </p:nvSpPr>
-        <p:spPr>
-          <a:xfrm>
-            <a:off x="7192174" y="856614"/>
-            <a:ext cx="285583" cy="200025"/>
-          </a:xfrm>
-          <a:prstGeom prst="rect">
-            <a:avLst/>
-          </a:prstGeom>
-          <a:noFill/>
-        </p:spPr>
-        <p:txBody>
-          <a:bodyPr wrap="none" lIns="0" rIns="0" tIns="0" bIns="0" anchor="t">
-            <a:noAutofit/>
-          </a:bodyPr>
-          <a:lstStyle/>
-          <a:p>
-            <a:pPr algn="r"/>
-            <a:r>
-              <a:rPr sz="1260" b="0" i="0">
-                <a:solidFill>
-                  <a:srgbClr val="1A1A1A"/>
-                </a:solidFill>
-                <a:latin typeface="Arial"/>
-              </a:rPr>
-              <a:t>125</a:t>
-            </a:r>
-          </a:p>
-        </p:txBody>
-      </p:sp>
-      <p:sp>
-        <p:nvSpPr>
-          <p:cNvPr id="57" name="TextBox 56"/>
-          <p:cNvSpPr txBox="1"/>
-          <p:nvPr/>
-        </p:nvSpPr>
-        <p:spPr>
-          <a:xfrm rot="16200000">
-            <a:off x="6407251" y="1318316"/>
-            <a:ext cx="1292653" cy="228600"/>
-          </a:xfrm>
-          <a:prstGeom prst="rect">
-            <a:avLst/>
-          </a:prstGeom>
-          <a:noFill/>
-        </p:spPr>
-        <p:txBody>
-          <a:bodyPr wrap="none" lIns="0" rIns="0" tIns="0" bIns="0" anchor="t">
-            <a:noAutofit/>
-          </a:bodyPr>
-          <a:lstStyle/>
-          <a:p>
-            <a:pPr algn="ctr"/>
-            <a:r>
-              <a:rPr sz="1440" b="0" i="0">
-                <a:solidFill>
-                  <a:srgbClr val="000000"/>
-                </a:solidFill>
-                <a:latin typeface="Arial"/>
-              </a:rPr>
-              <a:t>LV volume (mL)</a:t>
-            </a:r>
-          </a:p>
-        </p:txBody>
-      </p:sp>
-      <p:sp>
-        <p:nvSpPr>
-          <p:cNvPr id="58" name="TextBox 57"/>
-          <p:cNvSpPr txBox="1"/>
-          <p:nvPr/>
-        </p:nvSpPr>
-        <p:spPr>
-          <a:xfrm>
-            <a:off x="5785745" y="2713193"/>
-            <a:ext cx="2470181" cy="228600"/>
-          </a:xfrm>
-          <a:prstGeom prst="rect">
-            <a:avLst/>
-          </a:prstGeom>
-          <a:noFill/>
-        </p:spPr>
-        <p:txBody>
-          <a:bodyPr wrap="none" lIns="0" rIns="0" tIns="0" bIns="0" anchor="t">
-            <a:noAutofit/>
-          </a:bodyPr>
-          <a:lstStyle/>
-          <a:p>
-            <a:pPr algn="ctr"/>
-            <a:r>
-              <a:rPr sz="1440" b="0" i="0">
-                <a:solidFill>
-                  <a:srgbClr val="000000"/>
-                </a:solidFill>
-                <a:latin typeface="Arial"/>
-              </a:rPr>
-              <a:t>(b) Heart rate variability (HRV)</a:t>
-            </a:r>
-          </a:p>
-        </p:txBody>
-      </p:sp>
-      <p:sp>
-        <p:nvSpPr>
-          <p:cNvPr id="59" name="TextBox 58"/>
           <p:cNvSpPr txBox="1"/>
           <p:nvPr/>
         </p:nvSpPr>
@@ -6278,7 +6027,7 @@
       </p:sp>
       <p:sp>
         <p:nvSpPr>
-          <p:cNvPr id="60" name="TextBox 59"/>
+          <p:cNvPr id="56" name="TextBox 55"/>
           <p:cNvSpPr txBox="1"/>
           <p:nvPr/>
         </p:nvSpPr>
@@ -6313,7 +6062,7 @@
       </p:sp>
       <p:sp>
         <p:nvSpPr>
-          <p:cNvPr id="61" name="TextBox 60"/>
+          <p:cNvPr id="57" name="TextBox 56"/>
           <p:cNvSpPr txBox="1"/>
           <p:nvPr/>
         </p:nvSpPr>
@@ -6357,7 +6106,7 @@
       </p:sp>
       <p:sp>
         <p:nvSpPr>
-          <p:cNvPr id="62" name="TextBox 61"/>
+          <p:cNvPr id="58" name="TextBox 57"/>
           <p:cNvSpPr txBox="1"/>
           <p:nvPr/>
         </p:nvSpPr>
@@ -6401,7 +6150,7 @@
       </p:sp>
       <p:sp>
         <p:nvSpPr>
-          <p:cNvPr id="63" name="TextBox 62"/>
+          <p:cNvPr id="59" name="TextBox 58"/>
           <p:cNvSpPr txBox="1"/>
           <p:nvPr/>
         </p:nvSpPr>
@@ -6436,7 +6185,7 @@
       </p:sp>
       <p:sp>
         <p:nvSpPr>
-          <p:cNvPr id="64" name="TextBox 63"/>
+          <p:cNvPr id="60" name="TextBox 59"/>
           <p:cNvSpPr txBox="1"/>
           <p:nvPr/>
         </p:nvSpPr>
@@ -6471,7 +6220,7 @@
       </p:sp>
       <p:sp>
         <p:nvSpPr>
-          <p:cNvPr id="65" name="TextBox 64"/>
+          <p:cNvPr id="61" name="TextBox 60"/>
           <p:cNvSpPr txBox="1"/>
           <p:nvPr/>
         </p:nvSpPr>
@@ -6506,7 +6255,7 @@
       </p:sp>
       <p:sp>
         <p:nvSpPr>
-          <p:cNvPr id="66" name="TextBox 65"/>
+          <p:cNvPr id="62" name="TextBox 61"/>
           <p:cNvSpPr txBox="1"/>
           <p:nvPr/>
         </p:nvSpPr>
@@ -6574,7 +6323,7 @@
         <p:spPr>
           <a:xfrm>
             <a:off x="853440" y="356616"/>
-            <a:ext cx="1167384" cy="758952"/>
+            <a:ext cx="1167384" cy="525780"/>
           </a:xfrm>
           <a:prstGeom prst="rect">
             <a:avLst/>
@@ -6598,7 +6347,7 @@
         <p:spPr>
           <a:xfrm>
             <a:off x="2028444" y="356616"/>
-            <a:ext cx="1167384" cy="758952"/>
+            <a:ext cx="1167384" cy="525780"/>
           </a:xfrm>
           <a:prstGeom prst="rect">
             <a:avLst/>
@@ -6622,7 +6371,7 @@
         <p:spPr>
           <a:xfrm>
             <a:off x="3203448" y="356616"/>
-            <a:ext cx="1165860" cy="758952"/>
+            <a:ext cx="1165860" cy="525780"/>
           </a:xfrm>
           <a:prstGeom prst="rect">
             <a:avLst/>
@@ -6646,7 +6395,7 @@
         <p:spPr>
           <a:xfrm>
             <a:off x="4376928" y="356616"/>
-            <a:ext cx="1167384" cy="758952"/>
+            <a:ext cx="1167384" cy="525780"/>
           </a:xfrm>
           <a:prstGeom prst="rect">
             <a:avLst/>
@@ -6669,8 +6418,8 @@
         </p:blipFill>
         <p:spPr>
           <a:xfrm>
-            <a:off x="897636" y="1257300"/>
-            <a:ext cx="1120140" cy="938784"/>
+            <a:off x="897636" y="1021080"/>
+            <a:ext cx="1120140" cy="862584"/>
           </a:xfrm>
           <a:prstGeom prst="rect">
             <a:avLst/>
@@ -6693,8 +6442,8 @@
         </p:blipFill>
         <p:spPr>
           <a:xfrm>
-            <a:off x="2072640" y="1257300"/>
-            <a:ext cx="1118616" cy="938784"/>
+            <a:off x="2072640" y="1021080"/>
+            <a:ext cx="1118616" cy="862584"/>
           </a:xfrm>
           <a:prstGeom prst="rect">
             <a:avLst/>
@@ -6717,8 +6466,8 @@
         </p:blipFill>
         <p:spPr>
           <a:xfrm>
-            <a:off x="3247644" y="1257300"/>
-            <a:ext cx="1118616" cy="938784"/>
+            <a:off x="3247644" y="1021080"/>
+            <a:ext cx="1118616" cy="862584"/>
           </a:xfrm>
           <a:prstGeom prst="rect">
             <a:avLst/>
@@ -6741,8 +6490,8 @@
         </p:blipFill>
         <p:spPr>
           <a:xfrm>
-            <a:off x="4421124" y="1257300"/>
-            <a:ext cx="1120140" cy="938784"/>
+            <a:off x="4421124" y="1021080"/>
+            <a:ext cx="1120140" cy="862584"/>
           </a:xfrm>
           <a:prstGeom prst="rect">
             <a:avLst/>
@@ -6765,8 +6514,8 @@
         </p:blipFill>
         <p:spPr>
           <a:xfrm>
-            <a:off x="853440" y="2206752"/>
-            <a:ext cx="1167384" cy="800100"/>
+            <a:off x="853440" y="1891284"/>
+            <a:ext cx="1167384" cy="566928"/>
           </a:xfrm>
           <a:prstGeom prst="rect">
             <a:avLst/>
@@ -6789,8 +6538,8 @@
         </p:blipFill>
         <p:spPr>
           <a:xfrm>
-            <a:off x="2028444" y="2206752"/>
-            <a:ext cx="1167384" cy="800100"/>
+            <a:off x="2028444" y="1891284"/>
+            <a:ext cx="1167384" cy="566928"/>
           </a:xfrm>
           <a:prstGeom prst="rect">
             <a:avLst/>
@@ -6813,8 +6562,8 @@
         </p:blipFill>
         <p:spPr>
           <a:xfrm>
-            <a:off x="3203448" y="2206752"/>
-            <a:ext cx="1165860" cy="800100"/>
+            <a:off x="3203448" y="1891284"/>
+            <a:ext cx="1165860" cy="566928"/>
           </a:xfrm>
           <a:prstGeom prst="rect">
             <a:avLst/>
@@ -6837,8 +6586,8 @@
         </p:blipFill>
         <p:spPr>
           <a:xfrm>
-            <a:off x="4376928" y="2206752"/>
-            <a:ext cx="1167384" cy="800100"/>
+            <a:off x="4376928" y="1891284"/>
+            <a:ext cx="1167384" cy="566928"/>
           </a:xfrm>
           <a:prstGeom prst="rect">
             <a:avLst/>
@@ -6861,7 +6610,7 @@
         </p:blipFill>
         <p:spPr>
           <a:xfrm>
-            <a:off x="2121408" y="3150108"/>
+            <a:off x="2121408" y="2601468"/>
             <a:ext cx="1106424" cy="60960"/>
           </a:xfrm>
           <a:prstGeom prst="rect">
@@ -6877,7 +6626,7 @@
         </p:nvSpPr>
         <p:spPr>
           <a:xfrm>
-            <a:off x="1092956" y="1117705"/>
+            <a:off x="1092956" y="884326"/>
             <a:ext cx="729488" cy="103187"/>
           </a:xfrm>
           <a:prstGeom prst="rect">
@@ -6930,7 +6679,7 @@
         </p:nvSpPr>
         <p:spPr>
           <a:xfrm>
-            <a:off x="742354" y="1020686"/>
+            <a:off x="742354" y="797765"/>
             <a:ext cx="67698" cy="111125"/>
           </a:xfrm>
           <a:prstGeom prst="rect">
@@ -6965,7 +6714,7 @@
         </p:nvSpPr>
         <p:spPr>
           <a:xfrm>
-            <a:off x="742354" y="676191"/>
+            <a:off x="742354" y="560444"/>
             <a:ext cx="67698" cy="111125"/>
           </a:xfrm>
           <a:prstGeom prst="rect">
@@ -7000,7 +6749,7 @@
         </p:nvSpPr>
         <p:spPr>
           <a:xfrm>
-            <a:off x="692943" y="331696"/>
+            <a:off x="692943" y="323122"/>
             <a:ext cx="117109" cy="111125"/>
           </a:xfrm>
           <a:prstGeom prst="rect">
@@ -7035,7 +6784,7 @@
         </p:nvSpPr>
         <p:spPr>
           <a:xfrm rot="16200000">
-            <a:off x="169580" y="672771"/>
+            <a:off x="169580" y="556082"/>
             <a:ext cx="763817" cy="127000"/>
           </a:xfrm>
           <a:prstGeom prst="rect">
@@ -7070,7 +6819,7 @@
         </p:nvSpPr>
         <p:spPr>
           <a:xfrm>
-            <a:off x="943653" y="372343"/>
+            <a:off x="943653" y="363007"/>
             <a:ext cx="482234" cy="103187"/>
           </a:xfrm>
           <a:prstGeom prst="rect">
@@ -7105,8 +6854,8 @@
         </p:nvSpPr>
         <p:spPr>
           <a:xfrm>
-            <a:off x="917338" y="221487"/>
-            <a:ext cx="1080722" cy="127000"/>
+            <a:off x="1296156" y="221487"/>
+            <a:ext cx="323088" cy="127000"/>
           </a:xfrm>
           <a:prstGeom prst="rect">
             <a:avLst/>
@@ -7127,7 +6876,25 @@
                 </a:solidFill>
                 <a:latin typeface="Arial"/>
               </a:rPr>
-              <a:t>w/o cardiac-region term</a:t>
+              <a:t>w/o </a:t>
+            </a:r>
+            <a:r>
+              <a:rPr sz="800" b="0" i="0">
+                <a:solidFill>
+                  <a:srgbClr val="000000"/>
+                </a:solidFill>
+                <a:latin typeface="Cambria Math"/>
+              </a:rPr>
+              <a:t>ℒ</a:t>
+            </a:r>
+            <a:r>
+              <a:rPr sz="800" b="0" i="0" baseline="-25000">
+                <a:solidFill>
+                  <a:srgbClr val="000000"/>
+                </a:solidFill>
+                <a:latin typeface="Arial"/>
+              </a:rPr>
+              <a:t>h</a:t>
             </a:r>
           </a:p>
         </p:txBody>
@@ -7140,7 +6907,7 @@
         </p:nvSpPr>
         <p:spPr>
           <a:xfrm>
-            <a:off x="2118169" y="372343"/>
+            <a:off x="2118169" y="363007"/>
             <a:ext cx="482234" cy="103187"/>
           </a:xfrm>
           <a:prstGeom prst="rect">
@@ -7228,7 +6995,7 @@
         </p:nvSpPr>
         <p:spPr>
           <a:xfrm>
-            <a:off x="3292685" y="372343"/>
+            <a:off x="3292685" y="363007"/>
             <a:ext cx="482234" cy="103187"/>
           </a:xfrm>
           <a:prstGeom prst="rect">
@@ -7316,7 +7083,7 @@
         </p:nvSpPr>
         <p:spPr>
           <a:xfrm>
-            <a:off x="4467200" y="372343"/>
+            <a:off x="4467200" y="363007"/>
             <a:ext cx="482234" cy="103187"/>
           </a:xfrm>
           <a:prstGeom prst="rect">
@@ -7386,7 +7153,7 @@
         </p:nvSpPr>
         <p:spPr>
           <a:xfrm>
-            <a:off x="943653" y="1277129"/>
+            <a:off x="943653" y="1037950"/>
             <a:ext cx="293719" cy="103187"/>
           </a:xfrm>
           <a:prstGeom prst="rect">
@@ -7404,7 +7171,7 @@
             <a:r>
               <a:rPr sz="650" b="0" i="0">
                 <a:solidFill>
-                  <a:srgbClr val="FFFFFF"/>
+                  <a:srgbClr val="000000"/>
                 </a:solidFill>
                 <a:latin typeface="Arial"/>
               </a:rPr>
@@ -7421,7 +7188,7 @@
         </p:nvSpPr>
         <p:spPr>
           <a:xfrm>
-            <a:off x="2118169" y="1277129"/>
+            <a:off x="2118169" y="1037950"/>
             <a:ext cx="293719" cy="103187"/>
           </a:xfrm>
           <a:prstGeom prst="rect">
@@ -7439,7 +7206,7 @@
             <a:r>
               <a:rPr sz="650" b="0" i="0">
                 <a:solidFill>
-                  <a:srgbClr val="FFFFFF"/>
+                  <a:srgbClr val="000000"/>
                 </a:solidFill>
                 <a:latin typeface="Arial"/>
               </a:rPr>
@@ -7456,7 +7223,7 @@
         </p:nvSpPr>
         <p:spPr>
           <a:xfrm>
-            <a:off x="3292685" y="1277129"/>
+            <a:off x="3292685" y="1037950"/>
             <a:ext cx="293719" cy="103187"/>
           </a:xfrm>
           <a:prstGeom prst="rect">
@@ -7474,7 +7241,7 @@
             <a:r>
               <a:rPr sz="650" b="0" i="0">
                 <a:solidFill>
-                  <a:srgbClr val="FFFFFF"/>
+                  <a:srgbClr val="000000"/>
                 </a:solidFill>
                 <a:latin typeface="Arial"/>
               </a:rPr>
@@ -7491,7 +7258,7 @@
         </p:nvSpPr>
         <p:spPr>
           <a:xfrm>
-            <a:off x="4467200" y="1277129"/>
+            <a:off x="4467200" y="1037950"/>
             <a:ext cx="293719" cy="103187"/>
           </a:xfrm>
           <a:prstGeom prst="rect">
@@ -7509,7 +7276,7 @@
             <a:r>
               <a:rPr sz="650" b="0" i="0">
                 <a:solidFill>
-                  <a:srgbClr val="FFFFFF"/>
+                  <a:srgbClr val="000000"/>
                 </a:solidFill>
                 <a:latin typeface="Arial"/>
               </a:rPr>
@@ -7526,7 +7293,7 @@
         </p:nvSpPr>
         <p:spPr>
           <a:xfrm>
-            <a:off x="887522" y="2997414"/>
+            <a:off x="887522" y="2448774"/>
             <a:ext cx="124452" cy="95249"/>
           </a:xfrm>
           <a:prstGeom prst="rect">
@@ -7561,7 +7328,7 @@
         </p:nvSpPr>
         <p:spPr>
           <a:xfrm>
-            <a:off x="1441651" y="2997414"/>
+            <a:off x="1441651" y="2448774"/>
             <a:ext cx="124452" cy="95249"/>
           </a:xfrm>
           <a:prstGeom prst="rect">
@@ -7596,7 +7363,7 @@
         </p:nvSpPr>
         <p:spPr>
           <a:xfrm>
-            <a:off x="1099901" y="3083536"/>
+            <a:off x="1099901" y="2534896"/>
             <a:ext cx="715597" cy="103187"/>
           </a:xfrm>
           <a:prstGeom prst="rect">
@@ -7631,7 +7398,7 @@
         </p:nvSpPr>
         <p:spPr>
           <a:xfrm>
-            <a:off x="692943" y="2712412"/>
+            <a:off x="692943" y="2223638"/>
             <a:ext cx="117109" cy="111125"/>
           </a:xfrm>
           <a:prstGeom prst="rect">
@@ -7666,8 +7433,8 @@
         </p:nvSpPr>
         <p:spPr>
           <a:xfrm>
-            <a:off x="692943" y="2485247"/>
-            <a:ext cx="117109" cy="111125"/>
+            <a:off x="643532" y="1910651"/>
+            <a:ext cx="166520" cy="111125"/>
           </a:xfrm>
           <a:prstGeom prst="rect">
             <a:avLst/>
@@ -7688,7 +7455,7 @@
                 </a:solidFill>
                 <a:latin typeface="Arial"/>
               </a:rPr>
-              <a:t>75</a:t>
+              <a:t>100</a:t>
             </a:r>
           </a:p>
         </p:txBody>
@@ -7700,9 +7467,394 @@
           <p:nvPr/>
         </p:nvSpPr>
         <p:spPr>
-          <a:xfrm>
-            <a:off x="643532" y="2258082"/>
-            <a:ext cx="166520" cy="111125"/>
+          <a:xfrm rot="16200000">
+            <a:off x="187440" y="2091359"/>
+            <a:ext cx="728098" cy="127000"/>
+          </a:xfrm>
+          <a:prstGeom prst="rect">
+            <a:avLst/>
+          </a:prstGeom>
+          <a:noFill/>
+        </p:spPr>
+        <p:txBody>
+          <a:bodyPr wrap="none" lIns="0" rIns="0" tIns="0" bIns="0" anchor="t">
+            <a:noAutofit/>
+          </a:bodyPr>
+          <a:lstStyle/>
+          <a:p>
+            <a:pPr algn="ctr"/>
+            <a:r>
+              <a:rPr sz="800" b="0" i="0">
+                <a:solidFill>
+                  <a:srgbClr val="000000"/>
+                </a:solidFill>
+                <a:latin typeface="Arial"/>
+              </a:rPr>
+              <a:t>LV volume (mL)</a:t>
+            </a:r>
+          </a:p>
+        </p:txBody>
+      </p:sp>
+      <p:sp>
+        <p:nvSpPr>
+          <p:cNvPr id="38" name="TextBox 37"/>
+          <p:cNvSpPr txBox="1"/>
+          <p:nvPr/>
+        </p:nvSpPr>
+        <p:spPr>
+          <a:xfrm>
+            <a:off x="943653" y="2292371"/>
+            <a:ext cx="311975" cy="103187"/>
+          </a:xfrm>
+          <a:prstGeom prst="rect">
+            <a:avLst/>
+          </a:prstGeom>
+          <a:noFill/>
+        </p:spPr>
+        <p:txBody>
+          <a:bodyPr wrap="none" lIns="0" rIns="0" tIns="0" bIns="0" anchor="t">
+            <a:noAutofit/>
+          </a:bodyPr>
+          <a:lstStyle/>
+          <a:p>
+            <a:pPr algn="l"/>
+            <a:r>
+              <a:rPr sz="650" b="0" i="0">
+                <a:solidFill>
+                  <a:srgbClr val="000000"/>
+                </a:solidFill>
+                <a:latin typeface="Arial"/>
+              </a:rPr>
+              <a:t>EF 17%</a:t>
+            </a:r>
+          </a:p>
+        </p:txBody>
+      </p:sp>
+      <p:sp>
+        <p:nvSpPr>
+          <p:cNvPr id="39" name="TextBox 38"/>
+          <p:cNvSpPr txBox="1"/>
+          <p:nvPr/>
+        </p:nvSpPr>
+        <p:spPr>
+          <a:xfrm>
+            <a:off x="2062038" y="2448774"/>
+            <a:ext cx="124452" cy="95249"/>
+          </a:xfrm>
+          <a:prstGeom prst="rect">
+            <a:avLst/>
+          </a:prstGeom>
+          <a:noFill/>
+        </p:spPr>
+        <p:txBody>
+          <a:bodyPr wrap="none" lIns="0" rIns="0" tIns="0" bIns="0" anchor="t">
+            <a:noAutofit/>
+          </a:bodyPr>
+          <a:lstStyle/>
+          <a:p>
+            <a:pPr algn="ctr"/>
+            <a:r>
+              <a:rPr sz="600" b="0" i="0">
+                <a:solidFill>
+                  <a:srgbClr val="1A1A1A"/>
+                </a:solidFill>
+                <a:latin typeface="Arial"/>
+              </a:rPr>
+              <a:t>0.0</a:t>
+            </a:r>
+          </a:p>
+        </p:txBody>
+      </p:sp>
+      <p:sp>
+        <p:nvSpPr>
+          <p:cNvPr id="40" name="TextBox 39"/>
+          <p:cNvSpPr txBox="1"/>
+          <p:nvPr/>
+        </p:nvSpPr>
+        <p:spPr>
+          <a:xfrm>
+            <a:off x="2616167" y="2448774"/>
+            <a:ext cx="124452" cy="95249"/>
+          </a:xfrm>
+          <a:prstGeom prst="rect">
+            <a:avLst/>
+          </a:prstGeom>
+          <a:noFill/>
+        </p:spPr>
+        <p:txBody>
+          <a:bodyPr wrap="none" lIns="0" rIns="0" tIns="0" bIns="0" anchor="t">
+            <a:noAutofit/>
+          </a:bodyPr>
+          <a:lstStyle/>
+          <a:p>
+            <a:pPr algn="ctr"/>
+            <a:r>
+              <a:rPr sz="600" b="0" i="0">
+                <a:solidFill>
+                  <a:srgbClr val="1A1A1A"/>
+                </a:solidFill>
+                <a:latin typeface="Arial"/>
+              </a:rPr>
+              <a:t>0.5</a:t>
+            </a:r>
+          </a:p>
+        </p:txBody>
+      </p:sp>
+      <p:sp>
+        <p:nvSpPr>
+          <p:cNvPr id="41" name="TextBox 40"/>
+          <p:cNvSpPr txBox="1"/>
+          <p:nvPr/>
+        </p:nvSpPr>
+        <p:spPr>
+          <a:xfrm>
+            <a:off x="2118169" y="2292371"/>
+            <a:ext cx="311975" cy="103187"/>
+          </a:xfrm>
+          <a:prstGeom prst="rect">
+            <a:avLst/>
+          </a:prstGeom>
+          <a:noFill/>
+        </p:spPr>
+        <p:txBody>
+          <a:bodyPr wrap="none" lIns="0" rIns="0" tIns="0" bIns="0" anchor="t">
+            <a:noAutofit/>
+          </a:bodyPr>
+          <a:lstStyle/>
+          <a:p>
+            <a:pPr algn="l"/>
+            <a:r>
+              <a:rPr sz="650" b="0" i="0">
+                <a:solidFill>
+                  <a:srgbClr val="000000"/>
+                </a:solidFill>
+                <a:latin typeface="Arial"/>
+              </a:rPr>
+              <a:t>EF 30%</a:t>
+            </a:r>
+          </a:p>
+        </p:txBody>
+      </p:sp>
+      <p:sp>
+        <p:nvSpPr>
+          <p:cNvPr id="42" name="TextBox 41"/>
+          <p:cNvSpPr txBox="1"/>
+          <p:nvPr/>
+        </p:nvSpPr>
+        <p:spPr>
+          <a:xfrm>
+            <a:off x="3236554" y="2448774"/>
+            <a:ext cx="124452" cy="95249"/>
+          </a:xfrm>
+          <a:prstGeom prst="rect">
+            <a:avLst/>
+          </a:prstGeom>
+          <a:noFill/>
+        </p:spPr>
+        <p:txBody>
+          <a:bodyPr wrap="none" lIns="0" rIns="0" tIns="0" bIns="0" anchor="t">
+            <a:noAutofit/>
+          </a:bodyPr>
+          <a:lstStyle/>
+          <a:p>
+            <a:pPr algn="ctr"/>
+            <a:r>
+              <a:rPr sz="600" b="0" i="0">
+                <a:solidFill>
+                  <a:srgbClr val="1A1A1A"/>
+                </a:solidFill>
+                <a:latin typeface="Arial"/>
+              </a:rPr>
+              <a:t>0.0</a:t>
+            </a:r>
+          </a:p>
+        </p:txBody>
+      </p:sp>
+      <p:sp>
+        <p:nvSpPr>
+          <p:cNvPr id="43" name="TextBox 42"/>
+          <p:cNvSpPr txBox="1"/>
+          <p:nvPr/>
+        </p:nvSpPr>
+        <p:spPr>
+          <a:xfrm>
+            <a:off x="3790683" y="2448774"/>
+            <a:ext cx="124452" cy="95249"/>
+          </a:xfrm>
+          <a:prstGeom prst="rect">
+            <a:avLst/>
+          </a:prstGeom>
+          <a:noFill/>
+        </p:spPr>
+        <p:txBody>
+          <a:bodyPr wrap="none" lIns="0" rIns="0" tIns="0" bIns="0" anchor="t">
+            <a:noAutofit/>
+          </a:bodyPr>
+          <a:lstStyle/>
+          <a:p>
+            <a:pPr algn="ctr"/>
+            <a:r>
+              <a:rPr sz="600" b="0" i="0">
+                <a:solidFill>
+                  <a:srgbClr val="1A1A1A"/>
+                </a:solidFill>
+                <a:latin typeface="Arial"/>
+              </a:rPr>
+              <a:t>0.5</a:t>
+            </a:r>
+          </a:p>
+        </p:txBody>
+      </p:sp>
+      <p:sp>
+        <p:nvSpPr>
+          <p:cNvPr id="44" name="TextBox 43"/>
+          <p:cNvSpPr txBox="1"/>
+          <p:nvPr/>
+        </p:nvSpPr>
+        <p:spPr>
+          <a:xfrm>
+            <a:off x="3292685" y="2292371"/>
+            <a:ext cx="311975" cy="103187"/>
+          </a:xfrm>
+          <a:prstGeom prst="rect">
+            <a:avLst/>
+          </a:prstGeom>
+          <a:noFill/>
+        </p:spPr>
+        <p:txBody>
+          <a:bodyPr wrap="none" lIns="0" rIns="0" tIns="0" bIns="0" anchor="t">
+            <a:noAutofit/>
+          </a:bodyPr>
+          <a:lstStyle/>
+          <a:p>
+            <a:pPr algn="l"/>
+            <a:r>
+              <a:rPr sz="650" b="0" i="0">
+                <a:solidFill>
+                  <a:srgbClr val="000000"/>
+                </a:solidFill>
+                <a:latin typeface="Arial"/>
+              </a:rPr>
+              <a:t>EF 60%</a:t>
+            </a:r>
+          </a:p>
+        </p:txBody>
+      </p:sp>
+      <p:sp>
+        <p:nvSpPr>
+          <p:cNvPr id="45" name="TextBox 44"/>
+          <p:cNvSpPr txBox="1"/>
+          <p:nvPr/>
+        </p:nvSpPr>
+        <p:spPr>
+          <a:xfrm>
+            <a:off x="4411070" y="2448774"/>
+            <a:ext cx="124452" cy="95249"/>
+          </a:xfrm>
+          <a:prstGeom prst="rect">
+            <a:avLst/>
+          </a:prstGeom>
+          <a:noFill/>
+        </p:spPr>
+        <p:txBody>
+          <a:bodyPr wrap="none" lIns="0" rIns="0" tIns="0" bIns="0" anchor="t">
+            <a:noAutofit/>
+          </a:bodyPr>
+          <a:lstStyle/>
+          <a:p>
+            <a:pPr algn="ctr"/>
+            <a:r>
+              <a:rPr sz="600" b="0" i="0">
+                <a:solidFill>
+                  <a:srgbClr val="1A1A1A"/>
+                </a:solidFill>
+                <a:latin typeface="Arial"/>
+              </a:rPr>
+              <a:t>0.0</a:t>
+            </a:r>
+          </a:p>
+        </p:txBody>
+      </p:sp>
+      <p:sp>
+        <p:nvSpPr>
+          <p:cNvPr id="46" name="TextBox 45"/>
+          <p:cNvSpPr txBox="1"/>
+          <p:nvPr/>
+        </p:nvSpPr>
+        <p:spPr>
+          <a:xfrm>
+            <a:off x="4965198" y="2448774"/>
+            <a:ext cx="124452" cy="95249"/>
+          </a:xfrm>
+          <a:prstGeom prst="rect">
+            <a:avLst/>
+          </a:prstGeom>
+          <a:noFill/>
+        </p:spPr>
+        <p:txBody>
+          <a:bodyPr wrap="none" lIns="0" rIns="0" tIns="0" bIns="0" anchor="t">
+            <a:noAutofit/>
+          </a:bodyPr>
+          <a:lstStyle/>
+          <a:p>
+            <a:pPr algn="ctr"/>
+            <a:r>
+              <a:rPr sz="600" b="0" i="0">
+                <a:solidFill>
+                  <a:srgbClr val="1A1A1A"/>
+                </a:solidFill>
+                <a:latin typeface="Arial"/>
+              </a:rPr>
+              <a:t>0.5</a:t>
+            </a:r>
+          </a:p>
+        </p:txBody>
+      </p:sp>
+      <p:sp>
+        <p:nvSpPr>
+          <p:cNvPr id="47" name="TextBox 46"/>
+          <p:cNvSpPr txBox="1"/>
+          <p:nvPr/>
+        </p:nvSpPr>
+        <p:spPr>
+          <a:xfrm>
+            <a:off x="4467200" y="2292371"/>
+            <a:ext cx="311975" cy="103187"/>
+          </a:xfrm>
+          <a:prstGeom prst="rect">
+            <a:avLst/>
+          </a:prstGeom>
+          <a:noFill/>
+        </p:spPr>
+        <p:txBody>
+          <a:bodyPr wrap="none" lIns="0" rIns="0" tIns="0" bIns="0" anchor="t">
+            <a:noAutofit/>
+          </a:bodyPr>
+          <a:lstStyle/>
+          <a:p>
+            <a:pPr algn="l"/>
+            <a:r>
+              <a:rPr sz="650" b="0" i="0">
+                <a:solidFill>
+                  <a:srgbClr val="000000"/>
+                </a:solidFill>
+                <a:latin typeface="Arial"/>
+              </a:rPr>
+              <a:t>EF 60%</a:t>
+            </a:r>
+          </a:p>
+        </p:txBody>
+      </p:sp>
+      <p:sp>
+        <p:nvSpPr>
+          <p:cNvPr id="48" name="TextBox 47"/>
+          <p:cNvSpPr txBox="1"/>
+          <p:nvPr/>
+        </p:nvSpPr>
+        <p:spPr>
+          <a:xfrm>
+            <a:off x="234950" y="534849"/>
+            <a:ext cx="157988" cy="142875"/>
           </a:xfrm>
           <a:prstGeom prst="rect">
             <a:avLst/>
@@ -7717,503 +7869,118 @@
           <a:p>
             <a:pPr algn="r"/>
             <a:r>
+              <a:rPr sz="900" b="1" i="0">
+                <a:solidFill>
+                  <a:srgbClr val="000000"/>
+                </a:solidFill>
+                <a:latin typeface="Arial"/>
+              </a:rPr>
+              <a:t>(a)</a:t>
+            </a:r>
+          </a:p>
+        </p:txBody>
+      </p:sp>
+      <p:sp>
+        <p:nvSpPr>
+          <p:cNvPr id="49" name="TextBox 48"/>
+          <p:cNvSpPr txBox="1"/>
+          <p:nvPr/>
+        </p:nvSpPr>
+        <p:spPr>
+          <a:xfrm>
+            <a:off x="228600" y="1368274"/>
+            <a:ext cx="164337" cy="142875"/>
+          </a:xfrm>
+          <a:prstGeom prst="rect">
+            <a:avLst/>
+          </a:prstGeom>
+          <a:noFill/>
+        </p:spPr>
+        <p:txBody>
+          <a:bodyPr wrap="none" lIns="0" rIns="0" tIns="0" bIns="0" anchor="t">
+            <a:noAutofit/>
+          </a:bodyPr>
+          <a:lstStyle/>
+          <a:p>
+            <a:pPr algn="r"/>
+            <a:r>
+              <a:rPr sz="900" b="1" i="0">
+                <a:solidFill>
+                  <a:srgbClr val="000000"/>
+                </a:solidFill>
+                <a:latin typeface="Arial"/>
+              </a:rPr>
+              <a:t>(b)</a:t>
+            </a:r>
+          </a:p>
+        </p:txBody>
+      </p:sp>
+      <p:sp>
+        <p:nvSpPr>
+          <p:cNvPr id="50" name="TextBox 49"/>
+          <p:cNvSpPr txBox="1"/>
+          <p:nvPr/>
+        </p:nvSpPr>
+        <p:spPr>
+          <a:xfrm>
+            <a:off x="234950" y="2070126"/>
+            <a:ext cx="157988" cy="142875"/>
+          </a:xfrm>
+          <a:prstGeom prst="rect">
+            <a:avLst/>
+          </a:prstGeom>
+          <a:noFill/>
+        </p:spPr>
+        <p:txBody>
+          <a:bodyPr wrap="none" lIns="0" rIns="0" tIns="0" bIns="0" anchor="t">
+            <a:noAutofit/>
+          </a:bodyPr>
+          <a:lstStyle/>
+          <a:p>
+            <a:pPr algn="r"/>
+            <a:r>
+              <a:rPr sz="900" b="1" i="0">
+                <a:solidFill>
+                  <a:srgbClr val="000000"/>
+                </a:solidFill>
+                <a:latin typeface="Arial"/>
+              </a:rPr>
+              <a:t>(c)</a:t>
+            </a:r>
+          </a:p>
+        </p:txBody>
+      </p:sp>
+      <p:sp>
+        <p:nvSpPr>
+          <p:cNvPr id="51" name="TextBox 50"/>
+          <p:cNvSpPr txBox="1"/>
+          <p:nvPr/>
+        </p:nvSpPr>
+        <p:spPr>
+          <a:xfrm>
+            <a:off x="2389310" y="2574663"/>
+            <a:ext cx="517556" cy="111125"/>
+          </a:xfrm>
+          <a:prstGeom prst="rect">
+            <a:avLst/>
+          </a:prstGeom>
+          <a:noFill/>
+        </p:spPr>
+        <p:txBody>
+          <a:bodyPr wrap="none" lIns="0" rIns="0" tIns="0" bIns="0" anchor="t">
+            <a:noAutofit/>
+          </a:bodyPr>
+          <a:lstStyle/>
+          <a:p>
+            <a:pPr algn="l"/>
+            <a:r>
               <a:rPr sz="700" b="0" i="0">
                 <a:solidFill>
-                  <a:srgbClr val="1A1A1A"/>
-                </a:solidFill>
-                <a:latin typeface="Arial"/>
-              </a:rPr>
-              <a:t>100</a:t>
-            </a:r>
-          </a:p>
-        </p:txBody>
-      </p:sp>
-      <p:sp>
-        <p:nvSpPr>
-          <p:cNvPr id="38" name="TextBox 37"/>
-          <p:cNvSpPr txBox="1"/>
-          <p:nvPr/>
-        </p:nvSpPr>
-        <p:spPr>
-          <a:xfrm rot="16200000">
-            <a:off x="187440" y="2523310"/>
-            <a:ext cx="728098" cy="127000"/>
-          </a:xfrm>
-          <a:prstGeom prst="rect">
-            <a:avLst/>
-          </a:prstGeom>
-          <a:noFill/>
-        </p:spPr>
-        <p:txBody>
-          <a:bodyPr wrap="none" lIns="0" rIns="0" tIns="0" bIns="0" anchor="t">
-            <a:noAutofit/>
-          </a:bodyPr>
-          <a:lstStyle/>
-          <a:p>
-            <a:pPr algn="ctr"/>
-            <a:r>
-              <a:rPr sz="800" b="0" i="0">
-                <a:solidFill>
                   <a:srgbClr val="000000"/>
                 </a:solidFill>
                 <a:latin typeface="Arial"/>
               </a:rPr>
-              <a:t>LV volume (mL)</a:t>
-            </a:r>
-          </a:p>
-        </p:txBody>
-      </p:sp>
-      <p:sp>
-        <p:nvSpPr>
-          <p:cNvPr id="39" name="TextBox 38"/>
-          <p:cNvSpPr txBox="1"/>
-          <p:nvPr/>
-        </p:nvSpPr>
-        <p:spPr>
-          <a:xfrm>
-            <a:off x="943653" y="2831676"/>
-            <a:ext cx="311975" cy="103187"/>
-          </a:xfrm>
-          <a:prstGeom prst="rect">
-            <a:avLst/>
-          </a:prstGeom>
-          <a:noFill/>
-        </p:spPr>
-        <p:txBody>
-          <a:bodyPr wrap="none" lIns="0" rIns="0" tIns="0" bIns="0" anchor="t">
-            <a:noAutofit/>
-          </a:bodyPr>
-          <a:lstStyle/>
-          <a:p>
-            <a:pPr algn="l"/>
-            <a:r>
-              <a:rPr sz="650" b="0" i="0">
-                <a:solidFill>
-                  <a:srgbClr val="000000"/>
-                </a:solidFill>
-                <a:latin typeface="Arial"/>
-              </a:rPr>
-              <a:t>EF 17%</a:t>
-            </a:r>
-          </a:p>
-        </p:txBody>
-      </p:sp>
-      <p:sp>
-        <p:nvSpPr>
-          <p:cNvPr id="40" name="TextBox 39"/>
-          <p:cNvSpPr txBox="1"/>
-          <p:nvPr/>
-        </p:nvSpPr>
-        <p:spPr>
-          <a:xfrm>
-            <a:off x="2062038" y="2997414"/>
-            <a:ext cx="124452" cy="95249"/>
-          </a:xfrm>
-          <a:prstGeom prst="rect">
-            <a:avLst/>
-          </a:prstGeom>
-          <a:noFill/>
-        </p:spPr>
-        <p:txBody>
-          <a:bodyPr wrap="none" lIns="0" rIns="0" tIns="0" bIns="0" anchor="t">
-            <a:noAutofit/>
-          </a:bodyPr>
-          <a:lstStyle/>
-          <a:p>
-            <a:pPr algn="ctr"/>
-            <a:r>
-              <a:rPr sz="600" b="0" i="0">
-                <a:solidFill>
-                  <a:srgbClr val="1A1A1A"/>
-                </a:solidFill>
-                <a:latin typeface="Arial"/>
-              </a:rPr>
-              <a:t>0.0</a:t>
-            </a:r>
-          </a:p>
-        </p:txBody>
-      </p:sp>
-      <p:sp>
-        <p:nvSpPr>
-          <p:cNvPr id="41" name="TextBox 40"/>
-          <p:cNvSpPr txBox="1"/>
-          <p:nvPr/>
-        </p:nvSpPr>
-        <p:spPr>
-          <a:xfrm>
-            <a:off x="2616167" y="2997414"/>
-            <a:ext cx="124452" cy="95249"/>
-          </a:xfrm>
-          <a:prstGeom prst="rect">
-            <a:avLst/>
-          </a:prstGeom>
-          <a:noFill/>
-        </p:spPr>
-        <p:txBody>
-          <a:bodyPr wrap="none" lIns="0" rIns="0" tIns="0" bIns="0" anchor="t">
-            <a:noAutofit/>
-          </a:bodyPr>
-          <a:lstStyle/>
-          <a:p>
-            <a:pPr algn="ctr"/>
-            <a:r>
-              <a:rPr sz="600" b="0" i="0">
-                <a:solidFill>
-                  <a:srgbClr val="1A1A1A"/>
-                </a:solidFill>
-                <a:latin typeface="Arial"/>
-              </a:rPr>
-              <a:t>0.5</a:t>
-            </a:r>
-          </a:p>
-        </p:txBody>
-      </p:sp>
-      <p:sp>
-        <p:nvSpPr>
-          <p:cNvPr id="42" name="TextBox 41"/>
-          <p:cNvSpPr txBox="1"/>
-          <p:nvPr/>
-        </p:nvSpPr>
-        <p:spPr>
-          <a:xfrm>
-            <a:off x="2118169" y="2831676"/>
-            <a:ext cx="311975" cy="103187"/>
-          </a:xfrm>
-          <a:prstGeom prst="rect">
-            <a:avLst/>
-          </a:prstGeom>
-          <a:noFill/>
-        </p:spPr>
-        <p:txBody>
-          <a:bodyPr wrap="none" lIns="0" rIns="0" tIns="0" bIns="0" anchor="t">
-            <a:noAutofit/>
-          </a:bodyPr>
-          <a:lstStyle/>
-          <a:p>
-            <a:pPr algn="l"/>
-            <a:r>
-              <a:rPr sz="650" b="0" i="0">
-                <a:solidFill>
-                  <a:srgbClr val="000000"/>
-                </a:solidFill>
-                <a:latin typeface="Arial"/>
-              </a:rPr>
-              <a:t>EF 30%</a:t>
-            </a:r>
-          </a:p>
-        </p:txBody>
-      </p:sp>
-      <p:sp>
-        <p:nvSpPr>
-          <p:cNvPr id="43" name="TextBox 42"/>
-          <p:cNvSpPr txBox="1"/>
-          <p:nvPr/>
-        </p:nvSpPr>
-        <p:spPr>
-          <a:xfrm>
-            <a:off x="3236554" y="2997414"/>
-            <a:ext cx="124452" cy="95249"/>
-          </a:xfrm>
-          <a:prstGeom prst="rect">
-            <a:avLst/>
-          </a:prstGeom>
-          <a:noFill/>
-        </p:spPr>
-        <p:txBody>
-          <a:bodyPr wrap="none" lIns="0" rIns="0" tIns="0" bIns="0" anchor="t">
-            <a:noAutofit/>
-          </a:bodyPr>
-          <a:lstStyle/>
-          <a:p>
-            <a:pPr algn="ctr"/>
-            <a:r>
-              <a:rPr sz="600" b="0" i="0">
-                <a:solidFill>
-                  <a:srgbClr val="1A1A1A"/>
-                </a:solidFill>
-                <a:latin typeface="Arial"/>
-              </a:rPr>
-              <a:t>0.0</a:t>
-            </a:r>
-          </a:p>
-        </p:txBody>
-      </p:sp>
-      <p:sp>
-        <p:nvSpPr>
-          <p:cNvPr id="44" name="TextBox 43"/>
-          <p:cNvSpPr txBox="1"/>
-          <p:nvPr/>
-        </p:nvSpPr>
-        <p:spPr>
-          <a:xfrm>
-            <a:off x="3790683" y="2997414"/>
-            <a:ext cx="124452" cy="95249"/>
-          </a:xfrm>
-          <a:prstGeom prst="rect">
-            <a:avLst/>
-          </a:prstGeom>
-          <a:noFill/>
-        </p:spPr>
-        <p:txBody>
-          <a:bodyPr wrap="none" lIns="0" rIns="0" tIns="0" bIns="0" anchor="t">
-            <a:noAutofit/>
-          </a:bodyPr>
-          <a:lstStyle/>
-          <a:p>
-            <a:pPr algn="ctr"/>
-            <a:r>
-              <a:rPr sz="600" b="0" i="0">
-                <a:solidFill>
-                  <a:srgbClr val="1A1A1A"/>
-                </a:solidFill>
-                <a:latin typeface="Arial"/>
-              </a:rPr>
-              <a:t>0.5</a:t>
-            </a:r>
-          </a:p>
-        </p:txBody>
-      </p:sp>
-      <p:sp>
-        <p:nvSpPr>
-          <p:cNvPr id="45" name="TextBox 44"/>
-          <p:cNvSpPr txBox="1"/>
-          <p:nvPr/>
-        </p:nvSpPr>
-        <p:spPr>
-          <a:xfrm>
-            <a:off x="3292685" y="2831676"/>
-            <a:ext cx="311975" cy="103187"/>
-          </a:xfrm>
-          <a:prstGeom prst="rect">
-            <a:avLst/>
-          </a:prstGeom>
-          <a:noFill/>
-        </p:spPr>
-        <p:txBody>
-          <a:bodyPr wrap="none" lIns="0" rIns="0" tIns="0" bIns="0" anchor="t">
-            <a:noAutofit/>
-          </a:bodyPr>
-          <a:lstStyle/>
-          <a:p>
-            <a:pPr algn="l"/>
-            <a:r>
-              <a:rPr sz="650" b="0" i="0">
-                <a:solidFill>
-                  <a:srgbClr val="000000"/>
-                </a:solidFill>
-                <a:latin typeface="Arial"/>
-              </a:rPr>
-              <a:t>EF 60%</a:t>
-            </a:r>
-          </a:p>
-        </p:txBody>
-      </p:sp>
-      <p:sp>
-        <p:nvSpPr>
-          <p:cNvPr id="46" name="TextBox 45"/>
-          <p:cNvSpPr txBox="1"/>
-          <p:nvPr/>
-        </p:nvSpPr>
-        <p:spPr>
-          <a:xfrm>
-            <a:off x="4411070" y="2997414"/>
-            <a:ext cx="124452" cy="95249"/>
-          </a:xfrm>
-          <a:prstGeom prst="rect">
-            <a:avLst/>
-          </a:prstGeom>
-          <a:noFill/>
-        </p:spPr>
-        <p:txBody>
-          <a:bodyPr wrap="none" lIns="0" rIns="0" tIns="0" bIns="0" anchor="t">
-            <a:noAutofit/>
-          </a:bodyPr>
-          <a:lstStyle/>
-          <a:p>
-            <a:pPr algn="ctr"/>
-            <a:r>
-              <a:rPr sz="600" b="0" i="0">
-                <a:solidFill>
-                  <a:srgbClr val="1A1A1A"/>
-                </a:solidFill>
-                <a:latin typeface="Arial"/>
-              </a:rPr>
-              <a:t>0.0</a:t>
-            </a:r>
-          </a:p>
-        </p:txBody>
-      </p:sp>
-      <p:sp>
-        <p:nvSpPr>
-          <p:cNvPr id="47" name="TextBox 46"/>
-          <p:cNvSpPr txBox="1"/>
-          <p:nvPr/>
-        </p:nvSpPr>
-        <p:spPr>
-          <a:xfrm>
-            <a:off x="4965198" y="2997414"/>
-            <a:ext cx="124452" cy="95249"/>
-          </a:xfrm>
-          <a:prstGeom prst="rect">
-            <a:avLst/>
-          </a:prstGeom>
-          <a:noFill/>
-        </p:spPr>
-        <p:txBody>
-          <a:bodyPr wrap="none" lIns="0" rIns="0" tIns="0" bIns="0" anchor="t">
-            <a:noAutofit/>
-          </a:bodyPr>
-          <a:lstStyle/>
-          <a:p>
-            <a:pPr algn="ctr"/>
-            <a:r>
-              <a:rPr sz="600" b="0" i="0">
-                <a:solidFill>
-                  <a:srgbClr val="1A1A1A"/>
-                </a:solidFill>
-                <a:latin typeface="Arial"/>
-              </a:rPr>
-              <a:t>0.5</a:t>
-            </a:r>
-          </a:p>
-        </p:txBody>
-      </p:sp>
-      <p:sp>
-        <p:nvSpPr>
-          <p:cNvPr id="48" name="TextBox 47"/>
-          <p:cNvSpPr txBox="1"/>
-          <p:nvPr/>
-        </p:nvSpPr>
-        <p:spPr>
-          <a:xfrm>
-            <a:off x="4467200" y="2831676"/>
-            <a:ext cx="311975" cy="103187"/>
-          </a:xfrm>
-          <a:prstGeom prst="rect">
-            <a:avLst/>
-          </a:prstGeom>
-          <a:noFill/>
-        </p:spPr>
-        <p:txBody>
-          <a:bodyPr wrap="none" lIns="0" rIns="0" tIns="0" bIns="0" anchor="t">
-            <a:noAutofit/>
-          </a:bodyPr>
-          <a:lstStyle/>
-          <a:p>
-            <a:pPr algn="l"/>
-            <a:r>
-              <a:rPr sz="650" b="0" i="0">
-                <a:solidFill>
-                  <a:srgbClr val="000000"/>
-                </a:solidFill>
-                <a:latin typeface="Arial"/>
-              </a:rPr>
-              <a:t>EF 60%</a:t>
-            </a:r>
-          </a:p>
-        </p:txBody>
-      </p:sp>
-      <p:sp>
-        <p:nvSpPr>
-          <p:cNvPr id="49" name="TextBox 48"/>
-          <p:cNvSpPr txBox="1"/>
-          <p:nvPr/>
-        </p:nvSpPr>
-        <p:spPr>
-          <a:xfrm>
-            <a:off x="234950" y="651538"/>
-            <a:ext cx="157988" cy="142875"/>
-          </a:xfrm>
-          <a:prstGeom prst="rect">
-            <a:avLst/>
-          </a:prstGeom>
-          <a:noFill/>
-        </p:spPr>
-        <p:txBody>
-          <a:bodyPr wrap="none" lIns="0" rIns="0" tIns="0" bIns="0" anchor="t">
-            <a:noAutofit/>
-          </a:bodyPr>
-          <a:lstStyle/>
-          <a:p>
-            <a:pPr algn="r"/>
-            <a:r>
-              <a:rPr sz="900" b="1" i="0">
-                <a:solidFill>
-                  <a:srgbClr val="000000"/>
-                </a:solidFill>
-                <a:latin typeface="Arial"/>
-              </a:rPr>
-              <a:t>(a)</a:t>
-            </a:r>
-          </a:p>
-        </p:txBody>
-      </p:sp>
-      <p:sp>
-        <p:nvSpPr>
-          <p:cNvPr id="50" name="TextBox 49"/>
-          <p:cNvSpPr txBox="1"/>
-          <p:nvPr/>
-        </p:nvSpPr>
-        <p:spPr>
-          <a:xfrm>
-            <a:off x="228600" y="1642594"/>
-            <a:ext cx="164337" cy="142875"/>
-          </a:xfrm>
-          <a:prstGeom prst="rect">
-            <a:avLst/>
-          </a:prstGeom>
-          <a:noFill/>
-        </p:spPr>
-        <p:txBody>
-          <a:bodyPr wrap="none" lIns="0" rIns="0" tIns="0" bIns="0" anchor="t">
-            <a:noAutofit/>
-          </a:bodyPr>
-          <a:lstStyle/>
-          <a:p>
-            <a:pPr algn="r"/>
-            <a:r>
-              <a:rPr sz="900" b="1" i="0">
-                <a:solidFill>
-                  <a:srgbClr val="000000"/>
-                </a:solidFill>
-                <a:latin typeface="Arial"/>
-              </a:rPr>
-              <a:t>(b)</a:t>
-            </a:r>
-          </a:p>
-        </p:txBody>
-      </p:sp>
-      <p:sp>
-        <p:nvSpPr>
-          <p:cNvPr id="51" name="TextBox 50"/>
-          <p:cNvSpPr txBox="1"/>
-          <p:nvPr/>
-        </p:nvSpPr>
-        <p:spPr>
-          <a:xfrm>
-            <a:off x="234950" y="2502077"/>
-            <a:ext cx="157988" cy="142875"/>
-          </a:xfrm>
-          <a:prstGeom prst="rect">
-            <a:avLst/>
-          </a:prstGeom>
-          <a:noFill/>
-        </p:spPr>
-        <p:txBody>
-          <a:bodyPr wrap="none" lIns="0" rIns="0" tIns="0" bIns="0" anchor="t">
-            <a:noAutofit/>
-          </a:bodyPr>
-          <a:lstStyle/>
-          <a:p>
-            <a:pPr algn="r"/>
-            <a:r>
-              <a:rPr sz="900" b="1" i="0">
-                <a:solidFill>
-                  <a:srgbClr val="000000"/>
-                </a:solidFill>
-                <a:latin typeface="Arial"/>
-              </a:rPr>
-              <a:t>(c)</a:t>
+              <a:t>Ground truth</a:t>
             </a:r>
           </a:p>
         </p:txBody>
@@ -8226,42 +7993,7 @@
         </p:nvSpPr>
         <p:spPr>
           <a:xfrm>
-            <a:off x="2389310" y="3123303"/>
-            <a:ext cx="517556" cy="111125"/>
-          </a:xfrm>
-          <a:prstGeom prst="rect">
-            <a:avLst/>
-          </a:prstGeom>
-          <a:noFill/>
-        </p:spPr>
-        <p:txBody>
-          <a:bodyPr wrap="none" lIns="0" rIns="0" tIns="0" bIns="0" anchor="t">
-            <a:noAutofit/>
-          </a:bodyPr>
-          <a:lstStyle/>
-          <a:p>
-            <a:pPr algn="l"/>
-            <a:r>
-              <a:rPr sz="700" b="0" i="0">
-                <a:solidFill>
-                  <a:srgbClr val="000000"/>
-                </a:solidFill>
-                <a:latin typeface="Arial"/>
-              </a:rPr>
-              <a:t>Ground truth</a:t>
-            </a:r>
-          </a:p>
-        </p:txBody>
-      </p:sp>
-      <p:sp>
-        <p:nvSpPr>
-          <p:cNvPr id="53" name="TextBox 52"/>
-          <p:cNvSpPr txBox="1"/>
-          <p:nvPr/>
-        </p:nvSpPr>
-        <p:spPr>
-          <a:xfrm>
-            <a:off x="3288629" y="3123303"/>
+            <a:off x="3288629" y="2574663"/>
             <a:ext cx="393930" cy="111125"/>
           </a:xfrm>
           <a:prstGeom prst="rect">
@@ -8322,8 +8054,8 @@
         </p:blipFill>
         <p:spPr>
           <a:xfrm>
-            <a:off x="766572" y="684276"/>
-            <a:ext cx="928115" cy="955547"/>
+            <a:off x="507491" y="246888"/>
+            <a:ext cx="339852" cy="350520"/>
           </a:xfrm>
           <a:prstGeom prst="rect">
             <a:avLst/>
@@ -8346,8 +8078,8 @@
         </p:blipFill>
         <p:spPr>
           <a:xfrm>
-            <a:off x="1932432" y="684276"/>
-            <a:ext cx="926592" cy="955547"/>
+            <a:off x="507491" y="614172"/>
+            <a:ext cx="339852" cy="350520"/>
           </a:xfrm>
           <a:prstGeom prst="rect">
             <a:avLst/>
@@ -8370,8 +8102,8 @@
         </p:blipFill>
         <p:spPr>
           <a:xfrm>
-            <a:off x="766572" y="1667256"/>
-            <a:ext cx="928115" cy="955547"/>
+            <a:off x="1158240" y="242316"/>
+            <a:ext cx="1557528" cy="768096"/>
           </a:xfrm>
           <a:prstGeom prst="rect">
             <a:avLst/>
@@ -8394,8 +8126,8 @@
         </p:blipFill>
         <p:spPr>
           <a:xfrm>
-            <a:off x="1932432" y="1667256"/>
-            <a:ext cx="926592" cy="955547"/>
+            <a:off x="507491" y="1019556"/>
+            <a:ext cx="367284" cy="350520"/>
           </a:xfrm>
           <a:prstGeom prst="rect">
             <a:avLst/>
@@ -8418,8 +8150,8 @@
         </p:blipFill>
         <p:spPr>
           <a:xfrm>
-            <a:off x="3511296" y="530352"/>
-            <a:ext cx="6044184" cy="2132076"/>
+            <a:off x="507491" y="1386840"/>
+            <a:ext cx="367284" cy="350520"/>
           </a:xfrm>
           <a:prstGeom prst="rect">
             <a:avLst/>
@@ -8442,110 +8174,154 @@
         </p:blipFill>
         <p:spPr>
           <a:xfrm>
-            <a:off x="728472" y="2842260"/>
-            <a:ext cx="1004316" cy="955547"/>
+            <a:off x="1158240" y="1014983"/>
+            <a:ext cx="1557528" cy="768096"/>
           </a:xfrm>
           <a:prstGeom prst="rect">
             <a:avLst/>
           </a:prstGeom>
         </p:spPr>
       </p:pic>
-      <p:pic>
-        <p:nvPicPr>
-          <p:cNvPr id="8" name="Picture 7" descr="real_rt_ax6.png"/>
-          <p:cNvPicPr>
-            <a:picLocks noChangeAspect="1"/>
-          </p:cNvPicPr>
-          <p:nvPr/>
-        </p:nvPicPr>
-        <p:blipFill>
-          <a:blip r:embed="rId8"/>
-          <a:stretch>
-            <a:fillRect/>
-          </a:stretch>
-        </p:blipFill>
-        <p:spPr>
-          <a:xfrm>
-            <a:off x="1894332" y="2842260"/>
-            <a:ext cx="1002792" cy="955547"/>
-          </a:xfrm>
-          <a:prstGeom prst="rect">
-            <a:avLst/>
-          </a:prstGeom>
-        </p:spPr>
-      </p:pic>
-      <p:pic>
-        <p:nvPicPr>
-          <p:cNvPr id="9" name="Picture 8" descr="real_rt_ax7.png"/>
-          <p:cNvPicPr>
-            <a:picLocks noChangeAspect="1"/>
-          </p:cNvPicPr>
-          <p:nvPr/>
-        </p:nvPicPr>
-        <p:blipFill>
-          <a:blip r:embed="rId9"/>
-          <a:stretch>
-            <a:fillRect/>
-          </a:stretch>
-        </p:blipFill>
-        <p:spPr>
-          <a:xfrm>
-            <a:off x="728472" y="3823716"/>
-            <a:ext cx="1004316" cy="955547"/>
-          </a:xfrm>
-          <a:prstGeom prst="rect">
-            <a:avLst/>
-          </a:prstGeom>
-        </p:spPr>
-      </p:pic>
-      <p:pic>
-        <p:nvPicPr>
-          <p:cNvPr id="10" name="Picture 9" descr="real_rt_ax8.png"/>
-          <p:cNvPicPr>
-            <a:picLocks noChangeAspect="1"/>
-          </p:cNvPicPr>
-          <p:nvPr/>
-        </p:nvPicPr>
-        <p:blipFill>
-          <a:blip r:embed="rId10"/>
-          <a:stretch>
-            <a:fillRect/>
-          </a:stretch>
-        </p:blipFill>
-        <p:spPr>
-          <a:xfrm>
-            <a:off x="1894332" y="3823716"/>
-            <a:ext cx="1002792" cy="955547"/>
-          </a:xfrm>
-          <a:prstGeom prst="rect">
-            <a:avLst/>
-          </a:prstGeom>
-        </p:spPr>
-      </p:pic>
-      <p:pic>
-        <p:nvPicPr>
-          <p:cNvPr id="11" name="Picture 10" descr="real_rt_ax9.png"/>
-          <p:cNvPicPr>
-            <a:picLocks noChangeAspect="1"/>
-          </p:cNvPicPr>
-          <p:nvPr/>
-        </p:nvPicPr>
-        <p:blipFill>
-          <a:blip r:embed="rId11"/>
-          <a:stretch>
-            <a:fillRect/>
-          </a:stretch>
-        </p:blipFill>
-        <p:spPr>
-          <a:xfrm>
-            <a:off x="3511296" y="2842260"/>
-            <a:ext cx="6044184" cy="1976628"/>
-          </a:xfrm>
-          <a:prstGeom prst="rect">
-            <a:avLst/>
-          </a:prstGeom>
-        </p:spPr>
-      </p:pic>
+      <p:sp>
+        <p:nvSpPr>
+          <p:cNvPr id="8" name="TextBox 7"/>
+          <p:cNvSpPr txBox="1"/>
+          <p:nvPr/>
+        </p:nvSpPr>
+        <p:spPr>
+          <a:xfrm rot="16200000">
+            <a:off x="331688" y="370173"/>
+            <a:ext cx="229028" cy="103187"/>
+          </a:xfrm>
+          <a:prstGeom prst="rect">
+            <a:avLst/>
+          </a:prstGeom>
+          <a:noFill/>
+        </p:spPr>
+        <p:txBody>
+          <a:bodyPr wrap="none" lIns="0" rIns="0" tIns="0" bIns="0" anchor="t">
+            <a:noAutofit/>
+          </a:bodyPr>
+          <a:lstStyle/>
+          <a:p>
+            <a:pPr algn="ctr"/>
+            <a:r>
+              <a:rPr sz="650" b="0" i="0">
+                <a:solidFill>
+                  <a:srgbClr val="000000"/>
+                </a:solidFill>
+                <a:latin typeface="Arial"/>
+              </a:rPr>
+              <a:t>Naive</a:t>
+            </a:r>
+          </a:p>
+        </p:txBody>
+      </p:sp>
+      <p:sp>
+        <p:nvSpPr>
+          <p:cNvPr id="9" name="TextBox 8"/>
+          <p:cNvSpPr txBox="1"/>
+          <p:nvPr/>
+        </p:nvSpPr>
+        <p:spPr>
+          <a:xfrm rot="16200000">
+            <a:off x="347563" y="738219"/>
+            <a:ext cx="197278" cy="103187"/>
+          </a:xfrm>
+          <a:prstGeom prst="rect">
+            <a:avLst/>
+          </a:prstGeom>
+          <a:noFill/>
+        </p:spPr>
+        <p:txBody>
+          <a:bodyPr wrap="none" lIns="0" rIns="0" tIns="0" bIns="0" anchor="t">
+            <a:noAutofit/>
+          </a:bodyPr>
+          <a:lstStyle/>
+          <a:p>
+            <a:pPr algn="ctr"/>
+            <a:r>
+              <a:rPr sz="650" b="0" i="0">
+                <a:solidFill>
+                  <a:srgbClr val="000000"/>
+                </a:solidFill>
+                <a:latin typeface="Arial"/>
+              </a:rPr>
+              <a:t>Ours</a:t>
+            </a:r>
+          </a:p>
+        </p:txBody>
+      </p:sp>
+      <p:sp>
+        <p:nvSpPr>
+          <p:cNvPr id="10" name="TextBox 9"/>
+          <p:cNvSpPr txBox="1"/>
+          <p:nvPr/>
+        </p:nvSpPr>
+        <p:spPr>
+          <a:xfrm>
+            <a:off x="1043580" y="912091"/>
+            <a:ext cx="103219" cy="95249"/>
+          </a:xfrm>
+          <a:prstGeom prst="rect">
+            <a:avLst/>
+          </a:prstGeom>
+          <a:noFill/>
+        </p:spPr>
+        <p:txBody>
+          <a:bodyPr wrap="none" lIns="0" rIns="0" tIns="0" bIns="0" anchor="t">
+            <a:noAutofit/>
+          </a:bodyPr>
+          <a:lstStyle/>
+          <a:p>
+            <a:pPr algn="r"/>
+            <a:r>
+              <a:rPr sz="600" b="0" i="0">
+                <a:solidFill>
+                  <a:srgbClr val="1A1A1A"/>
+                </a:solidFill>
+                <a:latin typeface="Arial"/>
+              </a:rPr>
+              <a:t>75</a:t>
+            </a:r>
+          </a:p>
+        </p:txBody>
+      </p:sp>
+      <p:sp>
+        <p:nvSpPr>
+          <p:cNvPr id="11" name="TextBox 10"/>
+          <p:cNvSpPr txBox="1"/>
+          <p:nvPr/>
+        </p:nvSpPr>
+        <p:spPr>
+          <a:xfrm>
+            <a:off x="1001114" y="694260"/>
+            <a:ext cx="145684" cy="95249"/>
+          </a:xfrm>
+          <a:prstGeom prst="rect">
+            <a:avLst/>
+          </a:prstGeom>
+          <a:noFill/>
+        </p:spPr>
+        <p:txBody>
+          <a:bodyPr wrap="none" lIns="0" rIns="0" tIns="0" bIns="0" anchor="t">
+            <a:noAutofit/>
+          </a:bodyPr>
+          <a:lstStyle/>
+          <a:p>
+            <a:pPr algn="r"/>
+            <a:r>
+              <a:rPr sz="600" b="0" i="0">
+                <a:solidFill>
+                  <a:srgbClr val="1A1A1A"/>
+                </a:solidFill>
+                <a:latin typeface="Arial"/>
+              </a:rPr>
+              <a:t>100</a:t>
+            </a:r>
+          </a:p>
+        </p:txBody>
+      </p:sp>
       <p:sp>
         <p:nvSpPr>
           <p:cNvPr id="12" name="TextBox 11"/>
@@ -8553,9 +8329,79 @@
           <p:nvPr/>
         </p:nvSpPr>
         <p:spPr>
+          <a:xfrm>
+            <a:off x="1001114" y="476429"/>
+            <a:ext cx="145684" cy="95249"/>
+          </a:xfrm>
+          <a:prstGeom prst="rect">
+            <a:avLst/>
+          </a:prstGeom>
+          <a:noFill/>
+        </p:spPr>
+        <p:txBody>
+          <a:bodyPr wrap="none" lIns="0" rIns="0" tIns="0" bIns="0" anchor="t">
+            <a:noAutofit/>
+          </a:bodyPr>
+          <a:lstStyle/>
+          <a:p>
+            <a:pPr algn="r"/>
+            <a:r>
+              <a:rPr sz="600" b="0" i="0">
+                <a:solidFill>
+                  <a:srgbClr val="1A1A1A"/>
+                </a:solidFill>
+                <a:latin typeface="Arial"/>
+              </a:rPr>
+              <a:t>125</a:t>
+            </a:r>
+          </a:p>
+        </p:txBody>
+      </p:sp>
+      <p:sp>
+        <p:nvSpPr>
+          <p:cNvPr id="13" name="TextBox 12"/>
+          <p:cNvSpPr txBox="1"/>
+          <p:nvPr/>
+        </p:nvSpPr>
+        <p:spPr>
+          <a:xfrm>
+            <a:off x="1001114" y="258597"/>
+            <a:ext cx="145684" cy="95249"/>
+          </a:xfrm>
+          <a:prstGeom prst="rect">
+            <a:avLst/>
+          </a:prstGeom>
+          <a:noFill/>
+        </p:spPr>
+        <p:txBody>
+          <a:bodyPr wrap="none" lIns="0" rIns="0" tIns="0" bIns="0" anchor="t">
+            <a:noAutofit/>
+          </a:bodyPr>
+          <a:lstStyle/>
+          <a:p>
+            <a:pPr algn="r"/>
+            <a:r>
+              <a:rPr sz="600" b="0" i="0">
+                <a:solidFill>
+                  <a:srgbClr val="1A1A1A"/>
+                </a:solidFill>
+                <a:latin typeface="Arial"/>
+              </a:rPr>
+              <a:t>150</a:t>
+            </a:r>
+          </a:p>
+        </p:txBody>
+      </p:sp>
+      <p:sp>
+        <p:nvSpPr>
+          <p:cNvPr id="14" name="TextBox 13"/>
+          <p:cNvSpPr txBox="1"/>
+          <p:nvPr/>
+        </p:nvSpPr>
+        <p:spPr>
           <a:xfrm rot="16200000">
-            <a:off x="361966" y="1091013"/>
-            <a:ext cx="589788" cy="142875"/>
+            <a:off x="728477" y="554196"/>
+            <a:ext cx="457231" cy="103187"/>
           </a:xfrm>
           <a:prstGeom prst="rect">
             <a:avLst/>
@@ -8570,27 +8416,27 @@
           <a:p>
             <a:pPr algn="ctr"/>
             <a:r>
-              <a:rPr sz="900" b="0" i="0">
+              <a:rPr sz="650" b="0" i="0">
                 <a:solidFill>
                   <a:srgbClr val="000000"/>
                 </a:solidFill>
                 <a:latin typeface="Arial"/>
               </a:rPr>
-              <a:t>LAX view 1</a:t>
-            </a:r>
-          </a:p>
-        </p:txBody>
-      </p:sp>
-      <p:sp>
-        <p:nvSpPr>
-          <p:cNvPr id="13" name="TextBox 12"/>
+              <a:t>LV vol. (mL)</a:t>
+            </a:r>
+          </a:p>
+        </p:txBody>
+      </p:sp>
+      <p:sp>
+        <p:nvSpPr>
+          <p:cNvPr id="15" name="TextBox 14"/>
           <p:cNvSpPr txBox="1"/>
           <p:nvPr/>
         </p:nvSpPr>
         <p:spPr>
           <a:xfrm rot="16200000">
-            <a:off x="-75257" y="1555203"/>
-            <a:ext cx="1006705" cy="158750"/>
+            <a:off x="331688" y="1142841"/>
+            <a:ext cx="229028" cy="103187"/>
           </a:xfrm>
           <a:prstGeom prst="rect">
             <a:avLst/>
@@ -8605,12 +8451,537 @@
           <a:p>
             <a:pPr algn="ctr"/>
             <a:r>
-              <a:rPr sz="1000" b="0" i="0">
+              <a:rPr sz="650" b="0" i="0">
                 <a:solidFill>
                   <a:srgbClr val="000000"/>
                 </a:solidFill>
                 <a:latin typeface="Arial"/>
               </a:rPr>
+              <a:t>Naive</a:t>
+            </a:r>
+          </a:p>
+        </p:txBody>
+      </p:sp>
+      <p:sp>
+        <p:nvSpPr>
+          <p:cNvPr id="16" name="TextBox 15"/>
+          <p:cNvSpPr txBox="1"/>
+          <p:nvPr/>
+        </p:nvSpPr>
+        <p:spPr>
+          <a:xfrm rot="16200000">
+            <a:off x="347563" y="1510887"/>
+            <a:ext cx="197278" cy="103187"/>
+          </a:xfrm>
+          <a:prstGeom prst="rect">
+            <a:avLst/>
+          </a:prstGeom>
+          <a:noFill/>
+        </p:spPr>
+        <p:txBody>
+          <a:bodyPr wrap="none" lIns="0" rIns="0" tIns="0" bIns="0" anchor="t">
+            <a:noAutofit/>
+          </a:bodyPr>
+          <a:lstStyle/>
+          <a:p>
+            <a:pPr algn="ctr"/>
+            <a:r>
+              <a:rPr sz="650" b="0" i="0">
+                <a:solidFill>
+                  <a:srgbClr val="000000"/>
+                </a:solidFill>
+                <a:latin typeface="Arial"/>
+              </a:rPr>
+              <a:t>Ours</a:t>
+            </a:r>
+          </a:p>
+        </p:txBody>
+      </p:sp>
+      <p:sp>
+        <p:nvSpPr>
+          <p:cNvPr id="17" name="TextBox 16"/>
+          <p:cNvSpPr txBox="1"/>
+          <p:nvPr/>
+        </p:nvSpPr>
+        <p:spPr>
+          <a:xfrm>
+            <a:off x="1173572" y="1772880"/>
+            <a:ext cx="60753" cy="95249"/>
+          </a:xfrm>
+          <a:prstGeom prst="rect">
+            <a:avLst/>
+          </a:prstGeom>
+          <a:noFill/>
+        </p:spPr>
+        <p:txBody>
+          <a:bodyPr wrap="none" lIns="0" rIns="0" tIns="0" bIns="0" anchor="t">
+            <a:noAutofit/>
+          </a:bodyPr>
+          <a:lstStyle/>
+          <a:p>
+            <a:pPr algn="ctr"/>
+            <a:r>
+              <a:rPr sz="600" b="0" i="0">
+                <a:solidFill>
+                  <a:srgbClr val="1A1A1A"/>
+                </a:solidFill>
+                <a:latin typeface="Arial"/>
+              </a:rPr>
+              <a:t>0</a:t>
+            </a:r>
+          </a:p>
+        </p:txBody>
+      </p:sp>
+      <p:sp>
+        <p:nvSpPr>
+          <p:cNvPr id="18" name="TextBox 17"/>
+          <p:cNvSpPr txBox="1"/>
+          <p:nvPr/>
+        </p:nvSpPr>
+        <p:spPr>
+          <a:xfrm>
+            <a:off x="1508522" y="1772880"/>
+            <a:ext cx="60753" cy="95249"/>
+          </a:xfrm>
+          <a:prstGeom prst="rect">
+            <a:avLst/>
+          </a:prstGeom>
+          <a:noFill/>
+        </p:spPr>
+        <p:txBody>
+          <a:bodyPr wrap="none" lIns="0" rIns="0" tIns="0" bIns="0" anchor="t">
+            <a:noAutofit/>
+          </a:bodyPr>
+          <a:lstStyle/>
+          <a:p>
+            <a:pPr algn="ctr"/>
+            <a:r>
+              <a:rPr sz="600" b="0" i="0">
+                <a:solidFill>
+                  <a:srgbClr val="1A1A1A"/>
+                </a:solidFill>
+                <a:latin typeface="Arial"/>
+              </a:rPr>
+              <a:t>1</a:t>
+            </a:r>
+          </a:p>
+        </p:txBody>
+      </p:sp>
+      <p:sp>
+        <p:nvSpPr>
+          <p:cNvPr id="19" name="TextBox 18"/>
+          <p:cNvSpPr txBox="1"/>
+          <p:nvPr/>
+        </p:nvSpPr>
+        <p:spPr>
+          <a:xfrm>
+            <a:off x="1843472" y="1772880"/>
+            <a:ext cx="60753" cy="95249"/>
+          </a:xfrm>
+          <a:prstGeom prst="rect">
+            <a:avLst/>
+          </a:prstGeom>
+          <a:noFill/>
+        </p:spPr>
+        <p:txBody>
+          <a:bodyPr wrap="none" lIns="0" rIns="0" tIns="0" bIns="0" anchor="t">
+            <a:noAutofit/>
+          </a:bodyPr>
+          <a:lstStyle/>
+          <a:p>
+            <a:pPr algn="ctr"/>
+            <a:r>
+              <a:rPr sz="600" b="0" i="0">
+                <a:solidFill>
+                  <a:srgbClr val="1A1A1A"/>
+                </a:solidFill>
+                <a:latin typeface="Arial"/>
+              </a:rPr>
+              <a:t>2</a:t>
+            </a:r>
+          </a:p>
+        </p:txBody>
+      </p:sp>
+      <p:sp>
+        <p:nvSpPr>
+          <p:cNvPr id="20" name="TextBox 19"/>
+          <p:cNvSpPr txBox="1"/>
+          <p:nvPr/>
+        </p:nvSpPr>
+        <p:spPr>
+          <a:xfrm>
+            <a:off x="2178422" y="1772880"/>
+            <a:ext cx="60753" cy="95249"/>
+          </a:xfrm>
+          <a:prstGeom prst="rect">
+            <a:avLst/>
+          </a:prstGeom>
+          <a:noFill/>
+        </p:spPr>
+        <p:txBody>
+          <a:bodyPr wrap="none" lIns="0" rIns="0" tIns="0" bIns="0" anchor="t">
+            <a:noAutofit/>
+          </a:bodyPr>
+          <a:lstStyle/>
+          <a:p>
+            <a:pPr algn="ctr"/>
+            <a:r>
+              <a:rPr sz="600" b="0" i="0">
+                <a:solidFill>
+                  <a:srgbClr val="1A1A1A"/>
+                </a:solidFill>
+                <a:latin typeface="Arial"/>
+              </a:rPr>
+              <a:t>3</a:t>
+            </a:r>
+          </a:p>
+        </p:txBody>
+      </p:sp>
+      <p:sp>
+        <p:nvSpPr>
+          <p:cNvPr id="21" name="TextBox 20"/>
+          <p:cNvSpPr txBox="1"/>
+          <p:nvPr/>
+        </p:nvSpPr>
+        <p:spPr>
+          <a:xfrm>
+            <a:off x="2513372" y="1772880"/>
+            <a:ext cx="60753" cy="95249"/>
+          </a:xfrm>
+          <a:prstGeom prst="rect">
+            <a:avLst/>
+          </a:prstGeom>
+          <a:noFill/>
+        </p:spPr>
+        <p:txBody>
+          <a:bodyPr wrap="none" lIns="0" rIns="0" tIns="0" bIns="0" anchor="t">
+            <a:noAutofit/>
+          </a:bodyPr>
+          <a:lstStyle/>
+          <a:p>
+            <a:pPr algn="ctr"/>
+            <a:r>
+              <a:rPr sz="600" b="0" i="0">
+                <a:solidFill>
+                  <a:srgbClr val="1A1A1A"/>
+                </a:solidFill>
+                <a:latin typeface="Arial"/>
+              </a:rPr>
+              <a:t>4</a:t>
+            </a:r>
+          </a:p>
+        </p:txBody>
+      </p:sp>
+      <p:sp>
+        <p:nvSpPr>
+          <p:cNvPr id="22" name="TextBox 21"/>
+          <p:cNvSpPr txBox="1"/>
+          <p:nvPr/>
+        </p:nvSpPr>
+        <p:spPr>
+          <a:xfrm>
+            <a:off x="1798622" y="1859002"/>
+            <a:ext cx="317928" cy="103187"/>
+          </a:xfrm>
+          <a:prstGeom prst="rect">
+            <a:avLst/>
+          </a:prstGeom>
+          <a:noFill/>
+        </p:spPr>
+        <p:txBody>
+          <a:bodyPr wrap="none" lIns="0" rIns="0" tIns="0" bIns="0" anchor="t">
+            <a:noAutofit/>
+          </a:bodyPr>
+          <a:lstStyle/>
+          <a:p>
+            <a:pPr algn="ctr"/>
+            <a:r>
+              <a:rPr sz="650" b="0" i="0">
+                <a:solidFill>
+                  <a:srgbClr val="000000"/>
+                </a:solidFill>
+                <a:latin typeface="Arial"/>
+              </a:rPr>
+              <a:t>Time (s)</a:t>
+            </a:r>
+          </a:p>
+        </p:txBody>
+      </p:sp>
+      <p:sp>
+        <p:nvSpPr>
+          <p:cNvPr id="23" name="TextBox 22"/>
+          <p:cNvSpPr txBox="1"/>
+          <p:nvPr/>
+        </p:nvSpPr>
+        <p:spPr>
+          <a:xfrm>
+            <a:off x="1043580" y="1664832"/>
+            <a:ext cx="103219" cy="95249"/>
+          </a:xfrm>
+          <a:prstGeom prst="rect">
+            <a:avLst/>
+          </a:prstGeom>
+          <a:noFill/>
+        </p:spPr>
+        <p:txBody>
+          <a:bodyPr wrap="none" lIns="0" rIns="0" tIns="0" bIns="0" anchor="t">
+            <a:noAutofit/>
+          </a:bodyPr>
+          <a:lstStyle/>
+          <a:p>
+            <a:pPr algn="r"/>
+            <a:r>
+              <a:rPr sz="600" b="0" i="0">
+                <a:solidFill>
+                  <a:srgbClr val="1A1A1A"/>
+                </a:solidFill>
+                <a:latin typeface="Arial"/>
+              </a:rPr>
+              <a:t>50</a:t>
+            </a:r>
+          </a:p>
+        </p:txBody>
+      </p:sp>
+      <p:sp>
+        <p:nvSpPr>
+          <p:cNvPr id="24" name="TextBox 23"/>
+          <p:cNvSpPr txBox="1"/>
+          <p:nvPr/>
+        </p:nvSpPr>
+        <p:spPr>
+          <a:xfrm>
+            <a:off x="1001114" y="1441987"/>
+            <a:ext cx="145684" cy="95249"/>
+          </a:xfrm>
+          <a:prstGeom prst="rect">
+            <a:avLst/>
+          </a:prstGeom>
+          <a:noFill/>
+        </p:spPr>
+        <p:txBody>
+          <a:bodyPr wrap="none" lIns="0" rIns="0" tIns="0" bIns="0" anchor="t">
+            <a:noAutofit/>
+          </a:bodyPr>
+          <a:lstStyle/>
+          <a:p>
+            <a:pPr algn="r"/>
+            <a:r>
+              <a:rPr sz="600" b="0" i="0">
+                <a:solidFill>
+                  <a:srgbClr val="1A1A1A"/>
+                </a:solidFill>
+                <a:latin typeface="Arial"/>
+              </a:rPr>
+              <a:t>100</a:t>
+            </a:r>
+          </a:p>
+        </p:txBody>
+      </p:sp>
+      <p:sp>
+        <p:nvSpPr>
+          <p:cNvPr id="25" name="TextBox 24"/>
+          <p:cNvSpPr txBox="1"/>
+          <p:nvPr/>
+        </p:nvSpPr>
+        <p:spPr>
+          <a:xfrm>
+            <a:off x="1001114" y="1219143"/>
+            <a:ext cx="145684" cy="95249"/>
+          </a:xfrm>
+          <a:prstGeom prst="rect">
+            <a:avLst/>
+          </a:prstGeom>
+          <a:noFill/>
+        </p:spPr>
+        <p:txBody>
+          <a:bodyPr wrap="none" lIns="0" rIns="0" tIns="0" bIns="0" anchor="t">
+            <a:noAutofit/>
+          </a:bodyPr>
+          <a:lstStyle/>
+          <a:p>
+            <a:pPr algn="r"/>
+            <a:r>
+              <a:rPr sz="600" b="0" i="0">
+                <a:solidFill>
+                  <a:srgbClr val="1A1A1A"/>
+                </a:solidFill>
+                <a:latin typeface="Arial"/>
+              </a:rPr>
+              <a:t>150</a:t>
+            </a:r>
+          </a:p>
+        </p:txBody>
+      </p:sp>
+      <p:sp>
+        <p:nvSpPr>
+          <p:cNvPr id="26" name="TextBox 25"/>
+          <p:cNvSpPr txBox="1"/>
+          <p:nvPr/>
+        </p:nvSpPr>
+        <p:spPr>
+          <a:xfrm>
+            <a:off x="1001114" y="996298"/>
+            <a:ext cx="145684" cy="95249"/>
+          </a:xfrm>
+          <a:prstGeom prst="rect">
+            <a:avLst/>
+          </a:prstGeom>
+          <a:noFill/>
+        </p:spPr>
+        <p:txBody>
+          <a:bodyPr wrap="none" lIns="0" rIns="0" tIns="0" bIns="0" anchor="t">
+            <a:noAutofit/>
+          </a:bodyPr>
+          <a:lstStyle/>
+          <a:p>
+            <a:pPr algn="r"/>
+            <a:r>
+              <a:rPr sz="600" b="0" i="0">
+                <a:solidFill>
+                  <a:srgbClr val="1A1A1A"/>
+                </a:solidFill>
+                <a:latin typeface="Arial"/>
+              </a:rPr>
+              <a:t>200</a:t>
+            </a:r>
+          </a:p>
+        </p:txBody>
+      </p:sp>
+      <p:sp>
+        <p:nvSpPr>
+          <p:cNvPr id="27" name="TextBox 26"/>
+          <p:cNvSpPr txBox="1"/>
+          <p:nvPr/>
+        </p:nvSpPr>
+        <p:spPr>
+          <a:xfrm rot="16200000">
+            <a:off x="728477" y="1326864"/>
+            <a:ext cx="457231" cy="103187"/>
+          </a:xfrm>
+          <a:prstGeom prst="rect">
+            <a:avLst/>
+          </a:prstGeom>
+          <a:noFill/>
+        </p:spPr>
+        <p:txBody>
+          <a:bodyPr wrap="none" lIns="0" rIns="0" tIns="0" bIns="0" anchor="t">
+            <a:noAutofit/>
+          </a:bodyPr>
+          <a:lstStyle/>
+          <a:p>
+            <a:pPr algn="ctr"/>
+            <a:r>
+              <a:rPr sz="650" b="0" i="0">
+                <a:solidFill>
+                  <a:srgbClr val="000000"/>
+                </a:solidFill>
+                <a:latin typeface="Arial"/>
+              </a:rPr>
+              <a:t>LV vol. (mL)</a:t>
+            </a:r>
+          </a:p>
+        </p:txBody>
+      </p:sp>
+      <p:sp>
+        <p:nvSpPr>
+          <p:cNvPr id="28" name="TextBox 27"/>
+          <p:cNvSpPr txBox="1"/>
+          <p:nvPr/>
+        </p:nvSpPr>
+        <p:spPr>
+          <a:xfrm>
+            <a:off x="1915608" y="1607978"/>
+            <a:ext cx="412384" cy="95249"/>
+          </a:xfrm>
+          <a:prstGeom prst="rect">
+            <a:avLst/>
+          </a:prstGeom>
+          <a:noFill/>
+        </p:spPr>
+        <p:txBody>
+          <a:bodyPr wrap="none" lIns="0" rIns="0" tIns="0" bIns="0" anchor="t">
+            <a:noAutofit/>
+          </a:bodyPr>
+          <a:lstStyle/>
+          <a:p>
+            <a:pPr algn="l"/>
+            <a:r>
+              <a:rPr sz="600" b="0" i="0">
+                <a:solidFill>
+                  <a:srgbClr val="000000"/>
+                </a:solidFill>
+                <a:latin typeface="Arial"/>
+              </a:rPr>
+              <a:t>Naive stack</a:t>
+            </a:r>
+          </a:p>
+        </p:txBody>
+      </p:sp>
+      <p:sp>
+        <p:nvSpPr>
+          <p:cNvPr id="29" name="TextBox 28"/>
+          <p:cNvSpPr txBox="1"/>
+          <p:nvPr/>
+        </p:nvSpPr>
+        <p:spPr>
+          <a:xfrm>
+            <a:off x="2507825" y="1607978"/>
+            <a:ext cx="183586" cy="95249"/>
+          </a:xfrm>
+          <a:prstGeom prst="rect">
+            <a:avLst/>
+          </a:prstGeom>
+          <a:noFill/>
+        </p:spPr>
+        <p:txBody>
+          <a:bodyPr wrap="none" lIns="0" rIns="0" tIns="0" bIns="0" anchor="t">
+            <a:noAutofit/>
+          </a:bodyPr>
+          <a:lstStyle/>
+          <a:p>
+            <a:pPr algn="l"/>
+            <a:r>
+              <a:rPr sz="600" b="0" i="0">
+                <a:solidFill>
+                  <a:srgbClr val="000000"/>
+                </a:solidFill>
+                <a:latin typeface="Arial"/>
+              </a:rPr>
+              <a:t>Ours</a:t>
+            </a:r>
+          </a:p>
+        </p:txBody>
+      </p:sp>
+      <p:sp>
+        <p:nvSpPr>
+          <p:cNvPr id="30" name="TextBox 29"/>
+          <p:cNvSpPr txBox="1"/>
+          <p:nvPr/>
+        </p:nvSpPr>
+        <p:spPr>
+          <a:xfrm rot="16200000">
+            <a:off x="-75787" y="554196"/>
+            <a:ext cx="710834" cy="103187"/>
+          </a:xfrm>
+          <a:prstGeom prst="rect">
+            <a:avLst/>
+          </a:prstGeom>
+          <a:noFill/>
+        </p:spPr>
+        <p:txBody>
+          <a:bodyPr wrap="none" lIns="0" rIns="0" tIns="0" bIns="0" anchor="t">
+            <a:noAutofit/>
+          </a:bodyPr>
+          <a:lstStyle/>
+          <a:p>
+            <a:pPr algn="ctr"/>
+            <a:r>
+              <a:rPr sz="650" b="1" i="0">
+                <a:solidFill>
+                  <a:srgbClr val="000000"/>
+                </a:solidFill>
+                <a:latin typeface="Arial"/>
+              </a:rPr>
               <a:t>Healthy volunteer</a:t>
             </a:r>
           </a:p>
@@ -8618,14 +8989,14 @@
       </p:sp>
       <p:sp>
         <p:nvSpPr>
-          <p:cNvPr id="14" name="TextBox 13"/>
-          <p:cNvSpPr txBox="1"/>
-          <p:nvPr/>
-        </p:nvSpPr>
-        <p:spPr>
-          <a:xfrm>
-            <a:off x="860444" y="474424"/>
-            <a:ext cx="740600" cy="174625"/>
+          <p:cNvPr id="31" name="TextBox 30"/>
+          <p:cNvSpPr txBox="1"/>
+          <p:nvPr/>
+        </p:nvSpPr>
+        <p:spPr>
+          <a:xfrm rot="16200000">
+            <a:off x="69270" y="1326864"/>
+            <a:ext cx="421909" cy="103187"/>
           </a:xfrm>
           <a:prstGeom prst="rect">
             <a:avLst/>
@@ -8640,1168 +9011,13 @@
           <a:p>
             <a:pPr algn="ctr"/>
             <a:r>
-              <a:rPr sz="1100" b="0" i="0">
+              <a:rPr sz="650" b="1" i="0">
                 <a:solidFill>
                   <a:srgbClr val="000000"/>
                 </a:solidFill>
                 <a:latin typeface="Arial"/>
               </a:rPr>
-              <a:t>Naive stack</a:t>
-            </a:r>
-          </a:p>
-        </p:txBody>
-      </p:sp>
-      <p:sp>
-        <p:nvSpPr>
-          <p:cNvPr id="15" name="TextBox 14"/>
-          <p:cNvSpPr txBox="1"/>
-          <p:nvPr/>
-        </p:nvSpPr>
-        <p:spPr>
-          <a:xfrm>
-            <a:off x="2234871" y="474424"/>
-            <a:ext cx="321302" cy="174625"/>
-          </a:xfrm>
-          <a:prstGeom prst="rect">
-            <a:avLst/>
-          </a:prstGeom>
-          <a:noFill/>
-        </p:spPr>
-        <p:txBody>
-          <a:bodyPr wrap="none" lIns="0" rIns="0" tIns="0" bIns="0" anchor="t">
-            <a:noAutofit/>
-          </a:bodyPr>
-          <a:lstStyle/>
-          <a:p>
-            <a:pPr algn="ctr"/>
-            <a:r>
-              <a:rPr sz="1100" b="0" i="0">
-                <a:solidFill>
-                  <a:srgbClr val="000000"/>
-                </a:solidFill>
-                <a:latin typeface="Arial"/>
-              </a:rPr>
-              <a:t>Ours</a:t>
-            </a:r>
-          </a:p>
-        </p:txBody>
-      </p:sp>
-      <p:sp>
-        <p:nvSpPr>
-          <p:cNvPr id="16" name="TextBox 15"/>
-          <p:cNvSpPr txBox="1"/>
-          <p:nvPr/>
-        </p:nvSpPr>
-        <p:spPr>
-          <a:xfrm rot="16200000">
-            <a:off x="361966" y="2073038"/>
-            <a:ext cx="589788" cy="142875"/>
-          </a:xfrm>
-          <a:prstGeom prst="rect">
-            <a:avLst/>
-          </a:prstGeom>
-          <a:noFill/>
-        </p:spPr>
-        <p:txBody>
-          <a:bodyPr wrap="none" lIns="0" rIns="0" tIns="0" bIns="0" anchor="t">
-            <a:noAutofit/>
-          </a:bodyPr>
-          <a:lstStyle/>
-          <a:p>
-            <a:pPr algn="ctr"/>
-            <a:r>
-              <a:rPr sz="900" b="0" i="0">
-                <a:solidFill>
-                  <a:srgbClr val="000000"/>
-                </a:solidFill>
-                <a:latin typeface="Arial"/>
-              </a:rPr>
-              <a:t>LAX view 2</a:t>
-            </a:r>
-          </a:p>
-        </p:txBody>
-      </p:sp>
-      <p:sp>
-        <p:nvSpPr>
-          <p:cNvPr id="17" name="TextBox 16"/>
-          <p:cNvSpPr txBox="1"/>
-          <p:nvPr/>
-        </p:nvSpPr>
-        <p:spPr>
-          <a:xfrm>
-            <a:off x="3336108" y="2167916"/>
-            <a:ext cx="131397" cy="127000"/>
-          </a:xfrm>
-          <a:prstGeom prst="rect">
-            <a:avLst/>
-          </a:prstGeom>
-          <a:noFill/>
-        </p:spPr>
-        <p:txBody>
-          <a:bodyPr wrap="none" lIns="0" rIns="0" tIns="0" bIns="0" anchor="t">
-            <a:noAutofit/>
-          </a:bodyPr>
-          <a:lstStyle/>
-          <a:p>
-            <a:pPr algn="r"/>
-            <a:r>
-              <a:rPr sz="800" b="0" i="0">
-                <a:solidFill>
-                  <a:srgbClr val="000000"/>
-                </a:solidFill>
-                <a:latin typeface="Arial"/>
-              </a:rPr>
-              <a:t>80</a:t>
-            </a:r>
-          </a:p>
-        </p:txBody>
-      </p:sp>
-      <p:sp>
-        <p:nvSpPr>
-          <p:cNvPr id="18" name="TextBox 17"/>
-          <p:cNvSpPr txBox="1"/>
-          <p:nvPr/>
-        </p:nvSpPr>
-        <p:spPr>
-          <a:xfrm>
-            <a:off x="3279553" y="1770387"/>
-            <a:ext cx="187952" cy="127000"/>
-          </a:xfrm>
-          <a:prstGeom prst="rect">
-            <a:avLst/>
-          </a:prstGeom>
-          <a:noFill/>
-        </p:spPr>
-        <p:txBody>
-          <a:bodyPr wrap="none" lIns="0" rIns="0" tIns="0" bIns="0" anchor="t">
-            <a:noAutofit/>
-          </a:bodyPr>
-          <a:lstStyle/>
-          <a:p>
-            <a:pPr algn="r"/>
-            <a:r>
-              <a:rPr sz="800" b="0" i="0">
-                <a:solidFill>
-                  <a:srgbClr val="000000"/>
-                </a:solidFill>
-                <a:latin typeface="Arial"/>
-              </a:rPr>
-              <a:t>100</a:t>
-            </a:r>
-          </a:p>
-        </p:txBody>
-      </p:sp>
-      <p:sp>
-        <p:nvSpPr>
-          <p:cNvPr id="19" name="TextBox 18"/>
-          <p:cNvSpPr txBox="1"/>
-          <p:nvPr/>
-        </p:nvSpPr>
-        <p:spPr>
-          <a:xfrm>
-            <a:off x="3279553" y="1372857"/>
-            <a:ext cx="187952" cy="127000"/>
-          </a:xfrm>
-          <a:prstGeom prst="rect">
-            <a:avLst/>
-          </a:prstGeom>
-          <a:noFill/>
-        </p:spPr>
-        <p:txBody>
-          <a:bodyPr wrap="none" lIns="0" rIns="0" tIns="0" bIns="0" anchor="t">
-            <a:noAutofit/>
-          </a:bodyPr>
-          <a:lstStyle/>
-          <a:p>
-            <a:pPr algn="r"/>
-            <a:r>
-              <a:rPr sz="800" b="0" i="0">
-                <a:solidFill>
-                  <a:srgbClr val="000000"/>
-                </a:solidFill>
-                <a:latin typeface="Arial"/>
-              </a:rPr>
-              <a:t>120</a:t>
-            </a:r>
-          </a:p>
-        </p:txBody>
-      </p:sp>
-      <p:sp>
-        <p:nvSpPr>
-          <p:cNvPr id="20" name="TextBox 19"/>
-          <p:cNvSpPr txBox="1"/>
-          <p:nvPr/>
-        </p:nvSpPr>
-        <p:spPr>
-          <a:xfrm>
-            <a:off x="3279553" y="975327"/>
-            <a:ext cx="187952" cy="127000"/>
-          </a:xfrm>
-          <a:prstGeom prst="rect">
-            <a:avLst/>
-          </a:prstGeom>
-          <a:noFill/>
-        </p:spPr>
-        <p:txBody>
-          <a:bodyPr wrap="none" lIns="0" rIns="0" tIns="0" bIns="0" anchor="t">
-            <a:noAutofit/>
-          </a:bodyPr>
-          <a:lstStyle/>
-          <a:p>
-            <a:pPr algn="r"/>
-            <a:r>
-              <a:rPr sz="800" b="0" i="0">
-                <a:solidFill>
-                  <a:srgbClr val="000000"/>
-                </a:solidFill>
-                <a:latin typeface="Arial"/>
-              </a:rPr>
-              <a:t>140</a:t>
-            </a:r>
-          </a:p>
-        </p:txBody>
-      </p:sp>
-      <p:sp>
-        <p:nvSpPr>
-          <p:cNvPr id="21" name="TextBox 20"/>
-          <p:cNvSpPr txBox="1"/>
-          <p:nvPr/>
-        </p:nvSpPr>
-        <p:spPr>
-          <a:xfrm rot="16200000">
-            <a:off x="2771768" y="1582026"/>
-            <a:ext cx="816800" cy="142875"/>
-          </a:xfrm>
-          <a:prstGeom prst="rect">
-            <a:avLst/>
-          </a:prstGeom>
-          <a:noFill/>
-        </p:spPr>
-        <p:txBody>
-          <a:bodyPr wrap="none" lIns="0" rIns="0" tIns="0" bIns="0" anchor="t">
-            <a:noAutofit/>
-          </a:bodyPr>
-          <a:lstStyle/>
-          <a:p>
-            <a:pPr algn="ctr"/>
-            <a:r>
-              <a:rPr sz="900" b="0" i="0">
-                <a:solidFill>
-                  <a:srgbClr val="000000"/>
-                </a:solidFill>
-                <a:latin typeface="Arial"/>
-              </a:rPr>
-              <a:t>LV volume (mL)</a:t>
-            </a:r>
-          </a:p>
-        </p:txBody>
-      </p:sp>
-      <p:sp>
-        <p:nvSpPr>
-          <p:cNvPr id="22" name="TextBox 21"/>
-          <p:cNvSpPr txBox="1"/>
-          <p:nvPr/>
-        </p:nvSpPr>
-        <p:spPr>
-          <a:xfrm>
-            <a:off x="5969782" y="283924"/>
-            <a:ext cx="1166447" cy="158750"/>
-          </a:xfrm>
-          <a:prstGeom prst="rect">
-            <a:avLst/>
-          </a:prstGeom>
-          <a:noFill/>
-        </p:spPr>
-        <p:txBody>
-          <a:bodyPr wrap="none" lIns="0" rIns="0" tIns="0" bIns="0" anchor="t">
-            <a:noAutofit/>
-          </a:bodyPr>
-          <a:lstStyle/>
-          <a:p>
-            <a:pPr algn="ctr"/>
-            <a:r>
-              <a:rPr sz="1000" b="0" i="0">
-                <a:solidFill>
-                  <a:srgbClr val="000000"/>
-                </a:solidFill>
-                <a:latin typeface="Arial"/>
-              </a:rPr>
-              <a:t>LV volume over time</a:t>
-            </a:r>
-          </a:p>
-        </p:txBody>
-      </p:sp>
-      <p:sp>
-        <p:nvSpPr>
-          <p:cNvPr id="23" name="TextBox 22"/>
-          <p:cNvSpPr txBox="1"/>
-          <p:nvPr/>
-        </p:nvSpPr>
-        <p:spPr>
-          <a:xfrm>
-            <a:off x="5148306" y="477043"/>
-            <a:ext cx="543552" cy="127000"/>
-          </a:xfrm>
-          <a:prstGeom prst="rect">
-            <a:avLst/>
-          </a:prstGeom>
-          <a:noFill/>
-        </p:spPr>
-        <p:txBody>
-          <a:bodyPr wrap="none" lIns="0" rIns="0" tIns="0" bIns="0" anchor="t">
-            <a:noAutofit/>
-          </a:bodyPr>
-          <a:lstStyle/>
-          <a:p>
-            <a:pPr algn="l"/>
-            <a:r>
-              <a:rPr sz="800" b="0" i="0">
-                <a:solidFill>
-                  <a:srgbClr val="000000"/>
-                </a:solidFill>
-                <a:latin typeface="Arial"/>
-              </a:rPr>
-              <a:t>Naive stack</a:t>
-            </a:r>
-          </a:p>
-        </p:txBody>
-      </p:sp>
-      <p:sp>
-        <p:nvSpPr>
-          <p:cNvPr id="24" name="TextBox 23"/>
-          <p:cNvSpPr txBox="1"/>
-          <p:nvPr/>
-        </p:nvSpPr>
-        <p:spPr>
-          <a:xfrm>
-            <a:off x="6161250" y="477043"/>
-            <a:ext cx="238553" cy="127000"/>
-          </a:xfrm>
-          <a:prstGeom prst="rect">
-            <a:avLst/>
-          </a:prstGeom>
-          <a:noFill/>
-        </p:spPr>
-        <p:txBody>
-          <a:bodyPr wrap="none" lIns="0" rIns="0" tIns="0" bIns="0" anchor="t">
-            <a:noAutofit/>
-          </a:bodyPr>
-          <a:lstStyle/>
-          <a:p>
-            <a:pPr algn="l"/>
-            <a:r>
-              <a:rPr sz="800" b="0" i="0">
-                <a:solidFill>
-                  <a:srgbClr val="000000"/>
-                </a:solidFill>
-                <a:latin typeface="Arial"/>
-              </a:rPr>
-              <a:t>Ours</a:t>
-            </a:r>
-          </a:p>
-        </p:txBody>
-      </p:sp>
-      <p:sp>
-        <p:nvSpPr>
-          <p:cNvPr id="25" name="TextBox 24"/>
-          <p:cNvSpPr txBox="1"/>
-          <p:nvPr/>
-        </p:nvSpPr>
-        <p:spPr>
-          <a:xfrm>
-            <a:off x="6869196" y="477043"/>
-            <a:ext cx="1391277" cy="127000"/>
-          </a:xfrm>
-          <a:prstGeom prst="rect">
-            <a:avLst/>
-          </a:prstGeom>
-          <a:noFill/>
-        </p:spPr>
-        <p:txBody>
-          <a:bodyPr wrap="none" lIns="0" rIns="0" tIns="0" bIns="0" anchor="t">
-            <a:noAutofit/>
-          </a:bodyPr>
-          <a:lstStyle/>
-          <a:p>
-            <a:pPr algn="l"/>
-            <a:r>
-              <a:rPr sz="800" b="0" i="0">
-                <a:solidFill>
-                  <a:srgbClr val="000000"/>
-                </a:solidFill>
-                <a:latin typeface="Arial"/>
-              </a:rPr>
-              <a:t>Ours, reference slice excluded</a:t>
-            </a:r>
-          </a:p>
-        </p:txBody>
-      </p:sp>
-      <p:sp>
-        <p:nvSpPr>
-          <p:cNvPr id="26" name="TextBox 25"/>
-          <p:cNvSpPr txBox="1"/>
-          <p:nvPr/>
-        </p:nvSpPr>
-        <p:spPr>
-          <a:xfrm rot="16200000">
-            <a:off x="323832" y="3248445"/>
-            <a:ext cx="589788" cy="142875"/>
-          </a:xfrm>
-          <a:prstGeom prst="rect">
-            <a:avLst/>
-          </a:prstGeom>
-          <a:noFill/>
-        </p:spPr>
-        <p:txBody>
-          <a:bodyPr wrap="none" lIns="0" rIns="0" tIns="0" bIns="0" anchor="t">
-            <a:noAutofit/>
-          </a:bodyPr>
-          <a:lstStyle/>
-          <a:p>
-            <a:pPr algn="ctr"/>
-            <a:r>
-              <a:rPr sz="900" b="0" i="0">
-                <a:solidFill>
-                  <a:srgbClr val="000000"/>
-                </a:solidFill>
-                <a:latin typeface="Arial"/>
-              </a:rPr>
-              <a:t>LAX view 1</a:t>
-            </a:r>
-          </a:p>
-        </p:txBody>
-      </p:sp>
-      <p:sp>
-        <p:nvSpPr>
-          <p:cNvPr id="27" name="TextBox 26"/>
-          <p:cNvSpPr txBox="1"/>
-          <p:nvPr/>
-        </p:nvSpPr>
-        <p:spPr>
-          <a:xfrm rot="16200000">
-            <a:off x="64635" y="3712635"/>
-            <a:ext cx="597328" cy="158750"/>
-          </a:xfrm>
-          <a:prstGeom prst="rect">
-            <a:avLst/>
-          </a:prstGeom>
-          <a:noFill/>
-        </p:spPr>
-        <p:txBody>
-          <a:bodyPr wrap="none" lIns="0" rIns="0" tIns="0" bIns="0" anchor="t">
-            <a:noAutofit/>
-          </a:bodyPr>
-          <a:lstStyle/>
-          <a:p>
-            <a:pPr algn="ctr"/>
-            <a:r>
-              <a:rPr sz="1000" b="0" i="0">
-                <a:solidFill>
-                  <a:srgbClr val="000000"/>
-                </a:solidFill>
-                <a:latin typeface="Arial"/>
-              </a:rPr>
               <a:t>AF patient</a:t>
-            </a:r>
-          </a:p>
-        </p:txBody>
-      </p:sp>
-      <p:sp>
-        <p:nvSpPr>
-          <p:cNvPr id="28" name="TextBox 27"/>
-          <p:cNvSpPr txBox="1"/>
-          <p:nvPr/>
-        </p:nvSpPr>
-        <p:spPr>
-          <a:xfrm rot="16200000">
-            <a:off x="323832" y="4230470"/>
-            <a:ext cx="589788" cy="142875"/>
-          </a:xfrm>
-          <a:prstGeom prst="rect">
-            <a:avLst/>
-          </a:prstGeom>
-          <a:noFill/>
-        </p:spPr>
-        <p:txBody>
-          <a:bodyPr wrap="none" lIns="0" rIns="0" tIns="0" bIns="0" anchor="t">
-            <a:noAutofit/>
-          </a:bodyPr>
-          <a:lstStyle/>
-          <a:p>
-            <a:pPr algn="ctr"/>
-            <a:r>
-              <a:rPr sz="900" b="0" i="0">
-                <a:solidFill>
-                  <a:srgbClr val="000000"/>
-                </a:solidFill>
-                <a:latin typeface="Arial"/>
-              </a:rPr>
-              <a:t>LAX view 2</a:t>
-            </a:r>
-          </a:p>
-        </p:txBody>
-      </p:sp>
-      <p:sp>
-        <p:nvSpPr>
-          <p:cNvPr id="29" name="TextBox 28"/>
-          <p:cNvSpPr txBox="1"/>
-          <p:nvPr/>
-        </p:nvSpPr>
-        <p:spPr>
-          <a:xfrm>
-            <a:off x="3476618" y="4834161"/>
-            <a:ext cx="159575" cy="127000"/>
-          </a:xfrm>
-          <a:prstGeom prst="rect">
-            <a:avLst/>
-          </a:prstGeom>
-          <a:noFill/>
-        </p:spPr>
-        <p:txBody>
-          <a:bodyPr wrap="none" lIns="0" rIns="0" tIns="0" bIns="0" anchor="t">
-            <a:noAutofit/>
-          </a:bodyPr>
-          <a:lstStyle/>
-          <a:p>
-            <a:pPr algn="ctr"/>
-            <a:r>
-              <a:rPr sz="800" b="0" i="0">
-                <a:solidFill>
-                  <a:srgbClr val="000000"/>
-                </a:solidFill>
-                <a:latin typeface="Arial"/>
-              </a:rPr>
-              <a:t>0.0</a:t>
-            </a:r>
-          </a:p>
-        </p:txBody>
-      </p:sp>
-      <p:sp>
-        <p:nvSpPr>
-          <p:cNvPr id="30" name="TextBox 29"/>
-          <p:cNvSpPr txBox="1"/>
-          <p:nvPr/>
-        </p:nvSpPr>
-        <p:spPr>
-          <a:xfrm>
-            <a:off x="4142529" y="4834161"/>
-            <a:ext cx="159575" cy="127000"/>
-          </a:xfrm>
-          <a:prstGeom prst="rect">
-            <a:avLst/>
-          </a:prstGeom>
-          <a:noFill/>
-        </p:spPr>
-        <p:txBody>
-          <a:bodyPr wrap="none" lIns="0" rIns="0" tIns="0" bIns="0" anchor="t">
-            <a:noAutofit/>
-          </a:bodyPr>
-          <a:lstStyle/>
-          <a:p>
-            <a:pPr algn="ctr"/>
-            <a:r>
-              <a:rPr sz="800" b="0" i="0">
-                <a:solidFill>
-                  <a:srgbClr val="000000"/>
-                </a:solidFill>
-                <a:latin typeface="Arial"/>
-              </a:rPr>
-              <a:t>0.5</a:t>
-            </a:r>
-          </a:p>
-        </p:txBody>
-      </p:sp>
-      <p:sp>
-        <p:nvSpPr>
-          <p:cNvPr id="31" name="TextBox 30"/>
-          <p:cNvSpPr txBox="1"/>
-          <p:nvPr/>
-        </p:nvSpPr>
-        <p:spPr>
-          <a:xfrm>
-            <a:off x="4808440" y="4834161"/>
-            <a:ext cx="159575" cy="127000"/>
-          </a:xfrm>
-          <a:prstGeom prst="rect">
-            <a:avLst/>
-          </a:prstGeom>
-          <a:noFill/>
-        </p:spPr>
-        <p:txBody>
-          <a:bodyPr wrap="none" lIns="0" rIns="0" tIns="0" bIns="0" anchor="t">
-            <a:noAutofit/>
-          </a:bodyPr>
-          <a:lstStyle/>
-          <a:p>
-            <a:pPr algn="ctr"/>
-            <a:r>
-              <a:rPr sz="800" b="0" i="0">
-                <a:solidFill>
-                  <a:srgbClr val="000000"/>
-                </a:solidFill>
-                <a:latin typeface="Arial"/>
-              </a:rPr>
-              <a:t>1.0</a:t>
-            </a:r>
-          </a:p>
-        </p:txBody>
-      </p:sp>
-      <p:sp>
-        <p:nvSpPr>
-          <p:cNvPr id="32" name="TextBox 31"/>
-          <p:cNvSpPr txBox="1"/>
-          <p:nvPr/>
-        </p:nvSpPr>
-        <p:spPr>
-          <a:xfrm>
-            <a:off x="5474351" y="4834161"/>
-            <a:ext cx="159575" cy="127000"/>
-          </a:xfrm>
-          <a:prstGeom prst="rect">
-            <a:avLst/>
-          </a:prstGeom>
-          <a:noFill/>
-        </p:spPr>
-        <p:txBody>
-          <a:bodyPr wrap="none" lIns="0" rIns="0" tIns="0" bIns="0" anchor="t">
-            <a:noAutofit/>
-          </a:bodyPr>
-          <a:lstStyle/>
-          <a:p>
-            <a:pPr algn="ctr"/>
-            <a:r>
-              <a:rPr sz="800" b="0" i="0">
-                <a:solidFill>
-                  <a:srgbClr val="000000"/>
-                </a:solidFill>
-                <a:latin typeface="Arial"/>
-              </a:rPr>
-              <a:t>1.5</a:t>
-            </a:r>
-          </a:p>
-        </p:txBody>
-      </p:sp>
-      <p:sp>
-        <p:nvSpPr>
-          <p:cNvPr id="33" name="TextBox 32"/>
-          <p:cNvSpPr txBox="1"/>
-          <p:nvPr/>
-        </p:nvSpPr>
-        <p:spPr>
-          <a:xfrm>
-            <a:off x="6140262" y="4834161"/>
-            <a:ext cx="159575" cy="127000"/>
-          </a:xfrm>
-          <a:prstGeom prst="rect">
-            <a:avLst/>
-          </a:prstGeom>
-          <a:noFill/>
-        </p:spPr>
-        <p:txBody>
-          <a:bodyPr wrap="none" lIns="0" rIns="0" tIns="0" bIns="0" anchor="t">
-            <a:noAutofit/>
-          </a:bodyPr>
-          <a:lstStyle/>
-          <a:p>
-            <a:pPr algn="ctr"/>
-            <a:r>
-              <a:rPr sz="800" b="0" i="0">
-                <a:solidFill>
-                  <a:srgbClr val="000000"/>
-                </a:solidFill>
-                <a:latin typeface="Arial"/>
-              </a:rPr>
-              <a:t>2.0</a:t>
-            </a:r>
-          </a:p>
-        </p:txBody>
-      </p:sp>
-      <p:sp>
-        <p:nvSpPr>
-          <p:cNvPr id="34" name="TextBox 33"/>
-          <p:cNvSpPr txBox="1"/>
-          <p:nvPr/>
-        </p:nvSpPr>
-        <p:spPr>
-          <a:xfrm>
-            <a:off x="6806174" y="4834161"/>
-            <a:ext cx="159575" cy="127000"/>
-          </a:xfrm>
-          <a:prstGeom prst="rect">
-            <a:avLst/>
-          </a:prstGeom>
-          <a:noFill/>
-        </p:spPr>
-        <p:txBody>
-          <a:bodyPr wrap="none" lIns="0" rIns="0" tIns="0" bIns="0" anchor="t">
-            <a:noAutofit/>
-          </a:bodyPr>
-          <a:lstStyle/>
-          <a:p>
-            <a:pPr algn="ctr"/>
-            <a:r>
-              <a:rPr sz="800" b="0" i="0">
-                <a:solidFill>
-                  <a:srgbClr val="000000"/>
-                </a:solidFill>
-                <a:latin typeface="Arial"/>
-              </a:rPr>
-              <a:t>2.5</a:t>
-            </a:r>
-          </a:p>
-        </p:txBody>
-      </p:sp>
-      <p:sp>
-        <p:nvSpPr>
-          <p:cNvPr id="35" name="TextBox 34"/>
-          <p:cNvSpPr txBox="1"/>
-          <p:nvPr/>
-        </p:nvSpPr>
-        <p:spPr>
-          <a:xfrm>
-            <a:off x="7472085" y="4834161"/>
-            <a:ext cx="159575" cy="127000"/>
-          </a:xfrm>
-          <a:prstGeom prst="rect">
-            <a:avLst/>
-          </a:prstGeom>
-          <a:noFill/>
-        </p:spPr>
-        <p:txBody>
-          <a:bodyPr wrap="none" lIns="0" rIns="0" tIns="0" bIns="0" anchor="t">
-            <a:noAutofit/>
-          </a:bodyPr>
-          <a:lstStyle/>
-          <a:p>
-            <a:pPr algn="ctr"/>
-            <a:r>
-              <a:rPr sz="800" b="0" i="0">
-                <a:solidFill>
-                  <a:srgbClr val="000000"/>
-                </a:solidFill>
-                <a:latin typeface="Arial"/>
-              </a:rPr>
-              <a:t>3.0</a:t>
-            </a:r>
-          </a:p>
-        </p:txBody>
-      </p:sp>
-      <p:sp>
-        <p:nvSpPr>
-          <p:cNvPr id="36" name="TextBox 35"/>
-          <p:cNvSpPr txBox="1"/>
-          <p:nvPr/>
-        </p:nvSpPr>
-        <p:spPr>
-          <a:xfrm>
-            <a:off x="8137996" y="4834161"/>
-            <a:ext cx="159575" cy="127000"/>
-          </a:xfrm>
-          <a:prstGeom prst="rect">
-            <a:avLst/>
-          </a:prstGeom>
-          <a:noFill/>
-        </p:spPr>
-        <p:txBody>
-          <a:bodyPr wrap="none" lIns="0" rIns="0" tIns="0" bIns="0" anchor="t">
-            <a:noAutofit/>
-          </a:bodyPr>
-          <a:lstStyle/>
-          <a:p>
-            <a:pPr algn="ctr"/>
-            <a:r>
-              <a:rPr sz="800" b="0" i="0">
-                <a:solidFill>
-                  <a:srgbClr val="000000"/>
-                </a:solidFill>
-                <a:latin typeface="Arial"/>
-              </a:rPr>
-              <a:t>3.5</a:t>
-            </a:r>
-          </a:p>
-        </p:txBody>
-      </p:sp>
-      <p:sp>
-        <p:nvSpPr>
-          <p:cNvPr id="37" name="TextBox 36"/>
-          <p:cNvSpPr txBox="1"/>
-          <p:nvPr/>
-        </p:nvSpPr>
-        <p:spPr>
-          <a:xfrm>
-            <a:off x="8803907" y="4834161"/>
-            <a:ext cx="159575" cy="127000"/>
-          </a:xfrm>
-          <a:prstGeom prst="rect">
-            <a:avLst/>
-          </a:prstGeom>
-          <a:noFill/>
-        </p:spPr>
-        <p:txBody>
-          <a:bodyPr wrap="none" lIns="0" rIns="0" tIns="0" bIns="0" anchor="t">
-            <a:noAutofit/>
-          </a:bodyPr>
-          <a:lstStyle/>
-          <a:p>
-            <a:pPr algn="ctr"/>
-            <a:r>
-              <a:rPr sz="800" b="0" i="0">
-                <a:solidFill>
-                  <a:srgbClr val="000000"/>
-                </a:solidFill>
-                <a:latin typeface="Arial"/>
-              </a:rPr>
-              <a:t>4.0</a:t>
-            </a:r>
-          </a:p>
-        </p:txBody>
-      </p:sp>
-      <p:sp>
-        <p:nvSpPr>
-          <p:cNvPr id="38" name="TextBox 37"/>
-          <p:cNvSpPr txBox="1"/>
-          <p:nvPr/>
-        </p:nvSpPr>
-        <p:spPr>
-          <a:xfrm>
-            <a:off x="9469818" y="4834161"/>
-            <a:ext cx="159575" cy="127000"/>
-          </a:xfrm>
-          <a:prstGeom prst="rect">
-            <a:avLst/>
-          </a:prstGeom>
-          <a:noFill/>
-        </p:spPr>
-        <p:txBody>
-          <a:bodyPr wrap="none" lIns="0" rIns="0" tIns="0" bIns="0" anchor="t">
-            <a:noAutofit/>
-          </a:bodyPr>
-          <a:lstStyle/>
-          <a:p>
-            <a:pPr algn="ctr"/>
-            <a:r>
-              <a:rPr sz="800" b="0" i="0">
-                <a:solidFill>
-                  <a:srgbClr val="000000"/>
-                </a:solidFill>
-                <a:latin typeface="Arial"/>
-              </a:rPr>
-              <a:t>4.5</a:t>
-            </a:r>
-          </a:p>
-        </p:txBody>
-      </p:sp>
-      <p:sp>
-        <p:nvSpPr>
-          <p:cNvPr id="39" name="TextBox 38"/>
-          <p:cNvSpPr txBox="1"/>
-          <p:nvPr/>
-        </p:nvSpPr>
-        <p:spPr>
-          <a:xfrm>
-            <a:off x="6353362" y="4975647"/>
-            <a:ext cx="399288" cy="142875"/>
-          </a:xfrm>
-          <a:prstGeom prst="rect">
-            <a:avLst/>
-          </a:prstGeom>
-          <a:noFill/>
-        </p:spPr>
-        <p:txBody>
-          <a:bodyPr wrap="none" lIns="0" rIns="0" tIns="0" bIns="0" anchor="t">
-            <a:noAutofit/>
-          </a:bodyPr>
-          <a:lstStyle/>
-          <a:p>
-            <a:pPr algn="ctr"/>
-            <a:r>
-              <a:rPr sz="900" b="0" i="0">
-                <a:solidFill>
-                  <a:srgbClr val="000000"/>
-                </a:solidFill>
-                <a:latin typeface="Arial"/>
-              </a:rPr>
-              <a:t>time (s)</a:t>
-            </a:r>
-          </a:p>
-        </p:txBody>
-      </p:sp>
-      <p:sp>
-        <p:nvSpPr>
-          <p:cNvPr id="40" name="TextBox 39"/>
-          <p:cNvSpPr txBox="1"/>
-          <p:nvPr/>
-        </p:nvSpPr>
-        <p:spPr>
-          <a:xfrm>
-            <a:off x="3336108" y="4471318"/>
-            <a:ext cx="131397" cy="127000"/>
-          </a:xfrm>
-          <a:prstGeom prst="rect">
-            <a:avLst/>
-          </a:prstGeom>
-          <a:noFill/>
-        </p:spPr>
-        <p:txBody>
-          <a:bodyPr wrap="none" lIns="0" rIns="0" tIns="0" bIns="0" anchor="t">
-            <a:noAutofit/>
-          </a:bodyPr>
-          <a:lstStyle/>
-          <a:p>
-            <a:pPr algn="r"/>
-            <a:r>
-              <a:rPr sz="800" b="0" i="0">
-                <a:solidFill>
-                  <a:srgbClr val="000000"/>
-                </a:solidFill>
-                <a:latin typeface="Arial"/>
-              </a:rPr>
-              <a:t>80</a:t>
-            </a:r>
-          </a:p>
-        </p:txBody>
-      </p:sp>
-      <p:sp>
-        <p:nvSpPr>
-          <p:cNvPr id="41" name="TextBox 40"/>
-          <p:cNvSpPr txBox="1"/>
-          <p:nvPr/>
-        </p:nvSpPr>
-        <p:spPr>
-          <a:xfrm>
-            <a:off x="3279553" y="4204537"/>
-            <a:ext cx="187952" cy="127000"/>
-          </a:xfrm>
-          <a:prstGeom prst="rect">
-            <a:avLst/>
-          </a:prstGeom>
-          <a:noFill/>
-        </p:spPr>
-        <p:txBody>
-          <a:bodyPr wrap="none" lIns="0" rIns="0" tIns="0" bIns="0" anchor="t">
-            <a:noAutofit/>
-          </a:bodyPr>
-          <a:lstStyle/>
-          <a:p>
-            <a:pPr algn="r"/>
-            <a:r>
-              <a:rPr sz="800" b="0" i="0">
-                <a:solidFill>
-                  <a:srgbClr val="000000"/>
-                </a:solidFill>
-                <a:latin typeface="Arial"/>
-              </a:rPr>
-              <a:t>100</a:t>
-            </a:r>
-          </a:p>
-        </p:txBody>
-      </p:sp>
-      <p:sp>
-        <p:nvSpPr>
-          <p:cNvPr id="42" name="TextBox 41"/>
-          <p:cNvSpPr txBox="1"/>
-          <p:nvPr/>
-        </p:nvSpPr>
-        <p:spPr>
-          <a:xfrm>
-            <a:off x="3279553" y="3937755"/>
-            <a:ext cx="187952" cy="127000"/>
-          </a:xfrm>
-          <a:prstGeom prst="rect">
-            <a:avLst/>
-          </a:prstGeom>
-          <a:noFill/>
-        </p:spPr>
-        <p:txBody>
-          <a:bodyPr wrap="none" lIns="0" rIns="0" tIns="0" bIns="0" anchor="t">
-            <a:noAutofit/>
-          </a:bodyPr>
-          <a:lstStyle/>
-          <a:p>
-            <a:pPr algn="r"/>
-            <a:r>
-              <a:rPr sz="800" b="0" i="0">
-                <a:solidFill>
-                  <a:srgbClr val="000000"/>
-                </a:solidFill>
-                <a:latin typeface="Arial"/>
-              </a:rPr>
-              <a:t>120</a:t>
-            </a:r>
-          </a:p>
-        </p:txBody>
-      </p:sp>
-      <p:sp>
-        <p:nvSpPr>
-          <p:cNvPr id="43" name="TextBox 42"/>
-          <p:cNvSpPr txBox="1"/>
-          <p:nvPr/>
-        </p:nvSpPr>
-        <p:spPr>
-          <a:xfrm>
-            <a:off x="3279553" y="3670973"/>
-            <a:ext cx="187952" cy="127000"/>
-          </a:xfrm>
-          <a:prstGeom prst="rect">
-            <a:avLst/>
-          </a:prstGeom>
-          <a:noFill/>
-        </p:spPr>
-        <p:txBody>
-          <a:bodyPr wrap="none" lIns="0" rIns="0" tIns="0" bIns="0" anchor="t">
-            <a:noAutofit/>
-          </a:bodyPr>
-          <a:lstStyle/>
-          <a:p>
-            <a:pPr algn="r"/>
-            <a:r>
-              <a:rPr sz="800" b="0" i="0">
-                <a:solidFill>
-                  <a:srgbClr val="000000"/>
-                </a:solidFill>
-                <a:latin typeface="Arial"/>
-              </a:rPr>
-              <a:t>140</a:t>
-            </a:r>
-          </a:p>
-        </p:txBody>
-      </p:sp>
-      <p:sp>
-        <p:nvSpPr>
-          <p:cNvPr id="44" name="TextBox 43"/>
-          <p:cNvSpPr txBox="1"/>
-          <p:nvPr/>
-        </p:nvSpPr>
-        <p:spPr>
-          <a:xfrm>
-            <a:off x="3279553" y="3404192"/>
-            <a:ext cx="187952" cy="127000"/>
-          </a:xfrm>
-          <a:prstGeom prst="rect">
-            <a:avLst/>
-          </a:prstGeom>
-          <a:noFill/>
-        </p:spPr>
-        <p:txBody>
-          <a:bodyPr wrap="none" lIns="0" rIns="0" tIns="0" bIns="0" anchor="t">
-            <a:noAutofit/>
-          </a:bodyPr>
-          <a:lstStyle/>
-          <a:p>
-            <a:pPr algn="r"/>
-            <a:r>
-              <a:rPr sz="800" b="0" i="0">
-                <a:solidFill>
-                  <a:srgbClr val="000000"/>
-                </a:solidFill>
-                <a:latin typeface="Arial"/>
-              </a:rPr>
-              <a:t>160</a:t>
-            </a:r>
-          </a:p>
-        </p:txBody>
-      </p:sp>
-      <p:sp>
-        <p:nvSpPr>
-          <p:cNvPr id="45" name="TextBox 44"/>
-          <p:cNvSpPr txBox="1"/>
-          <p:nvPr/>
-        </p:nvSpPr>
-        <p:spPr>
-          <a:xfrm>
-            <a:off x="3279553" y="3137410"/>
-            <a:ext cx="187952" cy="127000"/>
-          </a:xfrm>
-          <a:prstGeom prst="rect">
-            <a:avLst/>
-          </a:prstGeom>
-          <a:noFill/>
-        </p:spPr>
-        <p:txBody>
-          <a:bodyPr wrap="none" lIns="0" rIns="0" tIns="0" bIns="0" anchor="t">
-            <a:noAutofit/>
-          </a:bodyPr>
-          <a:lstStyle/>
-          <a:p>
-            <a:pPr algn="r"/>
-            <a:r>
-              <a:rPr sz="800" b="0" i="0">
-                <a:solidFill>
-                  <a:srgbClr val="000000"/>
-                </a:solidFill>
-                <a:latin typeface="Arial"/>
-              </a:rPr>
-              <a:t>180</a:t>
-            </a:r>
-          </a:p>
-        </p:txBody>
-      </p:sp>
-      <p:sp>
-        <p:nvSpPr>
-          <p:cNvPr id="46" name="TextBox 45"/>
-          <p:cNvSpPr txBox="1"/>
-          <p:nvPr/>
-        </p:nvSpPr>
-        <p:spPr>
-          <a:xfrm>
-            <a:off x="3279553" y="2870629"/>
-            <a:ext cx="187952" cy="127000"/>
-          </a:xfrm>
-          <a:prstGeom prst="rect">
-            <a:avLst/>
-          </a:prstGeom>
-          <a:noFill/>
-        </p:spPr>
-        <p:txBody>
-          <a:bodyPr wrap="none" lIns="0" rIns="0" tIns="0" bIns="0" anchor="t">
-            <a:noAutofit/>
-          </a:bodyPr>
-          <a:lstStyle/>
-          <a:p>
-            <a:pPr algn="r"/>
-            <a:r>
-              <a:rPr sz="800" b="0" i="0">
-                <a:solidFill>
-                  <a:srgbClr val="000000"/>
-                </a:solidFill>
-                <a:latin typeface="Arial"/>
-              </a:rPr>
-              <a:t>200</a:t>
-            </a:r>
-          </a:p>
-        </p:txBody>
-      </p:sp>
-      <p:sp>
-        <p:nvSpPr>
-          <p:cNvPr id="47" name="TextBox 46"/>
-          <p:cNvSpPr txBox="1"/>
-          <p:nvPr/>
-        </p:nvSpPr>
-        <p:spPr>
-          <a:xfrm rot="16200000">
-            <a:off x="2771768" y="3739458"/>
-            <a:ext cx="816800" cy="142875"/>
-          </a:xfrm>
-          <a:prstGeom prst="rect">
-            <a:avLst/>
-          </a:prstGeom>
-          <a:noFill/>
-        </p:spPr>
-        <p:txBody>
-          <a:bodyPr wrap="none" lIns="0" rIns="0" tIns="0" bIns="0" anchor="t">
-            <a:noAutofit/>
-          </a:bodyPr>
-          <a:lstStyle/>
-          <a:p>
-            <a:pPr algn="ctr"/>
-            <a:r>
-              <a:rPr sz="900" b="0" i="0">
-                <a:solidFill>
-                  <a:srgbClr val="000000"/>
-                </a:solidFill>
-                <a:latin typeface="Arial"/>
-              </a:rPr>
-              <a:t>LV volume (mL)</a:t>
             </a:r>
           </a:p>
         </p:txBody>
